--- a/docs/05-summary/offsite-deck.pptx
+++ b/docs/05-summary/offsite-deck.pptx
@@ -118,7 +118,7 @@
   <p:extLst>
     <p:ext uri="{521415D9-36F7-43E2-AB2F-B90AF26B5E84}">
       <p14:sectionLst xmlns:p14="http://schemas.microsoft.com/office/powerpoint/2010/main">
-        <p14:section name="Offsite" id="{c8ab3764-d6c2-1fa9-09cc-7513477dec05}">
+        <p14:section name="Offsite" id="{c6038c55-56fa-8eb0-82fe-d80fe897b60e}">
           <p14:sldIdLst>
             <p14:sldId id="256"/>
             <p14:sldId id="257"/>
@@ -908,7 +908,7 @@
           <a:p>
             <a:r>
               <a:rPr lang="en-US" dirty="0"/>
-              <a:t>Baseline: 2025 vs 2026, MI tickets excluded. D2, D4, D5 per team need ServiceNow read access (request REQ0120210 pending).</a:t>
+              <a:t>Baseline: 2025 vs 2026, MI tickets excluded. Bold green line = value today (2025 to 2026). D2, D4, D5 per team need ServiceNow read access (request REQ0120210 pending).</a:t>
             </a:r>
             <a:endParaRPr lang="en-US" dirty="0"/>
           </a:p>
@@ -2795,12 +2795,12 @@
         </p:nvSpPr>
         <p:spPr>
           <a:xfrm>
-            <a:off x="548640" y="1463040"/>
-            <a:ext cx="2606040" cy="1737360"/>
+            <a:off x="548640" y="1371600"/>
+            <a:ext cx="2606040" cy="2103120"/>
           </a:xfrm>
           <a:prstGeom prst="roundRect">
             <a:avLst>
-              <a:gd name="adj" fmla="val 4211"/>
+              <a:gd name="adj" fmla="val 3478"/>
             </a:avLst>
           </a:prstGeom>
           <a:solidFill>
@@ -2822,8 +2822,8 @@
         </p:nvSpPr>
         <p:spPr>
           <a:xfrm>
-            <a:off x="777240" y="1645920"/>
-            <a:ext cx="2103120" cy="548640"/>
+            <a:off x="731520" y="1508760"/>
+            <a:ext cx="2286000" cy="411480"/>
           </a:xfrm>
           <a:prstGeom prst="rect">
             <a:avLst/>
@@ -2839,7 +2839,7 @@
               <a:buNone/>
             </a:pPr>
             <a:r>
-              <a:rPr lang="en-US" sz="2800" b="1" dirty="0">
+              <a:rPr lang="en-US" sz="1700" b="1" dirty="0">
                 <a:solidFill>
                   <a:schemeClr val="accent1"/>
                 </a:solidFill>
@@ -2847,9 +2847,20 @@
                 <a:ea typeface="Cambria" pitchFamily="34" charset="-122"/>
                 <a:cs typeface="Cambria" pitchFamily="34" charset="-120"/>
               </a:rPr>
-              <a:t>D1</a:t>
-            </a:r>
-            <a:endParaRPr lang="en-US" sz="2800" dirty="0"/>
+              <a:t>D1  </a:t>
+            </a:r>
+            <a:pPr indent="0" marL="0">
+              <a:buNone/>
+            </a:pPr>
+            <a:r>
+              <a:rPr lang="en-US" sz="1700" b="1" dirty="0">
+                <a:solidFill>
+                  <a:schemeClr val="tx1"/>
+                </a:solidFill>
+              </a:rPr>
+              <a:t>Business correctness</a:t>
+            </a:r>
+            <a:endParaRPr lang="en-US" sz="1700" dirty="0"/>
           </a:p>
         </p:txBody>
       </p:sp>
@@ -2861,8 +2872,8 @@
         </p:nvSpPr>
         <p:spPr>
           <a:xfrm>
-            <a:off x="777240" y="2331720"/>
-            <a:ext cx="2194560" cy="731520"/>
+            <a:off x="731520" y="2011680"/>
+            <a:ext cx="2286000" cy="777240"/>
           </a:xfrm>
           <a:prstGeom prst="rect">
             <a:avLst/>
@@ -2878,31 +2889,67 @@
               <a:buNone/>
             </a:pPr>
             <a:r>
-              <a:rPr lang="en-US" sz="1600" b="1" dirty="0">
+              <a:rPr lang="en-US" sz="1400" dirty="0">
                 <a:solidFill>
                   <a:schemeClr val="tx1"/>
                 </a:solidFill>
               </a:rPr>
-              <a:t>Business correctness</a:t>
-            </a:r>
-            <a:endParaRPr lang="en-US" sz="1600" dirty="0"/>
-          </a:p>
-        </p:txBody>
-      </p:sp>
-      <p:sp>
-        <p:nvSpPr>
-          <p:cNvPr id="7" name="dim-1"/>
+              <a:t>Product does the wrong thing: data, routing, lifecycle</a:t>
+            </a:r>
+            <a:endParaRPr lang="en-US" sz="1400" dirty="0"/>
+          </a:p>
+        </p:txBody>
+      </p:sp>
+      <p:sp>
+        <p:nvSpPr>
+          <p:cNvPr id="7" name="Text 4"/>
+          <p:cNvSpPr txBox="1"/>
+          <p:nvPr/>
+        </p:nvSpPr>
+        <p:spPr>
+          <a:xfrm>
+            <a:off x="731520" y="2834640"/>
+            <a:ext cx="2286000" cy="502920"/>
+          </a:xfrm>
+          <a:prstGeom prst="rect">
+            <a:avLst/>
+          </a:prstGeom>
+          <a:noFill/>
+          <a:ln/>
+        </p:spPr>
+        <p:txBody>
+          <a:bodyPr wrap="square" lIns="0" tIns="0" rIns="0" bIns="0" rtlCol="0" anchor="t"/>
+          <a:lstStyle/>
+          <a:p>
+            <a:pPr indent="0" marL="0">
+              <a:buNone/>
+            </a:pPr>
+            <a:r>
+              <a:rPr lang="en-US" sz="1300" b="1" dirty="0">
+                <a:solidFill>
+                  <a:schemeClr val="accent2"/>
+                </a:solidFill>
+              </a:rPr>
+              <a:t>P1/P2 share 52% to 70%</a:t>
+            </a:r>
+            <a:endParaRPr lang="en-US" sz="1300" dirty="0"/>
+          </a:p>
+        </p:txBody>
+      </p:sp>
+      <p:sp>
+        <p:nvSpPr>
+          <p:cNvPr id="8" name="dim-1"/>
           <p:cNvSpPr/>
           <p:nvPr/>
         </p:nvSpPr>
         <p:spPr>
           <a:xfrm>
-            <a:off x="3355848" y="1463040"/>
-            <a:ext cx="2606040" cy="1737360"/>
+            <a:off x="3355848" y="1371600"/>
+            <a:ext cx="2606040" cy="2103120"/>
           </a:xfrm>
           <a:prstGeom prst="roundRect">
             <a:avLst>
-              <a:gd name="adj" fmla="val 4211"/>
+              <a:gd name="adj" fmla="val 3478"/>
             </a:avLst>
           </a:prstGeom>
           <a:solidFill>
@@ -2918,14 +2965,14 @@
       </p:sp>
       <p:sp>
         <p:nvSpPr>
-          <p:cNvPr id="8" name="Text 5"/>
+          <p:cNvPr id="9" name="Text 6"/>
           <p:cNvSpPr txBox="1"/>
           <p:nvPr/>
         </p:nvSpPr>
         <p:spPr>
           <a:xfrm>
-            <a:off x="3584448" y="1645920"/>
-            <a:ext cx="2103120" cy="548640"/>
+            <a:off x="3538728" y="1508760"/>
+            <a:ext cx="2286000" cy="411480"/>
           </a:xfrm>
           <a:prstGeom prst="rect">
             <a:avLst/>
@@ -2941,7 +2988,7 @@
               <a:buNone/>
             </a:pPr>
             <a:r>
-              <a:rPr lang="en-US" sz="2800" b="1" dirty="0">
+              <a:rPr lang="en-US" sz="1700" b="1" dirty="0">
                 <a:solidFill>
                   <a:schemeClr val="accent1"/>
                 </a:solidFill>
@@ -2949,22 +2996,33 @@
                 <a:ea typeface="Cambria" pitchFamily="34" charset="-122"/>
                 <a:cs typeface="Cambria" pitchFamily="34" charset="-120"/>
               </a:rPr>
-              <a:t>D2</a:t>
-            </a:r>
-            <a:endParaRPr lang="en-US" sz="2800" dirty="0"/>
-          </a:p>
-        </p:txBody>
-      </p:sp>
-      <p:sp>
-        <p:nvSpPr>
-          <p:cNvPr id="9" name="Text 6"/>
+              <a:t>D2  </a:t>
+            </a:r>
+            <a:pPr indent="0" marL="0">
+              <a:buNone/>
+            </a:pPr>
+            <a:r>
+              <a:rPr lang="en-US" sz="1700" b="1" dirty="0">
+                <a:solidFill>
+                  <a:schemeClr val="tx1"/>
+                </a:solidFill>
+              </a:rPr>
+              <a:t>Availability</a:t>
+            </a:r>
+            <a:endParaRPr lang="en-US" sz="1700" dirty="0"/>
+          </a:p>
+        </p:txBody>
+      </p:sp>
+      <p:sp>
+        <p:nvSpPr>
+          <p:cNvPr id="10" name="Text 7"/>
           <p:cNvSpPr txBox="1"/>
           <p:nvPr/>
         </p:nvSpPr>
         <p:spPr>
           <a:xfrm>
-            <a:off x="3584448" y="2331720"/>
-            <a:ext cx="2194560" cy="731520"/>
+            <a:off x="3538728" y="2011680"/>
+            <a:ext cx="2286000" cy="777240"/>
           </a:xfrm>
           <a:prstGeom prst="rect">
             <a:avLst/>
@@ -2980,31 +3038,67 @@
               <a:buNone/>
             </a:pPr>
             <a:r>
-              <a:rPr lang="en-US" sz="1600" b="1" dirty="0">
+              <a:rPr lang="en-US" sz="1400" dirty="0">
                 <a:solidFill>
                   <a:schemeClr val="tx1"/>
                 </a:solidFill>
               </a:rPr>
-              <a:t>Availability</a:t>
-            </a:r>
-            <a:endParaRPr lang="en-US" sz="1600" dirty="0"/>
-          </a:p>
-        </p:txBody>
-      </p:sp>
-      <p:sp>
-        <p:nvSpPr>
-          <p:cNvPr id="10" name="dim-2"/>
+              <a:t>P1 incidents per quarter and customers hit</a:t>
+            </a:r>
+            <a:endParaRPr lang="en-US" sz="1400" dirty="0"/>
+          </a:p>
+        </p:txBody>
+      </p:sp>
+      <p:sp>
+        <p:nvSpPr>
+          <p:cNvPr id="11" name="Text 8"/>
+          <p:cNvSpPr txBox="1"/>
+          <p:nvPr/>
+        </p:nvSpPr>
+        <p:spPr>
+          <a:xfrm>
+            <a:off x="3538728" y="2834640"/>
+            <a:ext cx="2286000" cy="502920"/>
+          </a:xfrm>
+          <a:prstGeom prst="rect">
+            <a:avLst/>
+          </a:prstGeom>
+          <a:noFill/>
+          <a:ln/>
+        </p:spPr>
+        <p:txBody>
+          <a:bodyPr wrap="square" lIns="0" tIns="0" rIns="0" bIns="0" rtlCol="0" anchor="t"/>
+          <a:lstStyle/>
+          <a:p>
+            <a:pPr indent="0" marL="0">
+              <a:buNone/>
+            </a:pPr>
+            <a:r>
+              <a:rPr lang="en-US" sz="1300" b="1" dirty="0">
+                <a:solidFill>
+                  <a:schemeClr val="accent2"/>
+                </a:solidFill>
+              </a:rPr>
+              <a:t>About 150 to 76 (cause open)</a:t>
+            </a:r>
+            <a:endParaRPr lang="en-US" sz="1300" dirty="0"/>
+          </a:p>
+        </p:txBody>
+      </p:sp>
+      <p:sp>
+        <p:nvSpPr>
+          <p:cNvPr id="12" name="dim-2"/>
           <p:cNvSpPr/>
           <p:nvPr/>
         </p:nvSpPr>
         <p:spPr>
           <a:xfrm>
-            <a:off x="6163056" y="1463040"/>
-            <a:ext cx="2606040" cy="1737360"/>
+            <a:off x="6163056" y="1371600"/>
+            <a:ext cx="2606040" cy="2103120"/>
           </a:xfrm>
           <a:prstGeom prst="roundRect">
             <a:avLst>
-              <a:gd name="adj" fmla="val 4211"/>
+              <a:gd name="adj" fmla="val 3478"/>
             </a:avLst>
           </a:prstGeom>
           <a:solidFill>
@@ -3020,14 +3114,14 @@
       </p:sp>
       <p:sp>
         <p:nvSpPr>
-          <p:cNvPr id="11" name="Text 8"/>
+          <p:cNvPr id="13" name="Text 10"/>
           <p:cNvSpPr txBox="1"/>
           <p:nvPr/>
         </p:nvSpPr>
         <p:spPr>
           <a:xfrm>
-            <a:off x="6391656" y="1645920"/>
-            <a:ext cx="2103120" cy="548640"/>
+            <a:off x="6345936" y="1508760"/>
+            <a:ext cx="2286000" cy="411480"/>
           </a:xfrm>
           <a:prstGeom prst="rect">
             <a:avLst/>
@@ -3043,7 +3137,7 @@
               <a:buNone/>
             </a:pPr>
             <a:r>
-              <a:rPr lang="en-US" sz="2800" b="1" dirty="0">
+              <a:rPr lang="en-US" sz="1700" b="1" dirty="0">
                 <a:solidFill>
                   <a:schemeClr val="accent1"/>
                 </a:solidFill>
@@ -3051,22 +3145,33 @@
                 <a:ea typeface="Cambria" pitchFamily="34" charset="-122"/>
                 <a:cs typeface="Cambria" pitchFamily="34" charset="-120"/>
               </a:rPr>
-              <a:t>D3</a:t>
-            </a:r>
-            <a:endParaRPr lang="en-US" sz="2800" dirty="0"/>
-          </a:p>
-        </p:txBody>
-      </p:sp>
-      <p:sp>
-        <p:nvSpPr>
-          <p:cNvPr id="12" name="Text 9"/>
+              <a:t>D3  </a:t>
+            </a:r>
+            <a:pPr indent="0" marL="0">
+              <a:buNone/>
+            </a:pPr>
+            <a:r>
+              <a:rPr lang="en-US" sz="1700" b="1" dirty="0">
+                <a:solidFill>
+                  <a:schemeClr val="tx1"/>
+                </a:solidFill>
+              </a:rPr>
+              <a:t>Performance</a:t>
+            </a:r>
+            <a:endParaRPr lang="en-US" sz="1700" dirty="0"/>
+          </a:p>
+        </p:txBody>
+      </p:sp>
+      <p:sp>
+        <p:nvSpPr>
+          <p:cNvPr id="14" name="Text 11"/>
           <p:cNvSpPr txBox="1"/>
           <p:nvPr/>
         </p:nvSpPr>
         <p:spPr>
           <a:xfrm>
-            <a:off x="6391656" y="2331720"/>
-            <a:ext cx="2194560" cy="731520"/>
+            <a:off x="6345936" y="2011680"/>
+            <a:ext cx="2286000" cy="777240"/>
           </a:xfrm>
           <a:prstGeom prst="rect">
             <a:avLst/>
@@ -3082,31 +3187,67 @@
               <a:buNone/>
             </a:pPr>
             <a:r>
-              <a:rPr lang="en-US" sz="1600" b="1" dirty="0">
+              <a:rPr lang="en-US" sz="1400" dirty="0">
                 <a:solidFill>
                   <a:schemeClr val="tx1"/>
                 </a:solidFill>
               </a:rPr>
-              <a:t>Performance</a:t>
-            </a:r>
-            <a:endParaRPr lang="en-US" sz="1600" dirty="0"/>
-          </a:p>
-        </p:txBody>
-      </p:sp>
-      <p:sp>
-        <p:nvSpPr>
-          <p:cNvPr id="13" name="dim-3"/>
+              <a:t>Slow-system bugs and SLO breaches</a:t>
+            </a:r>
+            <a:endParaRPr lang="en-US" sz="1400" dirty="0"/>
+          </a:p>
+        </p:txBody>
+      </p:sp>
+      <p:sp>
+        <p:nvSpPr>
+          <p:cNvPr id="15" name="Text 12"/>
+          <p:cNvSpPr txBox="1"/>
+          <p:nvPr/>
+        </p:nvSpPr>
+        <p:spPr>
+          <a:xfrm>
+            <a:off x="6345936" y="2834640"/>
+            <a:ext cx="2286000" cy="502920"/>
+          </a:xfrm>
+          <a:prstGeom prst="rect">
+            <a:avLst/>
+          </a:prstGeom>
+          <a:noFill/>
+          <a:ln/>
+        </p:spPr>
+        <p:txBody>
+          <a:bodyPr wrap="square" lIns="0" tIns="0" rIns="0" bIns="0" rtlCol="0" anchor="t"/>
+          <a:lstStyle/>
+          <a:p>
+            <a:pPr indent="0" marL="0">
+              <a:buNone/>
+            </a:pPr>
+            <a:r>
+              <a:rPr lang="en-US" sz="1300" b="1" dirty="0">
+                <a:solidFill>
+                  <a:schemeClr val="accent2"/>
+                </a:solidFill>
+              </a:rPr>
+              <a:t>No SLO data yet</a:t>
+            </a:r>
+            <a:endParaRPr lang="en-US" sz="1300" dirty="0"/>
+          </a:p>
+        </p:txBody>
+      </p:sp>
+      <p:sp>
+        <p:nvSpPr>
+          <p:cNvPr id="16" name="dim-3"/>
           <p:cNvSpPr/>
           <p:nvPr/>
         </p:nvSpPr>
         <p:spPr>
           <a:xfrm>
-            <a:off x="8970264" y="1463040"/>
-            <a:ext cx="2606040" cy="1737360"/>
+            <a:off x="8970264" y="1371600"/>
+            <a:ext cx="2606040" cy="2103120"/>
           </a:xfrm>
           <a:prstGeom prst="roundRect">
             <a:avLst>
-              <a:gd name="adj" fmla="val 4211"/>
+              <a:gd name="adj" fmla="val 3478"/>
             </a:avLst>
           </a:prstGeom>
           <a:solidFill>
@@ -3122,14 +3263,14 @@
       </p:sp>
       <p:sp>
         <p:nvSpPr>
-          <p:cNvPr id="14" name="Text 11"/>
+          <p:cNvPr id="17" name="Text 14"/>
           <p:cNvSpPr txBox="1"/>
           <p:nvPr/>
         </p:nvSpPr>
         <p:spPr>
           <a:xfrm>
-            <a:off x="9198864" y="1645920"/>
-            <a:ext cx="2103120" cy="548640"/>
+            <a:off x="9153144" y="1508760"/>
+            <a:ext cx="2286000" cy="411480"/>
           </a:xfrm>
           <a:prstGeom prst="rect">
             <a:avLst/>
@@ -3145,7 +3286,7 @@
               <a:buNone/>
             </a:pPr>
             <a:r>
-              <a:rPr lang="en-US" sz="2800" b="1" dirty="0">
+              <a:rPr lang="en-US" sz="1700" b="1" dirty="0">
                 <a:solidFill>
                   <a:schemeClr val="accent1"/>
                 </a:solidFill>
@@ -3153,22 +3294,33 @@
                 <a:ea typeface="Cambria" pitchFamily="34" charset="-122"/>
                 <a:cs typeface="Cambria" pitchFamily="34" charset="-120"/>
               </a:rPr>
-              <a:t>D4</a:t>
-            </a:r>
-            <a:endParaRPr lang="en-US" sz="2800" dirty="0"/>
-          </a:p>
-        </p:txBody>
-      </p:sp>
-      <p:sp>
-        <p:nvSpPr>
-          <p:cNvPr id="15" name="Text 12"/>
+              <a:t>D4  </a:t>
+            </a:r>
+            <a:pPr indent="0" marL="0">
+              <a:buNone/>
+            </a:pPr>
+            <a:r>
+              <a:rPr lang="en-US" sz="1700" b="1" dirty="0">
+                <a:solidFill>
+                  <a:schemeClr val="tx1"/>
+                </a:solidFill>
+              </a:rPr>
+              <a:t>Detection</a:t>
+            </a:r>
+            <a:endParaRPr lang="en-US" sz="1700" dirty="0"/>
+          </a:p>
+        </p:txBody>
+      </p:sp>
+      <p:sp>
+        <p:nvSpPr>
+          <p:cNvPr id="18" name="Text 15"/>
           <p:cNvSpPr txBox="1"/>
           <p:nvPr/>
         </p:nvSpPr>
         <p:spPr>
           <a:xfrm>
-            <a:off x="9198864" y="2331720"/>
-            <a:ext cx="2194560" cy="731520"/>
+            <a:off x="9153144" y="2011680"/>
+            <a:ext cx="2286000" cy="777240"/>
           </a:xfrm>
           <a:prstGeom prst="rect">
             <a:avLst/>
@@ -3184,31 +3336,67 @@
               <a:buNone/>
             </a:pPr>
             <a:r>
-              <a:rPr lang="en-US" sz="1600" b="1" dirty="0">
+              <a:rPr lang="en-US" sz="1400" dirty="0">
                 <a:solidFill>
                   <a:schemeClr val="tx1"/>
                 </a:solidFill>
               </a:rPr>
-              <a:t>Detection: found by us first</a:t>
-            </a:r>
-            <a:endParaRPr lang="en-US" sz="1600" dirty="0"/>
-          </a:p>
-        </p:txBody>
-      </p:sp>
-      <p:sp>
-        <p:nvSpPr>
-          <p:cNvPr id="16" name="dim-4"/>
+              <a:t>Share of impact we find before customers</a:t>
+            </a:r>
+            <a:endParaRPr lang="en-US" sz="1400" dirty="0"/>
+          </a:p>
+        </p:txBody>
+      </p:sp>
+      <p:sp>
+        <p:nvSpPr>
+          <p:cNvPr id="19" name="Text 16"/>
+          <p:cNvSpPr txBox="1"/>
+          <p:nvPr/>
+        </p:nvSpPr>
+        <p:spPr>
+          <a:xfrm>
+            <a:off x="9153144" y="2834640"/>
+            <a:ext cx="2286000" cy="502920"/>
+          </a:xfrm>
+          <a:prstGeom prst="rect">
+            <a:avLst/>
+          </a:prstGeom>
+          <a:noFill/>
+          <a:ln/>
+        </p:spPr>
+        <p:txBody>
+          <a:bodyPr wrap="square" lIns="0" tIns="0" rIns="0" bIns="0" rtlCol="0" anchor="t"/>
+          <a:lstStyle/>
+          <a:p>
+            <a:pPr indent="0" marL="0">
+              <a:buNone/>
+            </a:pPr>
+            <a:r>
+              <a:rPr lang="en-US" sz="1300" b="1" dirty="0">
+                <a:solidFill>
+                  <a:schemeClr val="accent2"/>
+                </a:solidFill>
+              </a:rPr>
+              <a:t>96% of P1 via customers</a:t>
+            </a:r>
+            <a:endParaRPr lang="en-US" sz="1300" dirty="0"/>
+          </a:p>
+        </p:txBody>
+      </p:sp>
+      <p:sp>
+        <p:nvSpPr>
+          <p:cNvPr id="20" name="dim-4"/>
           <p:cNvSpPr/>
           <p:nvPr/>
         </p:nvSpPr>
         <p:spPr>
           <a:xfrm>
-            <a:off x="548640" y="3474720"/>
-            <a:ext cx="2606040" cy="1737360"/>
+            <a:off x="548640" y="3611880"/>
+            <a:ext cx="2606040" cy="2103120"/>
           </a:xfrm>
           <a:prstGeom prst="roundRect">
             <a:avLst>
-              <a:gd name="adj" fmla="val 4211"/>
+              <a:gd name="adj" fmla="val 3478"/>
             </a:avLst>
           </a:prstGeom>
           <a:solidFill>
@@ -3224,14 +3412,14 @@
       </p:sp>
       <p:sp>
         <p:nvSpPr>
-          <p:cNvPr id="17" name="Text 14"/>
+          <p:cNvPr id="21" name="Text 18"/>
           <p:cNvSpPr txBox="1"/>
           <p:nvPr/>
         </p:nvSpPr>
         <p:spPr>
           <a:xfrm>
-            <a:off x="777240" y="3657600"/>
-            <a:ext cx="2103120" cy="548640"/>
+            <a:off x="731520" y="3749040"/>
+            <a:ext cx="2286000" cy="411480"/>
           </a:xfrm>
           <a:prstGeom prst="rect">
             <a:avLst/>
@@ -3247,7 +3435,7 @@
               <a:buNone/>
             </a:pPr>
             <a:r>
-              <a:rPr lang="en-US" sz="2800" b="1" dirty="0">
+              <a:rPr lang="en-US" sz="1700" b="1" dirty="0">
                 <a:solidFill>
                   <a:schemeClr val="accent1"/>
                 </a:solidFill>
@@ -3255,22 +3443,33 @@
                 <a:ea typeface="Cambria" pitchFamily="34" charset="-122"/>
                 <a:cs typeface="Cambria" pitchFamily="34" charset="-120"/>
               </a:rPr>
-              <a:t>D5</a:t>
-            </a:r>
-            <a:endParaRPr lang="en-US" sz="2800" dirty="0"/>
-          </a:p>
-        </p:txBody>
-      </p:sp>
-      <p:sp>
-        <p:nvSpPr>
-          <p:cNvPr id="18" name="Text 15"/>
+              <a:t>D5  </a:t>
+            </a:r>
+            <a:pPr indent="0" marL="0">
+              <a:buNone/>
+            </a:pPr>
+            <a:r>
+              <a:rPr lang="en-US" sz="1700" b="1" dirty="0">
+                <a:solidFill>
+                  <a:schemeClr val="tx1"/>
+                </a:solidFill>
+              </a:rPr>
+              <a:t>Recovery</a:t>
+            </a:r>
+            <a:endParaRPr lang="en-US" sz="1700" dirty="0"/>
+          </a:p>
+        </p:txBody>
+      </p:sp>
+      <p:sp>
+        <p:nvSpPr>
+          <p:cNvPr id="22" name="Text 19"/>
           <p:cNvSpPr txBox="1"/>
           <p:nvPr/>
         </p:nvSpPr>
         <p:spPr>
           <a:xfrm>
-            <a:off x="777240" y="4343400"/>
-            <a:ext cx="2194560" cy="731520"/>
+            <a:off x="731520" y="4251960"/>
+            <a:ext cx="2286000" cy="777240"/>
           </a:xfrm>
           <a:prstGeom prst="rect">
             <a:avLst/>
@@ -3286,31 +3485,67 @@
               <a:buNone/>
             </a:pPr>
             <a:r>
-              <a:rPr lang="en-US" sz="1600" b="1" dirty="0">
+              <a:rPr lang="en-US" sz="1400" dirty="0">
                 <a:solidFill>
                   <a:schemeClr val="tx1"/>
                 </a:solidFill>
               </a:rPr>
-              <a:t>Recovery time</a:t>
-            </a:r>
-            <a:endParaRPr lang="en-US" sz="1600" dirty="0"/>
-          </a:p>
-        </p:txBody>
-      </p:sp>
-      <p:sp>
-        <p:nvSpPr>
-          <p:cNvPr id="19" name="dim-5"/>
+              <a:t>Time to restore and time to fix a bug</a:t>
+            </a:r>
+            <a:endParaRPr lang="en-US" sz="1400" dirty="0"/>
+          </a:p>
+        </p:txBody>
+      </p:sp>
+      <p:sp>
+        <p:nvSpPr>
+          <p:cNvPr id="23" name="Text 20"/>
+          <p:cNvSpPr txBox="1"/>
+          <p:nvPr/>
+        </p:nvSpPr>
+        <p:spPr>
+          <a:xfrm>
+            <a:off x="731520" y="5074920"/>
+            <a:ext cx="2286000" cy="502920"/>
+          </a:xfrm>
+          <a:prstGeom prst="rect">
+            <a:avLst/>
+          </a:prstGeom>
+          <a:noFill/>
+          <a:ln/>
+        </p:spPr>
+        <p:txBody>
+          <a:bodyPr wrap="square" lIns="0" tIns="0" rIns="0" bIns="0" rtlCol="0" anchor="t"/>
+          <a:lstStyle/>
+          <a:p>
+            <a:pPr indent="0" marL="0">
+              <a:buNone/>
+            </a:pPr>
+            <a:r>
+              <a:rPr lang="en-US" sz="1300" b="1" dirty="0">
+                <a:solidFill>
+                  <a:schemeClr val="accent2"/>
+                </a:solidFill>
+              </a:rPr>
+              <a:t>Fix median 10 days</a:t>
+            </a:r>
+            <a:endParaRPr lang="en-US" sz="1300" dirty="0"/>
+          </a:p>
+        </p:txBody>
+      </p:sp>
+      <p:sp>
+        <p:nvSpPr>
+          <p:cNvPr id="24" name="dim-5"/>
           <p:cNvSpPr/>
           <p:nvPr/>
         </p:nvSpPr>
         <p:spPr>
           <a:xfrm>
-            <a:off x="3355848" y="3474720"/>
-            <a:ext cx="2606040" cy="1737360"/>
+            <a:off x="3355848" y="3611880"/>
+            <a:ext cx="2606040" cy="2103120"/>
           </a:xfrm>
           <a:prstGeom prst="roundRect">
             <a:avLst>
-              <a:gd name="adj" fmla="val 4211"/>
+              <a:gd name="adj" fmla="val 3478"/>
             </a:avLst>
           </a:prstGeom>
           <a:solidFill>
@@ -3326,14 +3561,14 @@
       </p:sp>
       <p:sp>
         <p:nvSpPr>
-          <p:cNvPr id="20" name="Text 17"/>
+          <p:cNvPr id="25" name="Text 22"/>
           <p:cNvSpPr txBox="1"/>
           <p:nvPr/>
         </p:nvSpPr>
         <p:spPr>
           <a:xfrm>
-            <a:off x="3584448" y="3657600"/>
-            <a:ext cx="2103120" cy="548640"/>
+            <a:off x="3538728" y="3749040"/>
+            <a:ext cx="2286000" cy="411480"/>
           </a:xfrm>
           <a:prstGeom prst="rect">
             <a:avLst/>
@@ -3349,7 +3584,7 @@
               <a:buNone/>
             </a:pPr>
             <a:r>
-              <a:rPr lang="en-US" sz="2800" b="1" dirty="0">
+              <a:rPr lang="en-US" sz="1700" b="1" dirty="0">
                 <a:solidFill>
                   <a:schemeClr val="accent1"/>
                 </a:solidFill>
@@ -3357,22 +3592,33 @@
                 <a:ea typeface="Cambria" pitchFamily="34" charset="-122"/>
                 <a:cs typeface="Cambria" pitchFamily="34" charset="-120"/>
               </a:rPr>
-              <a:t>D6</a:t>
-            </a:r>
-            <a:endParaRPr lang="en-US" sz="2800" dirty="0"/>
-          </a:p>
-        </p:txBody>
-      </p:sp>
-      <p:sp>
-        <p:nvSpPr>
-          <p:cNvPr id="21" name="Text 18"/>
+              <a:t>D6  </a:t>
+            </a:r>
+            <a:pPr indent="0" marL="0">
+              <a:buNone/>
+            </a:pPr>
+            <a:r>
+              <a:rPr lang="en-US" sz="1700" b="1" dirty="0">
+                <a:solidFill>
+                  <a:schemeClr val="tx1"/>
+                </a:solidFill>
+              </a:rPr>
+              <a:t>Change safety</a:t>
+            </a:r>
+            <a:endParaRPr lang="en-US" sz="1700" dirty="0"/>
+          </a:p>
+        </p:txBody>
+      </p:sp>
+      <p:sp>
+        <p:nvSpPr>
+          <p:cNvPr id="26" name="Text 23"/>
           <p:cNvSpPr txBox="1"/>
           <p:nvPr/>
         </p:nvSpPr>
         <p:spPr>
           <a:xfrm>
-            <a:off x="3584448" y="4343400"/>
-            <a:ext cx="2194560" cy="731520"/>
+            <a:off x="3538728" y="4251960"/>
+            <a:ext cx="2286000" cy="777240"/>
           </a:xfrm>
           <a:prstGeom prst="rect">
             <a:avLst/>
@@ -3388,31 +3634,67 @@
               <a:buNone/>
             </a:pPr>
             <a:r>
-              <a:rPr lang="en-US" sz="1600" b="1" dirty="0">
+              <a:rPr lang="en-US" sz="1400" dirty="0">
                 <a:solidFill>
                   <a:schemeClr val="tx1"/>
                 </a:solidFill>
               </a:rPr>
-              <a:t>Change safety</a:t>
-            </a:r>
-            <a:endParaRPr lang="en-US" sz="1600" dirty="0"/>
-          </a:p>
-        </p:txBody>
-      </p:sp>
-      <p:sp>
-        <p:nvSpPr>
-          <p:cNvPr id="22" name="dim-6"/>
+              <a:t>Bugs caused by fixes, emergency or recent changes</a:t>
+            </a:r>
+            <a:endParaRPr lang="en-US" sz="1400" dirty="0"/>
+          </a:p>
+        </p:txBody>
+      </p:sp>
+      <p:sp>
+        <p:nvSpPr>
+          <p:cNvPr id="27" name="Text 24"/>
+          <p:cNvSpPr txBox="1"/>
+          <p:nvPr/>
+        </p:nvSpPr>
+        <p:spPr>
+          <a:xfrm>
+            <a:off x="3538728" y="5074920"/>
+            <a:ext cx="2286000" cy="502920"/>
+          </a:xfrm>
+          <a:prstGeom prst="rect">
+            <a:avLst/>
+          </a:prstGeom>
+          <a:noFill/>
+          <a:ln/>
+        </p:spPr>
+        <p:txBody>
+          <a:bodyPr wrap="square" lIns="0" tIns="0" rIns="0" bIns="0" rtlCol="0" anchor="t"/>
+          <a:lstStyle/>
+          <a:p>
+            <a:pPr indent="0" marL="0">
+              <a:buNone/>
+            </a:pPr>
+            <a:r>
+              <a:rPr lang="en-US" sz="1300" b="1" dirty="0">
+                <a:solidFill>
+                  <a:schemeClr val="accent2"/>
+                </a:solidFill>
+              </a:rPr>
+              <a:t>Fix-caused 24% to 27%</a:t>
+            </a:r>
+            <a:endParaRPr lang="en-US" sz="1300" dirty="0"/>
+          </a:p>
+        </p:txBody>
+      </p:sp>
+      <p:sp>
+        <p:nvSpPr>
+          <p:cNvPr id="28" name="dim-6"/>
           <p:cNvSpPr/>
           <p:nvPr/>
         </p:nvSpPr>
         <p:spPr>
           <a:xfrm>
-            <a:off x="6163056" y="3474720"/>
-            <a:ext cx="2606040" cy="1737360"/>
+            <a:off x="6163056" y="3611880"/>
+            <a:ext cx="2606040" cy="2103120"/>
           </a:xfrm>
           <a:prstGeom prst="roundRect">
             <a:avLst>
-              <a:gd name="adj" fmla="val 4211"/>
+              <a:gd name="adj" fmla="val 3478"/>
             </a:avLst>
           </a:prstGeom>
           <a:solidFill>
@@ -3428,14 +3710,14 @@
       </p:sp>
       <p:sp>
         <p:nvSpPr>
-          <p:cNvPr id="23" name="Text 20"/>
+          <p:cNvPr id="29" name="Text 26"/>
           <p:cNvSpPr txBox="1"/>
           <p:nvPr/>
         </p:nvSpPr>
         <p:spPr>
           <a:xfrm>
-            <a:off x="6391656" y="3657600"/>
-            <a:ext cx="2103120" cy="548640"/>
+            <a:off x="6345936" y="3749040"/>
+            <a:ext cx="2286000" cy="411480"/>
           </a:xfrm>
           <a:prstGeom prst="rect">
             <a:avLst/>
@@ -3451,7 +3733,7 @@
               <a:buNone/>
             </a:pPr>
             <a:r>
-              <a:rPr lang="en-US" sz="2800" b="1" dirty="0">
+              <a:rPr lang="en-US" sz="1700" b="1" dirty="0">
                 <a:solidFill>
                   <a:schemeClr val="accent1"/>
                 </a:solidFill>
@@ -3459,22 +3741,33 @@
                 <a:ea typeface="Cambria" pitchFamily="34" charset="-122"/>
                 <a:cs typeface="Cambria" pitchFamily="34" charset="-120"/>
               </a:rPr>
-              <a:t>D7</a:t>
-            </a:r>
-            <a:endParaRPr lang="en-US" sz="2800" dirty="0"/>
-          </a:p>
-        </p:txBody>
-      </p:sp>
-      <p:sp>
-        <p:nvSpPr>
-          <p:cNvPr id="24" name="Text 21"/>
+              <a:t>D7  </a:t>
+            </a:r>
+            <a:pPr indent="0" marL="0">
+              <a:buNone/>
+            </a:pPr>
+            <a:r>
+              <a:rPr lang="en-US" sz="1700" b="1" dirty="0">
+                <a:solidFill>
+                  <a:schemeClr val="tx1"/>
+                </a:solidFill>
+              </a:rPr>
+              <a:t>Non-recurrence</a:t>
+            </a:r>
+            <a:endParaRPr lang="en-US" sz="1700" dirty="0"/>
+          </a:p>
+        </p:txBody>
+      </p:sp>
+      <p:sp>
+        <p:nvSpPr>
+          <p:cNvPr id="30" name="Text 27"/>
           <p:cNvSpPr txBox="1"/>
           <p:nvPr/>
         </p:nvSpPr>
         <p:spPr>
           <a:xfrm>
-            <a:off x="6391656" y="4343400"/>
-            <a:ext cx="2194560" cy="731520"/>
+            <a:off x="6345936" y="4251960"/>
+            <a:ext cx="2286000" cy="777240"/>
           </a:xfrm>
           <a:prstGeom prst="rect">
             <a:avLst/>
@@ -3490,31 +3783,67 @@
               <a:buNone/>
             </a:pPr>
             <a:r>
-              <a:rPr lang="en-US" sz="1600" b="1" dirty="0">
+              <a:rPr lang="en-US" sz="1400" dirty="0">
                 <a:solidFill>
                   <a:schemeClr val="tx1"/>
                 </a:solidFill>
               </a:rPr>
-              <a:t>Non-recurrence</a:t>
-            </a:r>
-            <a:endParaRPr lang="en-US" sz="1600" dirty="0"/>
-          </a:p>
-        </p:txBody>
-      </p:sp>
-      <p:sp>
-        <p:nvSpPr>
-          <p:cNvPr id="25" name="dim-7"/>
+              <a:t>Do fixes hold: repeats and reopens</a:t>
+            </a:r>
+            <a:endParaRPr lang="en-US" sz="1400" dirty="0"/>
+          </a:p>
+        </p:txBody>
+      </p:sp>
+      <p:sp>
+        <p:nvSpPr>
+          <p:cNvPr id="31" name="Text 28"/>
+          <p:cNvSpPr txBox="1"/>
+          <p:nvPr/>
+        </p:nvSpPr>
+        <p:spPr>
+          <a:xfrm>
+            <a:off x="6345936" y="5074920"/>
+            <a:ext cx="2286000" cy="502920"/>
+          </a:xfrm>
+          <a:prstGeom prst="rect">
+            <a:avLst/>
+          </a:prstGeom>
+          <a:noFill/>
+          <a:ln/>
+        </p:spPr>
+        <p:txBody>
+          <a:bodyPr wrap="square" lIns="0" tIns="0" rIns="0" bIns="0" rtlCol="0" anchor="t"/>
+          <a:lstStyle/>
+          <a:p>
+            <a:pPr indent="0" marL="0">
+              <a:buNone/>
+            </a:pPr>
+            <a:r>
+              <a:rPr lang="en-US" sz="1300" b="1" dirty="0">
+                <a:solidFill>
+                  <a:schemeClr val="accent2"/>
+                </a:solidFill>
+              </a:rPr>
+              <a:t>Recurrence 3.9% to 1.5%</a:t>
+            </a:r>
+            <a:endParaRPr lang="en-US" sz="1300" dirty="0"/>
+          </a:p>
+        </p:txBody>
+      </p:sp>
+      <p:sp>
+        <p:nvSpPr>
+          <p:cNvPr id="32" name="dim-7"/>
           <p:cNvSpPr/>
           <p:nvPr/>
         </p:nvSpPr>
         <p:spPr>
           <a:xfrm>
-            <a:off x="8970264" y="3474720"/>
-            <a:ext cx="2606040" cy="1737360"/>
+            <a:off x="8970264" y="3611880"/>
+            <a:ext cx="2606040" cy="2103120"/>
           </a:xfrm>
           <a:prstGeom prst="roundRect">
             <a:avLst>
-              <a:gd name="adj" fmla="val 4211"/>
+              <a:gd name="adj" fmla="val 3478"/>
             </a:avLst>
           </a:prstGeom>
           <a:solidFill>
@@ -3530,14 +3859,14 @@
       </p:sp>
       <p:sp>
         <p:nvSpPr>
-          <p:cNvPr id="26" name="Text 23"/>
+          <p:cNvPr id="33" name="Text 30"/>
           <p:cNvSpPr txBox="1"/>
           <p:nvPr/>
         </p:nvSpPr>
         <p:spPr>
           <a:xfrm>
-            <a:off x="9198864" y="3657600"/>
-            <a:ext cx="2103120" cy="548640"/>
+            <a:off x="9153144" y="3749040"/>
+            <a:ext cx="2286000" cy="411480"/>
           </a:xfrm>
           <a:prstGeom prst="rect">
             <a:avLst/>
@@ -3553,7 +3882,7 @@
               <a:buNone/>
             </a:pPr>
             <a:r>
-              <a:rPr lang="en-US" sz="2800" b="1" dirty="0">
+              <a:rPr lang="en-US" sz="1700" b="1" dirty="0">
                 <a:solidFill>
                   <a:schemeClr val="accent1"/>
                 </a:solidFill>
@@ -3561,22 +3890,33 @@
                 <a:ea typeface="Cambria" pitchFamily="34" charset="-122"/>
                 <a:cs typeface="Cambria" pitchFamily="34" charset="-120"/>
               </a:rPr>
-              <a:t>D8</a:t>
-            </a:r>
-            <a:endParaRPr lang="en-US" sz="2800" dirty="0"/>
-          </a:p>
-        </p:txBody>
-      </p:sp>
-      <p:sp>
-        <p:nvSpPr>
-          <p:cNvPr id="27" name="Text 24"/>
+              <a:t>D8  </a:t>
+            </a:r>
+            <a:pPr indent="0" marL="0">
+              <a:buNone/>
+            </a:pPr>
+            <a:r>
+              <a:rPr lang="en-US" sz="1700" b="1" dirty="0">
+                <a:solidFill>
+                  <a:schemeClr val="tx1"/>
+                </a:solidFill>
+              </a:rPr>
+              <a:t>Expectation fit</a:t>
+            </a:r>
+            <a:endParaRPr lang="en-US" sz="1700" dirty="0"/>
+          </a:p>
+        </p:txBody>
+      </p:sp>
+      <p:sp>
+        <p:nvSpPr>
+          <p:cNvPr id="34" name="Text 31"/>
           <p:cNvSpPr txBox="1"/>
           <p:nvPr/>
         </p:nvSpPr>
         <p:spPr>
           <a:xfrm>
-            <a:off x="9198864" y="4343400"/>
-            <a:ext cx="2194560" cy="731520"/>
+            <a:off x="9153144" y="4251960"/>
+            <a:ext cx="2286000" cy="777240"/>
           </a:xfrm>
           <a:prstGeom prst="rect">
             <a:avLst/>
@@ -3592,27 +3932,27 @@
               <a:buNone/>
             </a:pPr>
             <a:r>
-              <a:rPr lang="en-US" sz="1600" b="1" dirty="0">
+              <a:rPr lang="en-US" sz="1400" dirty="0">
                 <a:solidFill>
                   <a:schemeClr val="tx1"/>
                 </a:solidFill>
               </a:rPr>
-              <a:t>Expectation fit</a:t>
-            </a:r>
-            <a:endParaRPr lang="en-US" sz="1600" dirty="0"/>
-          </a:p>
-        </p:txBody>
-      </p:sp>
-      <p:sp>
-        <p:nvSpPr>
-          <p:cNvPr id="28" name="Text 25"/>
+              <a:t>Reports closed as designed that are real gaps</a:t>
+            </a:r>
+            <a:endParaRPr lang="en-US" sz="1400" dirty="0"/>
+          </a:p>
+        </p:txBody>
+      </p:sp>
+      <p:sp>
+        <p:nvSpPr>
+          <p:cNvPr id="35" name="Text 32"/>
           <p:cNvSpPr txBox="1"/>
           <p:nvPr/>
         </p:nvSpPr>
         <p:spPr>
           <a:xfrm>
-            <a:off x="548640" y="5577840"/>
-            <a:ext cx="11064240" cy="457200"/>
+            <a:off x="9153144" y="5074920"/>
+            <a:ext cx="2286000" cy="502920"/>
           </a:xfrm>
           <a:prstGeom prst="rect">
             <a:avLst/>
@@ -3628,14 +3968,50 @@
               <a:buNone/>
             </a:pPr>
             <a:r>
-              <a:rPr lang="en-US" sz="1600" dirty="0">
+              <a:rPr lang="en-US" sz="1300" b="1" dirty="0">
+                <a:solidFill>
+                  <a:schemeClr val="accent2"/>
+                </a:solidFill>
+              </a:rPr>
+              <a:t>42% of those are real gaps</a:t>
+            </a:r>
+            <a:endParaRPr lang="en-US" sz="1300" dirty="0"/>
+          </a:p>
+        </p:txBody>
+      </p:sp>
+      <p:sp>
+        <p:nvSpPr>
+          <p:cNvPr id="36" name="Text 33"/>
+          <p:cNvSpPr txBox="1"/>
+          <p:nvPr/>
+        </p:nvSpPr>
+        <p:spPr>
+          <a:xfrm>
+            <a:off x="548640" y="5943600"/>
+            <a:ext cx="11064240" cy="365760"/>
+          </a:xfrm>
+          <a:prstGeom prst="rect">
+            <a:avLst/>
+          </a:prstGeom>
+          <a:noFill/>
+          <a:ln/>
+        </p:spPr>
+        <p:txBody>
+          <a:bodyPr wrap="square" lIns="0" tIns="0" rIns="0" bIns="0" rtlCol="0" anchor="t"/>
+          <a:lstStyle/>
+          <a:p>
+            <a:pPr indent="0" marL="0">
+              <a:buNone/>
+            </a:pPr>
+            <a:r>
+              <a:rPr lang="en-US" sz="1400" dirty="0">
                 <a:solidFill>
                   <a:schemeClr val="tx2"/>
                 </a:solidFill>
               </a:rPr>
               <a:t>Rule: a pod outside its own range for 2 months gets an investigation, not a punishment.</a:t>
             </a:r>
-            <a:endParaRPr lang="en-US" sz="1600" dirty="0"/>
+            <a:endParaRPr lang="en-US" sz="1400" dirty="0"/>
           </a:p>
         </p:txBody>
       </p:sp>

--- a/docs/05-summary/offsite-deck.pptx
+++ b/docs/05-summary/offsite-deck.pptx
@@ -17,9 +17,10 @@
     <p:sldId id="265" r:id="rId11"/>
     <p:sldId id="266" r:id="rId12"/>
     <p:sldId id="267" r:id="rId13"/>
+    <p:sldId id="268" r:id="rId14"/>
   </p:sldIdLst>
   <p:notesMasterIdLst>
-    <p:notesMasterId r:id="rId14"/>
+    <p:notesMasterId r:id="rId15"/>
   </p:notesMasterIdLst>
   <p:sldSz cx="12192000" cy="6858000"/>
   <p:notesSz cx="6858000" cy="12192000"/>
@@ -118,7 +119,7 @@
   <p:extLst>
     <p:ext uri="{521415D9-36F7-43E2-AB2F-B90AF26B5E84}">
       <p14:sectionLst xmlns:p14="http://schemas.microsoft.com/office/powerpoint/2010/main">
-        <p14:section name="Offsite" id="{c6038c55-56fa-8eb0-82fe-d80fe897b60e}">
+        <p14:section name="Offsite" id="{ab3695ca-2d81-9aa6-81e2-d614f8c1c4ad}">
           <p14:sldIdLst>
             <p14:sldId id="256"/>
             <p14:sldId id="257"/>
@@ -132,6 +133,7 @@
             <p14:sldId id="265"/>
             <p14:sldId id="266"/>
             <p14:sldId id="267"/>
+            <p14:sldId id="268"/>
           </p14:sldIdLst>
         </p14:section>
       </p14:sectionLst>
@@ -908,7 +910,7 @@
           <a:p>
             <a:r>
               <a:rPr lang="en-US" dirty="0"/>
-              <a:t>Baseline: 2025 vs 2026, MI tickets excluded. Bold green line = value today (2025 to 2026). D2, D4, D5 per team need ServiceNow read access (request REQ0120210 pending).</a:t>
+              <a:t>Baseline: 2025 vs 2026, MI investigation tickets removed. Each pod compares with its own baseline. D2, D4, D5 per pod need ServiceNow read access (request REQ0120210 pending).</a:t>
             </a:r>
             <a:endParaRPr lang="en-US" dirty="0"/>
           </a:p>
@@ -996,7 +998,7 @@
           <a:p>
             <a:r>
               <a:rPr lang="en-US" dirty="0"/>
-              <a:t>Limits: team-to-service map missing (U-26/U-27 open), no SME validation yet, ServiceNow P1 fall unexplained (C-08). Blocking gates are tested in X3/X4 before rollout.</a:t>
+              <a:t>Baseline: 2025 vs 2026, MI investigation tickets removed. Each pod compares with its own baseline. D2, D4, D5 per pod need ServiceNow read access (request REQ0120210 pending).</a:t>
             </a:r>
             <a:endParaRPr lang="en-US" dirty="0"/>
           </a:p>
@@ -1084,7 +1086,7 @@
           <a:p>
             <a:r>
               <a:rPr lang="en-US" dirty="0"/>
-              <a:t>Ask for explicit yes/no on each of the four. Discussion prompt: what is the one gate your pod would never accept, and why?</a:t>
+              <a:t>Limits: team-to-service map missing (U-26/U-27 open), no SME validation yet, ServiceNow P1 fall unexplained (C-08). Blocking gates are tested in X3/X4 before rollout.</a:t>
             </a:r>
             <a:endParaRPr lang="en-US" dirty="0"/>
           </a:p>
@@ -1108,6 +1110,94 @@
             <a:fld id="{F7021451-1387-4CA6-816F-3879F97B5CBC}" type="slidenum">
               <a:rPr lang="en-US"/>
               <a:t>12</a:t>
+            </a:fld>
+            <a:endParaRPr lang="en-US"/>
+          </a:p>
+        </p:txBody>
+      </p:sp>
+    </p:spTree>
+    <p:extLst>
+      <p:ext uri="{BB962C8B-B14F-4D97-AF65-F5344CB8AC3E}">
+        <p14:creationId xmlns:p14="http://schemas.microsoft.com/office/powerpoint/2010/main" val="1024086991"/>
+      </p:ext>
+    </p:extLst>
+  </p:cSld>
+  <p:clrMapOvr>
+    <a:masterClrMapping/>
+  </p:clrMapOvr>
+</p:notes>
+</file>
+
+<file path=ppt/notesSlides/notesSlide13.xml><?xml version="1.0" encoding="utf-8"?>
+<p:notes xmlns:a="http://schemas.openxmlformats.org/drawingml/2006/main" xmlns:r="http://schemas.openxmlformats.org/officeDocument/2006/relationships" xmlns:p="http://schemas.openxmlformats.org/presentationml/2006/main">
+  <p:cSld>
+    <p:spTree>
+      <p:nvGrpSpPr>
+        <p:cNvPr id="1" name=""/>
+        <p:cNvGrpSpPr/>
+        <p:nvPr/>
+      </p:nvGrpSpPr>
+      <p:grpSpPr>
+        <a:xfrm>
+          <a:off x="0" y="0"/>
+          <a:ext cx="0" cy="0"/>
+          <a:chOff x="0" y="0"/>
+          <a:chExt cx="0" cy="0"/>
+        </a:xfrm>
+      </p:grpSpPr>
+      <p:sp>
+        <p:nvSpPr>
+          <p:cNvPr id="2" name="Slide Image Placeholder 1"/>
+          <p:cNvSpPr>
+            <a:spLocks noGrp="1" noRot="1" noChangeAspect="1"/>
+          </p:cNvSpPr>
+          <p:nvPr>
+            <p:ph type="sldImg"/>
+          </p:nvPr>
+        </p:nvSpPr>
+        <p:spPr/>
+      </p:sp>
+      <p:sp>
+        <p:nvSpPr>
+          <p:cNvPr id="3" name="Notes Placeholder 2"/>
+          <p:cNvSpPr>
+            <a:spLocks noGrp="1"/>
+          </p:cNvSpPr>
+          <p:nvPr>
+            <p:ph type="body" idx="1"/>
+          </p:nvPr>
+        </p:nvSpPr>
+        <p:spPr/>
+        <p:txBody>
+          <a:bodyPr/>
+          <a:lstStyle/>
+          <a:p>
+            <a:r>
+              <a:rPr lang="en-US" dirty="0"/>
+              <a:t>Ask for explicit yes/no on each of the four. Discussion prompt: what is the one gate your pod would never accept, and why?</a:t>
+            </a:r>
+            <a:endParaRPr lang="en-US" dirty="0"/>
+          </a:p>
+        </p:txBody>
+      </p:sp>
+      <p:sp>
+        <p:nvSpPr>
+          <p:cNvPr id="4" name="Slide Number Placeholder 3"/>
+          <p:cNvSpPr>
+            <a:spLocks noGrp="1"/>
+          </p:cNvSpPr>
+          <p:nvPr>
+            <p:ph type="sldNum" sz="quarter" idx="10"/>
+          </p:nvPr>
+        </p:nvSpPr>
+        <p:spPr/>
+        <p:txBody>
+          <a:bodyPr/>
+          <a:lstStyle/>
+          <a:p>
+            <a:fld id="{F7021451-1387-4CA6-816F-3879F97B5CBC}" type="slidenum">
+              <a:rPr lang="en-US"/>
+              <a:t>13</a:t>
             </a:fld>
             <a:endParaRPr lang="en-US"/>
           </a:p>
@@ -2781,1240 +2871,1755 @@
                   <a:schemeClr val="tx1"/>
                 </a:solidFill>
               </a:rPr>
-              <a:t>Eight metrics every pod sees monthly</a:t>
+              <a:t>Eight metrics every pod sees (1 of 2)</a:t>
             </a:r>
             <a:endParaRPr lang="en-US" sz="3000" dirty="0"/>
           </a:p>
         </p:txBody>
       </p:sp>
-      <p:sp>
-        <p:nvSpPr>
-          <p:cNvPr id="4" name="dim-0"/>
-          <p:cNvSpPr/>
-          <p:nvPr/>
-        </p:nvSpPr>
-        <p:spPr>
-          <a:xfrm>
-            <a:off x="548640" y="1371600"/>
-            <a:ext cx="2606040" cy="2103120"/>
-          </a:xfrm>
-          <a:prstGeom prst="roundRect">
-            <a:avLst>
-              <a:gd name="adj" fmla="val 3478"/>
-            </a:avLst>
-          </a:prstGeom>
-          <a:solidFill>
-            <a:schemeClr val="bg2"/>
-          </a:solidFill>
-          <a:ln w="12700">
-            <a:solidFill>
-              <a:schemeClr val="bg2"/>
-            </a:solidFill>
-            <a:prstDash val="solid"/>
-          </a:ln>
-        </p:spPr>
-      </p:sp>
-      <p:sp>
-        <p:nvSpPr>
-          <p:cNvPr id="5" name="Text 2"/>
-          <p:cNvSpPr txBox="1"/>
-          <p:nvPr/>
-        </p:nvSpPr>
-        <p:spPr>
-          <a:xfrm>
-            <a:off x="731520" y="1508760"/>
-            <a:ext cx="2286000" cy="411480"/>
-          </a:xfrm>
-          <a:prstGeom prst="rect">
-            <a:avLst/>
-          </a:prstGeom>
-          <a:noFill/>
-          <a:ln/>
-        </p:spPr>
-        <p:txBody>
-          <a:bodyPr wrap="square" lIns="0" tIns="0" rIns="0" bIns="0" rtlCol="0" anchor="t"/>
-          <a:lstStyle/>
-          <a:p>
-            <a:pPr indent="0" marL="0">
-              <a:buNone/>
-            </a:pPr>
-            <a:r>
-              <a:rPr lang="en-US" sz="1700" b="1" dirty="0">
-                <a:solidFill>
-                  <a:schemeClr val="accent1"/>
-                </a:solidFill>
-                <a:latin typeface="Cambria" pitchFamily="34" charset="0"/>
-                <a:ea typeface="Cambria" pitchFamily="34" charset="-122"/>
-                <a:cs typeface="Cambria" pitchFamily="34" charset="-120"/>
-              </a:rPr>
-              <a:t>D1  </a:t>
-            </a:r>
-            <a:pPr indent="0" marL="0">
-              <a:buNone/>
-            </a:pPr>
-            <a:r>
-              <a:rPr lang="en-US" sz="1700" b="1" dirty="0">
-                <a:solidFill>
-                  <a:schemeClr val="tx1"/>
-                </a:solidFill>
-              </a:rPr>
-              <a:t>Business correctness</a:t>
-            </a:r>
-            <a:endParaRPr lang="en-US" sz="1700" dirty="0"/>
-          </a:p>
-        </p:txBody>
-      </p:sp>
-      <p:sp>
-        <p:nvSpPr>
-          <p:cNvPr id="6" name="Text 3"/>
-          <p:cNvSpPr txBox="1"/>
-          <p:nvPr/>
-        </p:nvSpPr>
-        <p:spPr>
-          <a:xfrm>
-            <a:off x="731520" y="2011680"/>
-            <a:ext cx="2286000" cy="777240"/>
-          </a:xfrm>
-          <a:prstGeom prst="rect">
-            <a:avLst/>
-          </a:prstGeom>
-          <a:noFill/>
-          <a:ln/>
-        </p:spPr>
-        <p:txBody>
-          <a:bodyPr wrap="square" lIns="0" tIns="0" rIns="0" bIns="0" rtlCol="0" anchor="t"/>
-          <a:lstStyle/>
-          <a:p>
-            <a:pPr indent="0" marL="0">
-              <a:buNone/>
-            </a:pPr>
-            <a:r>
-              <a:rPr lang="en-US" sz="1400" dirty="0">
-                <a:solidFill>
-                  <a:schemeClr val="tx1"/>
-                </a:solidFill>
-              </a:rPr>
-              <a:t>Product does the wrong thing: data, routing, lifecycle</a:t>
-            </a:r>
-            <a:endParaRPr lang="en-US" sz="1400" dirty="0"/>
-          </a:p>
-        </p:txBody>
-      </p:sp>
-      <p:sp>
-        <p:nvSpPr>
-          <p:cNvPr id="7" name="Text 4"/>
-          <p:cNvSpPr txBox="1"/>
-          <p:nvPr/>
-        </p:nvSpPr>
-        <p:spPr>
-          <a:xfrm>
-            <a:off x="731520" y="2834640"/>
-            <a:ext cx="2286000" cy="502920"/>
-          </a:xfrm>
-          <a:prstGeom prst="rect">
-            <a:avLst/>
-          </a:prstGeom>
-          <a:noFill/>
-          <a:ln/>
-        </p:spPr>
-        <p:txBody>
-          <a:bodyPr wrap="square" lIns="0" tIns="0" rIns="0" bIns="0" rtlCol="0" anchor="t"/>
-          <a:lstStyle/>
-          <a:p>
-            <a:pPr indent="0" marL="0">
-              <a:buNone/>
-            </a:pPr>
-            <a:r>
-              <a:rPr lang="en-US" sz="1300" b="1" dirty="0">
-                <a:solidFill>
-                  <a:schemeClr val="accent2"/>
-                </a:solidFill>
-              </a:rPr>
-              <a:t>P1/P2 share 52% to 70%</a:t>
-            </a:r>
-            <a:endParaRPr lang="en-US" sz="1300" dirty="0"/>
-          </a:p>
-        </p:txBody>
-      </p:sp>
-      <p:sp>
-        <p:nvSpPr>
-          <p:cNvPr id="8" name="dim-1"/>
-          <p:cNvSpPr/>
-          <p:nvPr/>
-        </p:nvSpPr>
-        <p:spPr>
-          <a:xfrm>
-            <a:off x="3355848" y="1371600"/>
-            <a:ext cx="2606040" cy="2103120"/>
-          </a:xfrm>
-          <a:prstGeom prst="roundRect">
-            <a:avLst>
-              <a:gd name="adj" fmla="val 3478"/>
-            </a:avLst>
-          </a:prstGeom>
-          <a:solidFill>
-            <a:schemeClr val="bg2"/>
-          </a:solidFill>
-          <a:ln w="12700">
-            <a:solidFill>
-              <a:schemeClr val="bg2"/>
-            </a:solidFill>
-            <a:prstDash val="solid"/>
-          </a:ln>
-        </p:spPr>
-      </p:sp>
-      <p:sp>
-        <p:nvSpPr>
-          <p:cNvPr id="9" name="Text 6"/>
-          <p:cNvSpPr txBox="1"/>
-          <p:nvPr/>
-        </p:nvSpPr>
-        <p:spPr>
-          <a:xfrm>
-            <a:off x="3538728" y="1508760"/>
-            <a:ext cx="2286000" cy="411480"/>
-          </a:xfrm>
-          <a:prstGeom prst="rect">
-            <a:avLst/>
-          </a:prstGeom>
-          <a:noFill/>
-          <a:ln/>
-        </p:spPr>
-        <p:txBody>
-          <a:bodyPr wrap="square" lIns="0" tIns="0" rIns="0" bIns="0" rtlCol="0" anchor="t"/>
-          <a:lstStyle/>
-          <a:p>
-            <a:pPr indent="0" marL="0">
-              <a:buNone/>
-            </a:pPr>
-            <a:r>
-              <a:rPr lang="en-US" sz="1700" b="1" dirty="0">
-                <a:solidFill>
-                  <a:schemeClr val="accent1"/>
-                </a:solidFill>
-                <a:latin typeface="Cambria" pitchFamily="34" charset="0"/>
-                <a:ea typeface="Cambria" pitchFamily="34" charset="-122"/>
-                <a:cs typeface="Cambria" pitchFamily="34" charset="-120"/>
-              </a:rPr>
-              <a:t>D2  </a:t>
-            </a:r>
-            <a:pPr indent="0" marL="0">
-              <a:buNone/>
-            </a:pPr>
-            <a:r>
-              <a:rPr lang="en-US" sz="1700" b="1" dirty="0">
-                <a:solidFill>
-                  <a:schemeClr val="tx1"/>
-                </a:solidFill>
-              </a:rPr>
-              <a:t>Availability</a:t>
-            </a:r>
-            <a:endParaRPr lang="en-US" sz="1700" dirty="0"/>
-          </a:p>
-        </p:txBody>
-      </p:sp>
-      <p:sp>
-        <p:nvSpPr>
-          <p:cNvPr id="10" name="Text 7"/>
-          <p:cNvSpPr txBox="1"/>
-          <p:nvPr/>
-        </p:nvSpPr>
-        <p:spPr>
-          <a:xfrm>
-            <a:off x="3538728" y="2011680"/>
-            <a:ext cx="2286000" cy="777240"/>
-          </a:xfrm>
-          <a:prstGeom prst="rect">
-            <a:avLst/>
-          </a:prstGeom>
-          <a:noFill/>
-          <a:ln/>
-        </p:spPr>
-        <p:txBody>
-          <a:bodyPr wrap="square" lIns="0" tIns="0" rIns="0" bIns="0" rtlCol="0" anchor="t"/>
-          <a:lstStyle/>
-          <a:p>
-            <a:pPr indent="0" marL="0">
-              <a:buNone/>
-            </a:pPr>
-            <a:r>
-              <a:rPr lang="en-US" sz="1400" dirty="0">
-                <a:solidFill>
-                  <a:schemeClr val="tx1"/>
-                </a:solidFill>
-              </a:rPr>
-              <a:t>P1 incidents per quarter and customers hit</a:t>
-            </a:r>
-            <a:endParaRPr lang="en-US" sz="1400" dirty="0"/>
-          </a:p>
-        </p:txBody>
-      </p:sp>
-      <p:sp>
-        <p:nvSpPr>
-          <p:cNvPr id="11" name="Text 8"/>
-          <p:cNvSpPr txBox="1"/>
-          <p:nvPr/>
-        </p:nvSpPr>
-        <p:spPr>
-          <a:xfrm>
-            <a:off x="3538728" y="2834640"/>
-            <a:ext cx="2286000" cy="502920"/>
-          </a:xfrm>
-          <a:prstGeom prst="rect">
-            <a:avLst/>
-          </a:prstGeom>
-          <a:noFill/>
-          <a:ln/>
-        </p:spPr>
-        <p:txBody>
-          <a:bodyPr wrap="square" lIns="0" tIns="0" rIns="0" bIns="0" rtlCol="0" anchor="t"/>
-          <a:lstStyle/>
-          <a:p>
-            <a:pPr indent="0" marL="0">
-              <a:buNone/>
-            </a:pPr>
-            <a:r>
-              <a:rPr lang="en-US" sz="1300" b="1" dirty="0">
-                <a:solidFill>
-                  <a:schemeClr val="accent2"/>
-                </a:solidFill>
-              </a:rPr>
-              <a:t>About 150 to 76 (cause open)</a:t>
-            </a:r>
-            <a:endParaRPr lang="en-US" sz="1300" dirty="0"/>
-          </a:p>
-        </p:txBody>
-      </p:sp>
-      <p:sp>
-        <p:nvSpPr>
-          <p:cNvPr id="12" name="dim-2"/>
-          <p:cNvSpPr/>
-          <p:nvPr/>
-        </p:nvSpPr>
-        <p:spPr>
-          <a:xfrm>
-            <a:off x="6163056" y="1371600"/>
-            <a:ext cx="2606040" cy="2103120"/>
-          </a:xfrm>
-          <a:prstGeom prst="roundRect">
-            <a:avLst>
-              <a:gd name="adj" fmla="val 3478"/>
-            </a:avLst>
-          </a:prstGeom>
-          <a:solidFill>
-            <a:schemeClr val="bg2"/>
-          </a:solidFill>
-          <a:ln w="12700">
-            <a:solidFill>
-              <a:schemeClr val="bg2"/>
-            </a:solidFill>
-            <a:prstDash val="solid"/>
-          </a:ln>
-        </p:spPr>
-      </p:sp>
-      <p:sp>
-        <p:nvSpPr>
-          <p:cNvPr id="13" name="Text 10"/>
-          <p:cNvSpPr txBox="1"/>
-          <p:nvPr/>
-        </p:nvSpPr>
-        <p:spPr>
-          <a:xfrm>
-            <a:off x="6345936" y="1508760"/>
-            <a:ext cx="2286000" cy="411480"/>
-          </a:xfrm>
-          <a:prstGeom prst="rect">
-            <a:avLst/>
-          </a:prstGeom>
-          <a:noFill/>
-          <a:ln/>
-        </p:spPr>
-        <p:txBody>
-          <a:bodyPr wrap="square" lIns="0" tIns="0" rIns="0" bIns="0" rtlCol="0" anchor="t"/>
-          <a:lstStyle/>
-          <a:p>
-            <a:pPr indent="0" marL="0">
-              <a:buNone/>
-            </a:pPr>
-            <a:r>
-              <a:rPr lang="en-US" sz="1700" b="1" dirty="0">
-                <a:solidFill>
-                  <a:schemeClr val="accent1"/>
-                </a:solidFill>
-                <a:latin typeface="Cambria" pitchFamily="34" charset="0"/>
-                <a:ea typeface="Cambria" pitchFamily="34" charset="-122"/>
-                <a:cs typeface="Cambria" pitchFamily="34" charset="-120"/>
-              </a:rPr>
-              <a:t>D3  </a:t>
-            </a:r>
-            <a:pPr indent="0" marL="0">
-              <a:buNone/>
-            </a:pPr>
-            <a:r>
-              <a:rPr lang="en-US" sz="1700" b="1" dirty="0">
-                <a:solidFill>
-                  <a:schemeClr val="tx1"/>
-                </a:solidFill>
-              </a:rPr>
-              <a:t>Performance</a:t>
-            </a:r>
-            <a:endParaRPr lang="en-US" sz="1700" dirty="0"/>
-          </a:p>
-        </p:txBody>
-      </p:sp>
-      <p:sp>
-        <p:nvSpPr>
-          <p:cNvPr id="14" name="Text 11"/>
-          <p:cNvSpPr txBox="1"/>
-          <p:nvPr/>
-        </p:nvSpPr>
-        <p:spPr>
-          <a:xfrm>
-            <a:off x="6345936" y="2011680"/>
-            <a:ext cx="2286000" cy="777240"/>
-          </a:xfrm>
-          <a:prstGeom prst="rect">
-            <a:avLst/>
-          </a:prstGeom>
-          <a:noFill/>
-          <a:ln/>
-        </p:spPr>
-        <p:txBody>
-          <a:bodyPr wrap="square" lIns="0" tIns="0" rIns="0" bIns="0" rtlCol="0" anchor="t"/>
-          <a:lstStyle/>
-          <a:p>
-            <a:pPr indent="0" marL="0">
-              <a:buNone/>
-            </a:pPr>
-            <a:r>
-              <a:rPr lang="en-US" sz="1400" dirty="0">
-                <a:solidFill>
-                  <a:schemeClr val="tx1"/>
-                </a:solidFill>
-              </a:rPr>
-              <a:t>Slow-system bugs and SLO breaches</a:t>
-            </a:r>
-            <a:endParaRPr lang="en-US" sz="1400" dirty="0"/>
-          </a:p>
-        </p:txBody>
-      </p:sp>
-      <p:sp>
-        <p:nvSpPr>
-          <p:cNvPr id="15" name="Text 12"/>
-          <p:cNvSpPr txBox="1"/>
-          <p:nvPr/>
-        </p:nvSpPr>
-        <p:spPr>
-          <a:xfrm>
-            <a:off x="6345936" y="2834640"/>
-            <a:ext cx="2286000" cy="502920"/>
-          </a:xfrm>
-          <a:prstGeom prst="rect">
-            <a:avLst/>
-          </a:prstGeom>
-          <a:noFill/>
-          <a:ln/>
-        </p:spPr>
-        <p:txBody>
-          <a:bodyPr wrap="square" lIns="0" tIns="0" rIns="0" bIns="0" rtlCol="0" anchor="t"/>
-          <a:lstStyle/>
-          <a:p>
-            <a:pPr indent="0" marL="0">
-              <a:buNone/>
-            </a:pPr>
-            <a:r>
-              <a:rPr lang="en-US" sz="1300" b="1" dirty="0">
-                <a:solidFill>
-                  <a:schemeClr val="accent2"/>
-                </a:solidFill>
-              </a:rPr>
-              <a:t>No SLO data yet</a:t>
-            </a:r>
-            <a:endParaRPr lang="en-US" sz="1300" dirty="0"/>
-          </a:p>
-        </p:txBody>
-      </p:sp>
-      <p:sp>
-        <p:nvSpPr>
-          <p:cNvPr id="16" name="dim-3"/>
-          <p:cNvSpPr/>
-          <p:nvPr/>
-        </p:nvSpPr>
-        <p:spPr>
-          <a:xfrm>
-            <a:off x="8970264" y="1371600"/>
-            <a:ext cx="2606040" cy="2103120"/>
-          </a:xfrm>
-          <a:prstGeom prst="roundRect">
-            <a:avLst>
-              <a:gd name="adj" fmla="val 3478"/>
-            </a:avLst>
-          </a:prstGeom>
-          <a:solidFill>
-            <a:schemeClr val="bg2"/>
-          </a:solidFill>
-          <a:ln w="12700">
-            <a:solidFill>
-              <a:schemeClr val="bg2"/>
-            </a:solidFill>
-            <a:prstDash val="solid"/>
-          </a:ln>
-        </p:spPr>
-      </p:sp>
-      <p:sp>
-        <p:nvSpPr>
-          <p:cNvPr id="17" name="Text 14"/>
-          <p:cNvSpPr txBox="1"/>
-          <p:nvPr/>
-        </p:nvSpPr>
-        <p:spPr>
-          <a:xfrm>
-            <a:off x="9153144" y="1508760"/>
-            <a:ext cx="2286000" cy="411480"/>
-          </a:xfrm>
-          <a:prstGeom prst="rect">
-            <a:avLst/>
-          </a:prstGeom>
-          <a:noFill/>
-          <a:ln/>
-        </p:spPr>
-        <p:txBody>
-          <a:bodyPr wrap="square" lIns="0" tIns="0" rIns="0" bIns="0" rtlCol="0" anchor="t"/>
-          <a:lstStyle/>
-          <a:p>
-            <a:pPr indent="0" marL="0">
-              <a:buNone/>
-            </a:pPr>
-            <a:r>
-              <a:rPr lang="en-US" sz="1700" b="1" dirty="0">
-                <a:solidFill>
-                  <a:schemeClr val="accent1"/>
-                </a:solidFill>
-                <a:latin typeface="Cambria" pitchFamily="34" charset="0"/>
-                <a:ea typeface="Cambria" pitchFamily="34" charset="-122"/>
-                <a:cs typeface="Cambria" pitchFamily="34" charset="-120"/>
-              </a:rPr>
-              <a:t>D4  </a:t>
-            </a:r>
-            <a:pPr indent="0" marL="0">
-              <a:buNone/>
-            </a:pPr>
-            <a:r>
-              <a:rPr lang="en-US" sz="1700" b="1" dirty="0">
-                <a:solidFill>
-                  <a:schemeClr val="tx1"/>
-                </a:solidFill>
-              </a:rPr>
-              <a:t>Detection</a:t>
-            </a:r>
-            <a:endParaRPr lang="en-US" sz="1700" dirty="0"/>
-          </a:p>
-        </p:txBody>
-      </p:sp>
-      <p:sp>
-        <p:nvSpPr>
-          <p:cNvPr id="18" name="Text 15"/>
-          <p:cNvSpPr txBox="1"/>
-          <p:nvPr/>
-        </p:nvSpPr>
-        <p:spPr>
-          <a:xfrm>
-            <a:off x="9153144" y="2011680"/>
-            <a:ext cx="2286000" cy="777240"/>
-          </a:xfrm>
-          <a:prstGeom prst="rect">
-            <a:avLst/>
-          </a:prstGeom>
-          <a:noFill/>
-          <a:ln/>
-        </p:spPr>
-        <p:txBody>
-          <a:bodyPr wrap="square" lIns="0" tIns="0" rIns="0" bIns="0" rtlCol="0" anchor="t"/>
-          <a:lstStyle/>
-          <a:p>
-            <a:pPr indent="0" marL="0">
-              <a:buNone/>
-            </a:pPr>
-            <a:r>
-              <a:rPr lang="en-US" sz="1400" dirty="0">
-                <a:solidFill>
-                  <a:schemeClr val="tx1"/>
-                </a:solidFill>
-              </a:rPr>
-              <a:t>Share of impact we find before customers</a:t>
-            </a:r>
-            <a:endParaRPr lang="en-US" sz="1400" dirty="0"/>
-          </a:p>
-        </p:txBody>
-      </p:sp>
-      <p:sp>
-        <p:nvSpPr>
-          <p:cNvPr id="19" name="Text 16"/>
-          <p:cNvSpPr txBox="1"/>
-          <p:nvPr/>
-        </p:nvSpPr>
-        <p:spPr>
-          <a:xfrm>
-            <a:off x="9153144" y="2834640"/>
-            <a:ext cx="2286000" cy="502920"/>
-          </a:xfrm>
-          <a:prstGeom prst="rect">
-            <a:avLst/>
-          </a:prstGeom>
-          <a:noFill/>
-          <a:ln/>
-        </p:spPr>
-        <p:txBody>
-          <a:bodyPr wrap="square" lIns="0" tIns="0" rIns="0" bIns="0" rtlCol="0" anchor="t"/>
-          <a:lstStyle/>
-          <a:p>
-            <a:pPr indent="0" marL="0">
-              <a:buNone/>
-            </a:pPr>
-            <a:r>
-              <a:rPr lang="en-US" sz="1300" b="1" dirty="0">
-                <a:solidFill>
-                  <a:schemeClr val="accent2"/>
-                </a:solidFill>
-              </a:rPr>
-              <a:t>96% of P1 via customers</a:t>
-            </a:r>
-            <a:endParaRPr lang="en-US" sz="1300" dirty="0"/>
-          </a:p>
-        </p:txBody>
-      </p:sp>
-      <p:sp>
-        <p:nvSpPr>
-          <p:cNvPr id="20" name="dim-4"/>
-          <p:cNvSpPr/>
-          <p:nvPr/>
-        </p:nvSpPr>
-        <p:spPr>
-          <a:xfrm>
-            <a:off x="548640" y="3611880"/>
-            <a:ext cx="2606040" cy="2103120"/>
-          </a:xfrm>
-          <a:prstGeom prst="roundRect">
-            <a:avLst>
-              <a:gd name="adj" fmla="val 3478"/>
-            </a:avLst>
-          </a:prstGeom>
-          <a:solidFill>
-            <a:schemeClr val="bg2"/>
-          </a:solidFill>
-          <a:ln w="12700">
-            <a:solidFill>
-              <a:schemeClr val="bg2"/>
-            </a:solidFill>
-            <a:prstDash val="solid"/>
-          </a:ln>
-        </p:spPr>
-      </p:sp>
-      <p:sp>
-        <p:nvSpPr>
-          <p:cNvPr id="21" name="Text 18"/>
-          <p:cNvSpPr txBox="1"/>
-          <p:nvPr/>
-        </p:nvSpPr>
-        <p:spPr>
-          <a:xfrm>
-            <a:off x="731520" y="3749040"/>
-            <a:ext cx="2286000" cy="411480"/>
-          </a:xfrm>
-          <a:prstGeom prst="rect">
-            <a:avLst/>
-          </a:prstGeom>
-          <a:noFill/>
-          <a:ln/>
-        </p:spPr>
-        <p:txBody>
-          <a:bodyPr wrap="square" lIns="0" tIns="0" rIns="0" bIns="0" rtlCol="0" anchor="t"/>
-          <a:lstStyle/>
-          <a:p>
-            <a:pPr indent="0" marL="0">
-              <a:buNone/>
-            </a:pPr>
-            <a:r>
-              <a:rPr lang="en-US" sz="1700" b="1" dirty="0">
-                <a:solidFill>
-                  <a:schemeClr val="accent1"/>
-                </a:solidFill>
-                <a:latin typeface="Cambria" pitchFamily="34" charset="0"/>
-                <a:ea typeface="Cambria" pitchFamily="34" charset="-122"/>
-                <a:cs typeface="Cambria" pitchFamily="34" charset="-120"/>
-              </a:rPr>
-              <a:t>D5  </a:t>
-            </a:r>
-            <a:pPr indent="0" marL="0">
-              <a:buNone/>
-            </a:pPr>
-            <a:r>
-              <a:rPr lang="en-US" sz="1700" b="1" dirty="0">
-                <a:solidFill>
-                  <a:schemeClr val="tx1"/>
-                </a:solidFill>
-              </a:rPr>
-              <a:t>Recovery</a:t>
-            </a:r>
-            <a:endParaRPr lang="en-US" sz="1700" dirty="0"/>
-          </a:p>
-        </p:txBody>
-      </p:sp>
-      <p:sp>
-        <p:nvSpPr>
-          <p:cNvPr id="22" name="Text 19"/>
-          <p:cNvSpPr txBox="1"/>
-          <p:nvPr/>
-        </p:nvSpPr>
-        <p:spPr>
-          <a:xfrm>
-            <a:off x="731520" y="4251960"/>
-            <a:ext cx="2286000" cy="777240"/>
-          </a:xfrm>
-          <a:prstGeom prst="rect">
-            <a:avLst/>
-          </a:prstGeom>
-          <a:noFill/>
-          <a:ln/>
-        </p:spPr>
-        <p:txBody>
-          <a:bodyPr wrap="square" lIns="0" tIns="0" rIns="0" bIns="0" rtlCol="0" anchor="t"/>
-          <a:lstStyle/>
-          <a:p>
-            <a:pPr indent="0" marL="0">
-              <a:buNone/>
-            </a:pPr>
-            <a:r>
-              <a:rPr lang="en-US" sz="1400" dirty="0">
-                <a:solidFill>
-                  <a:schemeClr val="tx1"/>
-                </a:solidFill>
-              </a:rPr>
-              <a:t>Time to restore and time to fix a bug</a:t>
-            </a:r>
-            <a:endParaRPr lang="en-US" sz="1400" dirty="0"/>
-          </a:p>
-        </p:txBody>
-      </p:sp>
-      <p:sp>
-        <p:nvSpPr>
-          <p:cNvPr id="23" name="Text 20"/>
-          <p:cNvSpPr txBox="1"/>
-          <p:nvPr/>
-        </p:nvSpPr>
-        <p:spPr>
-          <a:xfrm>
-            <a:off x="731520" y="5074920"/>
-            <a:ext cx="2286000" cy="502920"/>
-          </a:xfrm>
-          <a:prstGeom prst="rect">
-            <a:avLst/>
-          </a:prstGeom>
-          <a:noFill/>
-          <a:ln/>
-        </p:spPr>
-        <p:txBody>
-          <a:bodyPr wrap="square" lIns="0" tIns="0" rIns="0" bIns="0" rtlCol="0" anchor="t"/>
-          <a:lstStyle/>
-          <a:p>
-            <a:pPr indent="0" marL="0">
-              <a:buNone/>
-            </a:pPr>
-            <a:r>
-              <a:rPr lang="en-US" sz="1300" b="1" dirty="0">
-                <a:solidFill>
-                  <a:schemeClr val="accent2"/>
-                </a:solidFill>
-              </a:rPr>
-              <a:t>Fix median 10 days</a:t>
-            </a:r>
-            <a:endParaRPr lang="en-US" sz="1300" dirty="0"/>
-          </a:p>
-        </p:txBody>
-      </p:sp>
-      <p:sp>
-        <p:nvSpPr>
-          <p:cNvPr id="24" name="dim-5"/>
-          <p:cNvSpPr/>
-          <p:nvPr/>
-        </p:nvSpPr>
-        <p:spPr>
-          <a:xfrm>
-            <a:off x="3355848" y="3611880"/>
-            <a:ext cx="2606040" cy="2103120"/>
-          </a:xfrm>
-          <a:prstGeom prst="roundRect">
-            <a:avLst>
-              <a:gd name="adj" fmla="val 3478"/>
-            </a:avLst>
-          </a:prstGeom>
-          <a:solidFill>
-            <a:schemeClr val="bg2"/>
-          </a:solidFill>
-          <a:ln w="12700">
-            <a:solidFill>
-              <a:schemeClr val="bg2"/>
-            </a:solidFill>
-            <a:prstDash val="solid"/>
-          </a:ln>
-        </p:spPr>
-      </p:sp>
-      <p:sp>
-        <p:nvSpPr>
-          <p:cNvPr id="25" name="Text 22"/>
-          <p:cNvSpPr txBox="1"/>
-          <p:nvPr/>
-        </p:nvSpPr>
-        <p:spPr>
-          <a:xfrm>
-            <a:off x="3538728" y="3749040"/>
-            <a:ext cx="2286000" cy="411480"/>
-          </a:xfrm>
-          <a:prstGeom prst="rect">
-            <a:avLst/>
-          </a:prstGeom>
-          <a:noFill/>
-          <a:ln/>
-        </p:spPr>
-        <p:txBody>
-          <a:bodyPr wrap="square" lIns="0" tIns="0" rIns="0" bIns="0" rtlCol="0" anchor="t"/>
-          <a:lstStyle/>
-          <a:p>
-            <a:pPr indent="0" marL="0">
-              <a:buNone/>
-            </a:pPr>
-            <a:r>
-              <a:rPr lang="en-US" sz="1700" b="1" dirty="0">
-                <a:solidFill>
-                  <a:schemeClr val="accent1"/>
-                </a:solidFill>
-                <a:latin typeface="Cambria" pitchFamily="34" charset="0"/>
-                <a:ea typeface="Cambria" pitchFamily="34" charset="-122"/>
-                <a:cs typeface="Cambria" pitchFamily="34" charset="-120"/>
-              </a:rPr>
-              <a:t>D6  </a:t>
-            </a:r>
-            <a:pPr indent="0" marL="0">
-              <a:buNone/>
-            </a:pPr>
-            <a:r>
-              <a:rPr lang="en-US" sz="1700" b="1" dirty="0">
-                <a:solidFill>
-                  <a:schemeClr val="tx1"/>
-                </a:solidFill>
-              </a:rPr>
-              <a:t>Change safety</a:t>
-            </a:r>
-            <a:endParaRPr lang="en-US" sz="1700" dirty="0"/>
-          </a:p>
-        </p:txBody>
-      </p:sp>
-      <p:sp>
-        <p:nvSpPr>
-          <p:cNvPr id="26" name="Text 23"/>
-          <p:cNvSpPr txBox="1"/>
-          <p:nvPr/>
-        </p:nvSpPr>
-        <p:spPr>
-          <a:xfrm>
-            <a:off x="3538728" y="4251960"/>
-            <a:ext cx="2286000" cy="777240"/>
-          </a:xfrm>
-          <a:prstGeom prst="rect">
-            <a:avLst/>
-          </a:prstGeom>
-          <a:noFill/>
-          <a:ln/>
-        </p:spPr>
-        <p:txBody>
-          <a:bodyPr wrap="square" lIns="0" tIns="0" rIns="0" bIns="0" rtlCol="0" anchor="t"/>
-          <a:lstStyle/>
-          <a:p>
-            <a:pPr indent="0" marL="0">
-              <a:buNone/>
-            </a:pPr>
-            <a:r>
-              <a:rPr lang="en-US" sz="1400" dirty="0">
-                <a:solidFill>
-                  <a:schemeClr val="tx1"/>
-                </a:solidFill>
-              </a:rPr>
-              <a:t>Bugs caused by fixes, emergency or recent changes</a:t>
-            </a:r>
-            <a:endParaRPr lang="en-US" sz="1400" dirty="0"/>
-          </a:p>
-        </p:txBody>
-      </p:sp>
-      <p:sp>
-        <p:nvSpPr>
-          <p:cNvPr id="27" name="Text 24"/>
-          <p:cNvSpPr txBox="1"/>
-          <p:nvPr/>
-        </p:nvSpPr>
-        <p:spPr>
-          <a:xfrm>
-            <a:off x="3538728" y="5074920"/>
-            <a:ext cx="2286000" cy="502920"/>
-          </a:xfrm>
-          <a:prstGeom prst="rect">
-            <a:avLst/>
-          </a:prstGeom>
-          <a:noFill/>
-          <a:ln/>
-        </p:spPr>
-        <p:txBody>
-          <a:bodyPr wrap="square" lIns="0" tIns="0" rIns="0" bIns="0" rtlCol="0" anchor="t"/>
-          <a:lstStyle/>
-          <a:p>
-            <a:pPr indent="0" marL="0">
-              <a:buNone/>
-            </a:pPr>
-            <a:r>
-              <a:rPr lang="en-US" sz="1300" b="1" dirty="0">
-                <a:solidFill>
-                  <a:schemeClr val="accent2"/>
-                </a:solidFill>
-              </a:rPr>
-              <a:t>Fix-caused 24% to 27%</a:t>
-            </a:r>
-            <a:endParaRPr lang="en-US" sz="1300" dirty="0"/>
-          </a:p>
-        </p:txBody>
-      </p:sp>
-      <p:sp>
-        <p:nvSpPr>
-          <p:cNvPr id="28" name="dim-6"/>
-          <p:cNvSpPr/>
-          <p:nvPr/>
-        </p:nvSpPr>
-        <p:spPr>
-          <a:xfrm>
-            <a:off x="6163056" y="3611880"/>
-            <a:ext cx="2606040" cy="2103120"/>
-          </a:xfrm>
-          <a:prstGeom prst="roundRect">
-            <a:avLst>
-              <a:gd name="adj" fmla="val 3478"/>
-            </a:avLst>
-          </a:prstGeom>
-          <a:solidFill>
-            <a:schemeClr val="bg2"/>
-          </a:solidFill>
-          <a:ln w="12700">
-            <a:solidFill>
-              <a:schemeClr val="bg2"/>
-            </a:solidFill>
-            <a:prstDash val="solid"/>
-          </a:ln>
-        </p:spPr>
-      </p:sp>
-      <p:sp>
-        <p:nvSpPr>
-          <p:cNvPr id="29" name="Text 26"/>
-          <p:cNvSpPr txBox="1"/>
-          <p:nvPr/>
-        </p:nvSpPr>
-        <p:spPr>
-          <a:xfrm>
-            <a:off x="6345936" y="3749040"/>
-            <a:ext cx="2286000" cy="411480"/>
-          </a:xfrm>
-          <a:prstGeom prst="rect">
-            <a:avLst/>
-          </a:prstGeom>
-          <a:noFill/>
-          <a:ln/>
-        </p:spPr>
-        <p:txBody>
-          <a:bodyPr wrap="square" lIns="0" tIns="0" rIns="0" bIns="0" rtlCol="0" anchor="t"/>
-          <a:lstStyle/>
-          <a:p>
-            <a:pPr indent="0" marL="0">
-              <a:buNone/>
-            </a:pPr>
-            <a:r>
-              <a:rPr lang="en-US" sz="1700" b="1" dirty="0">
-                <a:solidFill>
-                  <a:schemeClr val="accent1"/>
-                </a:solidFill>
-                <a:latin typeface="Cambria" pitchFamily="34" charset="0"/>
-                <a:ea typeface="Cambria" pitchFamily="34" charset="-122"/>
-                <a:cs typeface="Cambria" pitchFamily="34" charset="-120"/>
-              </a:rPr>
-              <a:t>D7  </a:t>
-            </a:r>
-            <a:pPr indent="0" marL="0">
-              <a:buNone/>
-            </a:pPr>
-            <a:r>
-              <a:rPr lang="en-US" sz="1700" b="1" dirty="0">
-                <a:solidFill>
-                  <a:schemeClr val="tx1"/>
-                </a:solidFill>
-              </a:rPr>
-              <a:t>Non-recurrence</a:t>
-            </a:r>
-            <a:endParaRPr lang="en-US" sz="1700" dirty="0"/>
-          </a:p>
-        </p:txBody>
-      </p:sp>
-      <p:sp>
-        <p:nvSpPr>
-          <p:cNvPr id="30" name="Text 27"/>
-          <p:cNvSpPr txBox="1"/>
-          <p:nvPr/>
-        </p:nvSpPr>
-        <p:spPr>
-          <a:xfrm>
-            <a:off x="6345936" y="4251960"/>
-            <a:ext cx="2286000" cy="777240"/>
-          </a:xfrm>
-          <a:prstGeom prst="rect">
-            <a:avLst/>
-          </a:prstGeom>
-          <a:noFill/>
-          <a:ln/>
-        </p:spPr>
-        <p:txBody>
-          <a:bodyPr wrap="square" lIns="0" tIns="0" rIns="0" bIns="0" rtlCol="0" anchor="t"/>
-          <a:lstStyle/>
-          <a:p>
-            <a:pPr indent="0" marL="0">
-              <a:buNone/>
-            </a:pPr>
-            <a:r>
-              <a:rPr lang="en-US" sz="1400" dirty="0">
-                <a:solidFill>
-                  <a:schemeClr val="tx1"/>
-                </a:solidFill>
-              </a:rPr>
-              <a:t>Do fixes hold: repeats and reopens</a:t>
-            </a:r>
-            <a:endParaRPr lang="en-US" sz="1400" dirty="0"/>
-          </a:p>
-        </p:txBody>
-      </p:sp>
-      <p:sp>
-        <p:nvSpPr>
-          <p:cNvPr id="31" name="Text 28"/>
-          <p:cNvSpPr txBox="1"/>
-          <p:nvPr/>
-        </p:nvSpPr>
-        <p:spPr>
-          <a:xfrm>
-            <a:off x="6345936" y="5074920"/>
-            <a:ext cx="2286000" cy="502920"/>
-          </a:xfrm>
-          <a:prstGeom prst="rect">
-            <a:avLst/>
-          </a:prstGeom>
-          <a:noFill/>
-          <a:ln/>
-        </p:spPr>
-        <p:txBody>
-          <a:bodyPr wrap="square" lIns="0" tIns="0" rIns="0" bIns="0" rtlCol="0" anchor="t"/>
-          <a:lstStyle/>
-          <a:p>
-            <a:pPr indent="0" marL="0">
-              <a:buNone/>
-            </a:pPr>
-            <a:r>
-              <a:rPr lang="en-US" sz="1300" b="1" dirty="0">
-                <a:solidFill>
-                  <a:schemeClr val="accent2"/>
-                </a:solidFill>
-              </a:rPr>
-              <a:t>Recurrence 3.9% to 1.5%</a:t>
-            </a:r>
-            <a:endParaRPr lang="en-US" sz="1300" dirty="0"/>
-          </a:p>
-        </p:txBody>
-      </p:sp>
-      <p:sp>
-        <p:nvSpPr>
-          <p:cNvPr id="32" name="dim-7"/>
-          <p:cNvSpPr/>
-          <p:nvPr/>
-        </p:nvSpPr>
-        <p:spPr>
-          <a:xfrm>
-            <a:off x="8970264" y="3611880"/>
-            <a:ext cx="2606040" cy="2103120"/>
-          </a:xfrm>
-          <a:prstGeom prst="roundRect">
-            <a:avLst>
-              <a:gd name="adj" fmla="val 3478"/>
-            </a:avLst>
-          </a:prstGeom>
-          <a:solidFill>
-            <a:schemeClr val="bg2"/>
-          </a:solidFill>
-          <a:ln w="12700">
-            <a:solidFill>
-              <a:schemeClr val="bg2"/>
-            </a:solidFill>
-            <a:prstDash val="solid"/>
-          </a:ln>
-        </p:spPr>
-      </p:sp>
-      <p:sp>
-        <p:nvSpPr>
-          <p:cNvPr id="33" name="Text 30"/>
-          <p:cNvSpPr txBox="1"/>
-          <p:nvPr/>
-        </p:nvSpPr>
-        <p:spPr>
-          <a:xfrm>
-            <a:off x="9153144" y="3749040"/>
-            <a:ext cx="2286000" cy="411480"/>
-          </a:xfrm>
-          <a:prstGeom prst="rect">
-            <a:avLst/>
-          </a:prstGeom>
-          <a:noFill/>
-          <a:ln/>
-        </p:spPr>
-        <p:txBody>
-          <a:bodyPr wrap="square" lIns="0" tIns="0" rIns="0" bIns="0" rtlCol="0" anchor="t"/>
-          <a:lstStyle/>
-          <a:p>
-            <a:pPr indent="0" marL="0">
-              <a:buNone/>
-            </a:pPr>
-            <a:r>
-              <a:rPr lang="en-US" sz="1700" b="1" dirty="0">
-                <a:solidFill>
-                  <a:schemeClr val="accent1"/>
-                </a:solidFill>
-                <a:latin typeface="Cambria" pitchFamily="34" charset="0"/>
-                <a:ea typeface="Cambria" pitchFamily="34" charset="-122"/>
-                <a:cs typeface="Cambria" pitchFamily="34" charset="-120"/>
-              </a:rPr>
-              <a:t>D8  </a:t>
-            </a:r>
-            <a:pPr indent="0" marL="0">
-              <a:buNone/>
-            </a:pPr>
-            <a:r>
-              <a:rPr lang="en-US" sz="1700" b="1" dirty="0">
-                <a:solidFill>
-                  <a:schemeClr val="tx1"/>
-                </a:solidFill>
-              </a:rPr>
-              <a:t>Expectation fit</a:t>
-            </a:r>
-            <a:endParaRPr lang="en-US" sz="1700" dirty="0"/>
-          </a:p>
-        </p:txBody>
-      </p:sp>
-      <p:sp>
-        <p:nvSpPr>
-          <p:cNvPr id="34" name="Text 31"/>
-          <p:cNvSpPr txBox="1"/>
-          <p:nvPr/>
-        </p:nvSpPr>
-        <p:spPr>
-          <a:xfrm>
-            <a:off x="9153144" y="4251960"/>
-            <a:ext cx="2286000" cy="777240"/>
-          </a:xfrm>
-          <a:prstGeom prst="rect">
-            <a:avLst/>
-          </a:prstGeom>
-          <a:noFill/>
-          <a:ln/>
-        </p:spPr>
-        <p:txBody>
-          <a:bodyPr wrap="square" lIns="0" tIns="0" rIns="0" bIns="0" rtlCol="0" anchor="t"/>
-          <a:lstStyle/>
-          <a:p>
-            <a:pPr indent="0" marL="0">
-              <a:buNone/>
-            </a:pPr>
-            <a:r>
-              <a:rPr lang="en-US" sz="1400" dirty="0">
-                <a:solidFill>
-                  <a:schemeClr val="tx1"/>
-                </a:solidFill>
-              </a:rPr>
-              <a:t>Reports closed as designed that are real gaps</a:t>
-            </a:r>
-            <a:endParaRPr lang="en-US" sz="1400" dirty="0"/>
-          </a:p>
-        </p:txBody>
-      </p:sp>
-      <p:sp>
-        <p:nvSpPr>
-          <p:cNvPr id="35" name="Text 32"/>
-          <p:cNvSpPr txBox="1"/>
-          <p:nvPr/>
-        </p:nvSpPr>
-        <p:spPr>
-          <a:xfrm>
-            <a:off x="9153144" y="5074920"/>
-            <a:ext cx="2286000" cy="502920"/>
-          </a:xfrm>
-          <a:prstGeom prst="rect">
-            <a:avLst/>
-          </a:prstGeom>
-          <a:noFill/>
-          <a:ln/>
-        </p:spPr>
-        <p:txBody>
-          <a:bodyPr wrap="square" lIns="0" tIns="0" rIns="0" bIns="0" rtlCol="0" anchor="t"/>
-          <a:lstStyle/>
-          <a:p>
-            <a:pPr indent="0" marL="0">
-              <a:buNone/>
-            </a:pPr>
-            <a:r>
-              <a:rPr lang="en-US" sz="1300" b="1" dirty="0">
-                <a:solidFill>
-                  <a:schemeClr val="accent2"/>
-                </a:solidFill>
-              </a:rPr>
-              <a:t>42% of those are real gaps</a:t>
-            </a:r>
-            <a:endParaRPr lang="en-US" sz="1300" dirty="0"/>
-          </a:p>
-        </p:txBody>
-      </p:sp>
-      <p:sp>
-        <p:nvSpPr>
-          <p:cNvPr id="36" name="Text 33"/>
-          <p:cNvSpPr txBox="1"/>
-          <p:nvPr/>
-        </p:nvSpPr>
-        <p:spPr>
-          <a:xfrm>
-            <a:off x="548640" y="5943600"/>
-            <a:ext cx="11064240" cy="365760"/>
-          </a:xfrm>
-          <a:prstGeom prst="rect">
-            <a:avLst/>
-          </a:prstGeom>
-          <a:noFill/>
-          <a:ln/>
-        </p:spPr>
-        <p:txBody>
-          <a:bodyPr wrap="square" lIns="0" tIns="0" rIns="0" bIns="0" rtlCol="0" anchor="t"/>
-          <a:lstStyle/>
-          <a:p>
-            <a:pPr indent="0" marL="0">
-              <a:buNone/>
-            </a:pPr>
-            <a:r>
-              <a:rPr lang="en-US" sz="1400" dirty="0">
-                <a:solidFill>
-                  <a:schemeClr val="tx2"/>
-                </a:solidFill>
-              </a:rPr>
-              <a:t>Rule: a pod outside its own range for 2 months gets an investigation, not a punishment.</a:t>
-            </a:r>
-            <a:endParaRPr lang="en-US" sz="1400" dirty="0"/>
-          </a:p>
-        </p:txBody>
-      </p:sp>
+      <p:graphicFrame>
+        <p:nvGraphicFramePr>
+          <p:cNvPr id="11" name="metrics-table"/>
+          <p:cNvGraphicFramePr>
+            <a:graphicFrameLocks noGrp="1"/>
+          </p:cNvGraphicFramePr>
+          <p:nvPr>
+            <p:extLst>
+              <p:ext uri="{D42A27DB-BD31-4B8C-83A1-F6EECF244321}">
+                <p14:modId xmlns:p14="http://schemas.microsoft.com/office/powerpoint/2010/main" val="1579011935"/>
+              </p:ext>
+            </p:extLst>
+          </p:nvPr>
+        </p:nvGraphicFramePr>
+        <p:xfrm>
+          <a:off x="548640" y="1371600"/>
+          <a:ext cx="11064240" cy="914400"/>
+        </p:xfrm>
+        <a:graphic>
+          <a:graphicData uri="http://schemas.openxmlformats.org/drawingml/2006/table">
+            <a:tbl>
+              <a:tblPr/>
+              <a:tblGrid>
+                <a:gridCol w="1737360"/>
+                <a:gridCol w="2834640"/>
+                <a:gridCol w="2468880"/>
+                <a:gridCol w="2103120"/>
+                <a:gridCol w="1920240"/>
+              </a:tblGrid>
+              <a:tr h="457200">
+                <a:tc>
+                  <a:txBody>
+                    <a:bodyPr/>
+                    <a:lstStyle/>
+                    <a:p>
+                      <a:pPr indent="0" marL="0">
+                        <a:buNone/>
+                      </a:pPr>
+                      <a:r>
+                        <a:rPr lang="en-US" sz="1400" b="1" dirty="0">
+                          <a:solidFill>
+                            <a:srgbClr val="FFFFFF"/>
+                          </a:solidFill>
+                          <a:latin typeface="Calibri" pitchFamily="34" charset="0"/>
+                          <a:ea typeface="Calibri" pitchFamily="34" charset="-122"/>
+                          <a:cs typeface="Calibri" pitchFamily="34" charset="-120"/>
+                        </a:rPr>
+                        <a:t>Metric</a:t>
+                      </a:r>
+                      <a:endParaRPr lang="en-US" sz="1400" dirty="0">
+                        <a:latin typeface="Calibri" charset="0"/>
+                        <a:ea typeface="Calibri" charset="0"/>
+                        <a:cs typeface="Calibri" charset="0"/>
+                      </a:endParaRPr>
+                    </a:p>
+                  </a:txBody>
+                  <a:tcPr marL="91440" marR="91440" marT="45720" marB="45720" anchor="ctr">
+                    <a:lnL w="6350" cap="flat" cmpd="sng" algn="ctr">
+                      <a:solidFill>
+                        <a:srgbClr val="DDE3EA"/>
+                      </a:solidFill>
+                      <a:prstDash val="solid"/>
+                      <a:round/>
+                      <a:headEnd type="none" w="med" len="med"/>
+                      <a:tailEnd type="none" w="med" len="med"/>
+                    </a:lnL>
+                    <a:lnR w="6350" cap="flat" cmpd="sng" algn="ctr">
+                      <a:solidFill>
+                        <a:srgbClr val="DDE3EA"/>
+                      </a:solidFill>
+                      <a:prstDash val="solid"/>
+                      <a:round/>
+                      <a:headEnd type="none" w="med" len="med"/>
+                      <a:tailEnd type="none" w="med" len="med"/>
+                    </a:lnR>
+                    <a:lnT w="6350" cap="flat" cmpd="sng" algn="ctr">
+                      <a:solidFill>
+                        <a:srgbClr val="DDE3EA"/>
+                      </a:solidFill>
+                      <a:prstDash val="solid"/>
+                      <a:round/>
+                      <a:headEnd type="none" w="med" len="med"/>
+                      <a:tailEnd type="none" w="med" len="med"/>
+                    </a:lnT>
+                    <a:lnB w="6350" cap="flat" cmpd="sng" algn="ctr">
+                      <a:solidFill>
+                        <a:srgbClr val="DDE3EA"/>
+                      </a:solidFill>
+                      <a:prstDash val="solid"/>
+                      <a:round/>
+                      <a:headEnd type="none" w="med" len="med"/>
+                      <a:tailEnd type="none" w="med" len="med"/>
+                    </a:lnB>
+                    <a:solidFill>
+                      <a:srgbClr val="1B2A41"/>
+                    </a:solidFill>
+                  </a:tcPr>
+                </a:tc>
+                <a:tc>
+                  <a:txBody>
+                    <a:bodyPr/>
+                    <a:lstStyle/>
+                    <a:p>
+                      <a:pPr indent="0" marL="0">
+                        <a:buNone/>
+                      </a:pPr>
+                      <a:r>
+                        <a:rPr lang="en-US" sz="1400" b="1" dirty="0">
+                          <a:solidFill>
+                            <a:srgbClr val="FFFFFF"/>
+                          </a:solidFill>
+                          <a:latin typeface="Calibri" pitchFamily="34" charset="0"/>
+                          <a:ea typeface="Calibri" pitchFamily="34" charset="-122"/>
+                          <a:cs typeface="Calibri" pitchFamily="34" charset="-120"/>
+                        </a:rPr>
+                        <a:t>What it measures</a:t>
+                      </a:r>
+                      <a:endParaRPr lang="en-US" sz="1400" dirty="0">
+                        <a:latin typeface="Calibri" charset="0"/>
+                        <a:ea typeface="Calibri" charset="0"/>
+                        <a:cs typeface="Calibri" charset="0"/>
+                      </a:endParaRPr>
+                    </a:p>
+                  </a:txBody>
+                  <a:tcPr marL="91440" marR="91440" marT="45720" marB="45720" anchor="ctr">
+                    <a:lnL w="6350" cap="flat" cmpd="sng" algn="ctr">
+                      <a:solidFill>
+                        <a:srgbClr val="DDE3EA"/>
+                      </a:solidFill>
+                      <a:prstDash val="solid"/>
+                      <a:round/>
+                      <a:headEnd type="none" w="med" len="med"/>
+                      <a:tailEnd type="none" w="med" len="med"/>
+                    </a:lnL>
+                    <a:lnR w="6350" cap="flat" cmpd="sng" algn="ctr">
+                      <a:solidFill>
+                        <a:srgbClr val="DDE3EA"/>
+                      </a:solidFill>
+                      <a:prstDash val="solid"/>
+                      <a:round/>
+                      <a:headEnd type="none" w="med" len="med"/>
+                      <a:tailEnd type="none" w="med" len="med"/>
+                    </a:lnR>
+                    <a:lnT w="6350" cap="flat" cmpd="sng" algn="ctr">
+                      <a:solidFill>
+                        <a:srgbClr val="DDE3EA"/>
+                      </a:solidFill>
+                      <a:prstDash val="solid"/>
+                      <a:round/>
+                      <a:headEnd type="none" w="med" len="med"/>
+                      <a:tailEnd type="none" w="med" len="med"/>
+                    </a:lnT>
+                    <a:lnB w="6350" cap="flat" cmpd="sng" algn="ctr">
+                      <a:solidFill>
+                        <a:srgbClr val="DDE3EA"/>
+                      </a:solidFill>
+                      <a:prstDash val="solid"/>
+                      <a:round/>
+                      <a:headEnd type="none" w="med" len="med"/>
+                      <a:tailEnd type="none" w="med" len="med"/>
+                    </a:lnB>
+                    <a:solidFill>
+                      <a:srgbClr val="1B2A41"/>
+                    </a:solidFill>
+                  </a:tcPr>
+                </a:tc>
+                <a:tc>
+                  <a:txBody>
+                    <a:bodyPr/>
+                    <a:lstStyle/>
+                    <a:p>
+                      <a:pPr indent="0" marL="0">
+                        <a:buNone/>
+                      </a:pPr>
+                      <a:r>
+                        <a:rPr lang="en-US" sz="1400" b="1" dirty="0">
+                          <a:solidFill>
+                            <a:srgbClr val="FFFFFF"/>
+                          </a:solidFill>
+                          <a:latin typeface="Calibri" pitchFamily="34" charset="0"/>
+                          <a:ea typeface="Calibri" pitchFamily="34" charset="-122"/>
+                          <a:cs typeface="Calibri" pitchFamily="34" charset="-120"/>
+                        </a:rPr>
+                        <a:t>Today (2025 to 2026)</a:t>
+                      </a:r>
+                      <a:endParaRPr lang="en-US" sz="1400" dirty="0">
+                        <a:latin typeface="Calibri" charset="0"/>
+                        <a:ea typeface="Calibri" charset="0"/>
+                        <a:cs typeface="Calibri" charset="0"/>
+                      </a:endParaRPr>
+                    </a:p>
+                  </a:txBody>
+                  <a:tcPr marL="91440" marR="91440" marT="45720" marB="45720" anchor="ctr">
+                    <a:lnL w="6350" cap="flat" cmpd="sng" algn="ctr">
+                      <a:solidFill>
+                        <a:srgbClr val="DDE3EA"/>
+                      </a:solidFill>
+                      <a:prstDash val="solid"/>
+                      <a:round/>
+                      <a:headEnd type="none" w="med" len="med"/>
+                      <a:tailEnd type="none" w="med" len="med"/>
+                    </a:lnL>
+                    <a:lnR w="6350" cap="flat" cmpd="sng" algn="ctr">
+                      <a:solidFill>
+                        <a:srgbClr val="DDE3EA"/>
+                      </a:solidFill>
+                      <a:prstDash val="solid"/>
+                      <a:round/>
+                      <a:headEnd type="none" w="med" len="med"/>
+                      <a:tailEnd type="none" w="med" len="med"/>
+                    </a:lnR>
+                    <a:lnT w="6350" cap="flat" cmpd="sng" algn="ctr">
+                      <a:solidFill>
+                        <a:srgbClr val="DDE3EA"/>
+                      </a:solidFill>
+                      <a:prstDash val="solid"/>
+                      <a:round/>
+                      <a:headEnd type="none" w="med" len="med"/>
+                      <a:tailEnd type="none" w="med" len="med"/>
+                    </a:lnT>
+                    <a:lnB w="6350" cap="flat" cmpd="sng" algn="ctr">
+                      <a:solidFill>
+                        <a:srgbClr val="DDE3EA"/>
+                      </a:solidFill>
+                      <a:prstDash val="solid"/>
+                      <a:round/>
+                      <a:headEnd type="none" w="med" len="med"/>
+                      <a:tailEnd type="none" w="med" len="med"/>
+                    </a:lnB>
+                    <a:solidFill>
+                      <a:srgbClr val="1B2A41"/>
+                    </a:solidFill>
+                  </a:tcPr>
+                </a:tc>
+                <a:tc>
+                  <a:txBody>
+                    <a:bodyPr/>
+                    <a:lstStyle/>
+                    <a:p>
+                      <a:pPr indent="0" marL="0">
+                        <a:buNone/>
+                      </a:pPr>
+                      <a:r>
+                        <a:rPr lang="en-US" sz="1400" b="1" dirty="0">
+                          <a:solidFill>
+                            <a:srgbClr val="FFFFFF"/>
+                          </a:solidFill>
+                          <a:latin typeface="Calibri" pitchFamily="34" charset="0"/>
+                          <a:ea typeface="Calibri" pitchFamily="34" charset="-122"/>
+                          <a:cs typeface="Calibri" pitchFamily="34" charset="-120"/>
+                        </a:rPr>
+                        <a:t>Data limit</a:t>
+                      </a:r>
+                      <a:endParaRPr lang="en-US" sz="1400" dirty="0">
+                        <a:latin typeface="Calibri" charset="0"/>
+                        <a:ea typeface="Calibri" charset="0"/>
+                        <a:cs typeface="Calibri" charset="0"/>
+                      </a:endParaRPr>
+                    </a:p>
+                  </a:txBody>
+                  <a:tcPr marL="91440" marR="91440" marT="45720" marB="45720" anchor="ctr">
+                    <a:lnL w="6350" cap="flat" cmpd="sng" algn="ctr">
+                      <a:solidFill>
+                        <a:srgbClr val="DDE3EA"/>
+                      </a:solidFill>
+                      <a:prstDash val="solid"/>
+                      <a:round/>
+                      <a:headEnd type="none" w="med" len="med"/>
+                      <a:tailEnd type="none" w="med" len="med"/>
+                    </a:lnL>
+                    <a:lnR w="6350" cap="flat" cmpd="sng" algn="ctr">
+                      <a:solidFill>
+                        <a:srgbClr val="DDE3EA"/>
+                      </a:solidFill>
+                      <a:prstDash val="solid"/>
+                      <a:round/>
+                      <a:headEnd type="none" w="med" len="med"/>
+                      <a:tailEnd type="none" w="med" len="med"/>
+                    </a:lnR>
+                    <a:lnT w="6350" cap="flat" cmpd="sng" algn="ctr">
+                      <a:solidFill>
+                        <a:srgbClr val="DDE3EA"/>
+                      </a:solidFill>
+                      <a:prstDash val="solid"/>
+                      <a:round/>
+                      <a:headEnd type="none" w="med" len="med"/>
+                      <a:tailEnd type="none" w="med" len="med"/>
+                    </a:lnT>
+                    <a:lnB w="6350" cap="flat" cmpd="sng" algn="ctr">
+                      <a:solidFill>
+                        <a:srgbClr val="DDE3EA"/>
+                      </a:solidFill>
+                      <a:prstDash val="solid"/>
+                      <a:round/>
+                      <a:headEnd type="none" w="med" len="med"/>
+                      <a:tailEnd type="none" w="med" len="med"/>
+                    </a:lnB>
+                    <a:solidFill>
+                      <a:srgbClr val="1B2A41"/>
+                    </a:solidFill>
+                  </a:tcPr>
+                </a:tc>
+                <a:tc>
+                  <a:txBody>
+                    <a:bodyPr/>
+                    <a:lstStyle/>
+                    <a:p>
+                      <a:pPr indent="0" marL="0">
+                        <a:buNone/>
+                      </a:pPr>
+                      <a:r>
+                        <a:rPr lang="en-US" sz="1400" b="1" dirty="0">
+                          <a:solidFill>
+                            <a:srgbClr val="FFFFFF"/>
+                          </a:solidFill>
+                          <a:latin typeface="Calibri" pitchFamily="34" charset="0"/>
+                          <a:ea typeface="Calibri" pitchFamily="34" charset="-122"/>
+                          <a:cs typeface="Calibri" pitchFamily="34" charset="-120"/>
+                        </a:rPr>
+                        <a:t>Decision it supports</a:t>
+                      </a:r>
+                      <a:endParaRPr lang="en-US" sz="1400" dirty="0">
+                        <a:latin typeface="Calibri" charset="0"/>
+                        <a:ea typeface="Calibri" charset="0"/>
+                        <a:cs typeface="Calibri" charset="0"/>
+                      </a:endParaRPr>
+                    </a:p>
+                  </a:txBody>
+                  <a:tcPr marL="91440" marR="91440" marT="45720" marB="45720" anchor="ctr">
+                    <a:lnL w="6350" cap="flat" cmpd="sng" algn="ctr">
+                      <a:solidFill>
+                        <a:srgbClr val="DDE3EA"/>
+                      </a:solidFill>
+                      <a:prstDash val="solid"/>
+                      <a:round/>
+                      <a:headEnd type="none" w="med" len="med"/>
+                      <a:tailEnd type="none" w="med" len="med"/>
+                    </a:lnL>
+                    <a:lnR w="6350" cap="flat" cmpd="sng" algn="ctr">
+                      <a:solidFill>
+                        <a:srgbClr val="DDE3EA"/>
+                      </a:solidFill>
+                      <a:prstDash val="solid"/>
+                      <a:round/>
+                      <a:headEnd type="none" w="med" len="med"/>
+                      <a:tailEnd type="none" w="med" len="med"/>
+                    </a:lnR>
+                    <a:lnT w="6350" cap="flat" cmpd="sng" algn="ctr">
+                      <a:solidFill>
+                        <a:srgbClr val="DDE3EA"/>
+                      </a:solidFill>
+                      <a:prstDash val="solid"/>
+                      <a:round/>
+                      <a:headEnd type="none" w="med" len="med"/>
+                      <a:tailEnd type="none" w="med" len="med"/>
+                    </a:lnT>
+                    <a:lnB w="6350" cap="flat" cmpd="sng" algn="ctr">
+                      <a:solidFill>
+                        <a:srgbClr val="DDE3EA"/>
+                      </a:solidFill>
+                      <a:prstDash val="solid"/>
+                      <a:round/>
+                      <a:headEnd type="none" w="med" len="med"/>
+                      <a:tailEnd type="none" w="med" len="med"/>
+                    </a:lnB>
+                    <a:solidFill>
+                      <a:srgbClr val="1B2A41"/>
+                    </a:solidFill>
+                  </a:tcPr>
+                </a:tc>
+              </a:tr>
+              <a:tr h="960120">
+                <a:tc>
+                  <a:txBody>
+                    <a:bodyPr/>
+                    <a:lstStyle/>
+                    <a:p>
+                      <a:pPr indent="0" marL="0">
+                        <a:buNone/>
+                      </a:pPr>
+                      <a:r>
+                        <a:rPr lang="en-US" sz="1400" b="1" dirty="0">
+                          <a:solidFill>
+                            <a:srgbClr val="1B2A41"/>
+                          </a:solidFill>
+                          <a:latin typeface="Calibri" pitchFamily="34" charset="0"/>
+                          <a:ea typeface="Calibri" pitchFamily="34" charset="-122"/>
+                          <a:cs typeface="Calibri" pitchFamily="34" charset="-120"/>
+                        </a:rPr>
+                        <a:t>D1 Business correctness</a:t>
+                      </a:r>
+                      <a:endParaRPr lang="en-US" sz="1400" dirty="0">
+                        <a:latin typeface="Calibri" charset="0"/>
+                        <a:ea typeface="Calibri" charset="0"/>
+                        <a:cs typeface="Calibri" charset="0"/>
+                      </a:endParaRPr>
+                    </a:p>
+                  </a:txBody>
+                  <a:tcPr marL="91440" marR="91440" marT="45720" marB="45720" anchor="ctr">
+                    <a:lnL w="6350" cap="flat" cmpd="sng" algn="ctr">
+                      <a:solidFill>
+                        <a:srgbClr val="DDE3EA"/>
+                      </a:solidFill>
+                      <a:prstDash val="solid"/>
+                      <a:round/>
+                      <a:headEnd type="none" w="med" len="med"/>
+                      <a:tailEnd type="none" w="med" len="med"/>
+                    </a:lnL>
+                    <a:lnR w="6350" cap="flat" cmpd="sng" algn="ctr">
+                      <a:solidFill>
+                        <a:srgbClr val="DDE3EA"/>
+                      </a:solidFill>
+                      <a:prstDash val="solid"/>
+                      <a:round/>
+                      <a:headEnd type="none" w="med" len="med"/>
+                      <a:tailEnd type="none" w="med" len="med"/>
+                    </a:lnR>
+                    <a:lnT w="6350" cap="flat" cmpd="sng" algn="ctr">
+                      <a:solidFill>
+                        <a:srgbClr val="DDE3EA"/>
+                      </a:solidFill>
+                      <a:prstDash val="solid"/>
+                      <a:round/>
+                      <a:headEnd type="none" w="med" len="med"/>
+                      <a:tailEnd type="none" w="med" len="med"/>
+                    </a:lnT>
+                    <a:lnB w="6350" cap="flat" cmpd="sng" algn="ctr">
+                      <a:solidFill>
+                        <a:srgbClr val="DDE3EA"/>
+                      </a:solidFill>
+                      <a:prstDash val="solid"/>
+                      <a:round/>
+                      <a:headEnd type="none" w="med" len="med"/>
+                      <a:tailEnd type="none" w="med" len="med"/>
+                    </a:lnB>
+                    <a:solidFill>
+                      <a:srgbClr val="EEF2F6"/>
+                    </a:solidFill>
+                  </a:tcPr>
+                </a:tc>
+                <a:tc>
+                  <a:txBody>
+                    <a:bodyPr/>
+                    <a:lstStyle/>
+                    <a:p>
+                      <a:pPr indent="0" marL="0">
+                        <a:buNone/>
+                      </a:pPr>
+                      <a:r>
+                        <a:rPr lang="en-US" sz="1400" dirty="0">
+                          <a:solidFill>
+                            <a:srgbClr val="1B2A41"/>
+                          </a:solidFill>
+                          <a:latin typeface="Calibri" pitchFamily="34" charset="0"/>
+                          <a:ea typeface="Calibri" pitchFamily="34" charset="-122"/>
+                          <a:cs typeface="Calibri" pitchFamily="34" charset="-120"/>
+                        </a:rPr>
+                        <a:t>Valid bugs where the product does the wrong thing. Data, routing, contact lifecycle. Weighted by severity.</a:t>
+                      </a:r>
+                      <a:endParaRPr lang="en-US" sz="1400" dirty="0">
+                        <a:latin typeface="Calibri" charset="0"/>
+                        <a:ea typeface="Calibri" charset="0"/>
+                        <a:cs typeface="Calibri" charset="0"/>
+                      </a:endParaRPr>
+                    </a:p>
+                  </a:txBody>
+                  <a:tcPr marL="91440" marR="91440" marT="45720" marB="45720" anchor="ctr">
+                    <a:lnL w="6350" cap="flat" cmpd="sng" algn="ctr">
+                      <a:solidFill>
+                        <a:srgbClr val="DDE3EA"/>
+                      </a:solidFill>
+                      <a:prstDash val="solid"/>
+                      <a:round/>
+                      <a:headEnd type="none" w="med" len="med"/>
+                      <a:tailEnd type="none" w="med" len="med"/>
+                    </a:lnL>
+                    <a:lnR w="6350" cap="flat" cmpd="sng" algn="ctr">
+                      <a:solidFill>
+                        <a:srgbClr val="DDE3EA"/>
+                      </a:solidFill>
+                      <a:prstDash val="solid"/>
+                      <a:round/>
+                      <a:headEnd type="none" w="med" len="med"/>
+                      <a:tailEnd type="none" w="med" len="med"/>
+                    </a:lnR>
+                    <a:lnT w="6350" cap="flat" cmpd="sng" algn="ctr">
+                      <a:solidFill>
+                        <a:srgbClr val="DDE3EA"/>
+                      </a:solidFill>
+                      <a:prstDash val="solid"/>
+                      <a:round/>
+                      <a:headEnd type="none" w="med" len="med"/>
+                      <a:tailEnd type="none" w="med" len="med"/>
+                    </a:lnT>
+                    <a:lnB w="6350" cap="flat" cmpd="sng" algn="ctr">
+                      <a:solidFill>
+                        <a:srgbClr val="DDE3EA"/>
+                      </a:solidFill>
+                      <a:prstDash val="solid"/>
+                      <a:round/>
+                      <a:headEnd type="none" w="med" len="med"/>
+                      <a:tailEnd type="none" w="med" len="med"/>
+                    </a:lnB>
+                    <a:solidFill>
+                      <a:srgbClr val="EEF2F6"/>
+                    </a:solidFill>
+                  </a:tcPr>
+                </a:tc>
+                <a:tc>
+                  <a:txBody>
+                    <a:bodyPr/>
+                    <a:lstStyle/>
+                    <a:p>
+                      <a:pPr indent="0" marL="0">
+                        <a:buNone/>
+                      </a:pPr>
+                      <a:r>
+                        <a:rPr lang="en-US" sz="1400" dirty="0">
+                          <a:solidFill>
+                            <a:srgbClr val="1B2A41"/>
+                          </a:solidFill>
+                          <a:latin typeface="Calibri" pitchFamily="34" charset="0"/>
+                          <a:ea typeface="Calibri" pitchFamily="34" charset="-122"/>
+                          <a:cs typeface="Calibri" pitchFamily="34" charset="-120"/>
+                        </a:rPr>
+                        <a:t>Bugs: 295 to 325 (+10%). P1/P2 share: 52% to 70%.</a:t>
+                      </a:r>
+                      <a:endParaRPr lang="en-US" sz="1400" dirty="0">
+                        <a:latin typeface="Calibri" charset="0"/>
+                        <a:ea typeface="Calibri" charset="0"/>
+                        <a:cs typeface="Calibri" charset="0"/>
+                      </a:endParaRPr>
+                    </a:p>
+                  </a:txBody>
+                  <a:tcPr marL="91440" marR="91440" marT="45720" marB="45720" anchor="ctr">
+                    <a:lnL w="6350" cap="flat" cmpd="sng" algn="ctr">
+                      <a:solidFill>
+                        <a:srgbClr val="DDE3EA"/>
+                      </a:solidFill>
+                      <a:prstDash val="solid"/>
+                      <a:round/>
+                      <a:headEnd type="none" w="med" len="med"/>
+                      <a:tailEnd type="none" w="med" len="med"/>
+                    </a:lnL>
+                    <a:lnR w="6350" cap="flat" cmpd="sng" algn="ctr">
+                      <a:solidFill>
+                        <a:srgbClr val="DDE3EA"/>
+                      </a:solidFill>
+                      <a:prstDash val="solid"/>
+                      <a:round/>
+                      <a:headEnd type="none" w="med" len="med"/>
+                      <a:tailEnd type="none" w="med" len="med"/>
+                    </a:lnR>
+                    <a:lnT w="6350" cap="flat" cmpd="sng" algn="ctr">
+                      <a:solidFill>
+                        <a:srgbClr val="DDE3EA"/>
+                      </a:solidFill>
+                      <a:prstDash val="solid"/>
+                      <a:round/>
+                      <a:headEnd type="none" w="med" len="med"/>
+                      <a:tailEnd type="none" w="med" len="med"/>
+                    </a:lnT>
+                    <a:lnB w="6350" cap="flat" cmpd="sng" algn="ctr">
+                      <a:solidFill>
+                        <a:srgbClr val="DDE3EA"/>
+                      </a:solidFill>
+                      <a:prstDash val="solid"/>
+                      <a:round/>
+                      <a:headEnd type="none" w="med" len="med"/>
+                      <a:tailEnd type="none" w="med" len="med"/>
+                    </a:lnB>
+                    <a:solidFill>
+                      <a:srgbClr val="EEF2F6"/>
+                    </a:solidFill>
+                  </a:tcPr>
+                </a:tc>
+                <a:tc>
+                  <a:txBody>
+                    <a:bodyPr/>
+                    <a:lstStyle/>
+                    <a:p>
+                      <a:pPr indent="0" marL="0">
+                        <a:buNone/>
+                      </a:pPr>
+                      <a:r>
+                        <a:rPr lang="en-US" sz="1400" dirty="0">
+                          <a:solidFill>
+                            <a:srgbClr val="1B2A41"/>
+                          </a:solidFill>
+                          <a:latin typeface="Calibri" pitchFamily="34" charset="0"/>
+                          <a:ea typeface="Calibri" pitchFamily="34" charset="-122"/>
+                          <a:cs typeface="Calibri" pitchFamily="34" charset="-120"/>
+                        </a:rPr>
+                        <a:t>Customer reports only. Billing is rarely reported.</a:t>
+                      </a:r>
+                      <a:endParaRPr lang="en-US" sz="1400" dirty="0">
+                        <a:latin typeface="Calibri" charset="0"/>
+                        <a:ea typeface="Calibri" charset="0"/>
+                        <a:cs typeface="Calibri" charset="0"/>
+                      </a:endParaRPr>
+                    </a:p>
+                  </a:txBody>
+                  <a:tcPr marL="91440" marR="91440" marT="45720" marB="45720" anchor="ctr">
+                    <a:lnL w="6350" cap="flat" cmpd="sng" algn="ctr">
+                      <a:solidFill>
+                        <a:srgbClr val="DDE3EA"/>
+                      </a:solidFill>
+                      <a:prstDash val="solid"/>
+                      <a:round/>
+                      <a:headEnd type="none" w="med" len="med"/>
+                      <a:tailEnd type="none" w="med" len="med"/>
+                    </a:lnL>
+                    <a:lnR w="6350" cap="flat" cmpd="sng" algn="ctr">
+                      <a:solidFill>
+                        <a:srgbClr val="DDE3EA"/>
+                      </a:solidFill>
+                      <a:prstDash val="solid"/>
+                      <a:round/>
+                      <a:headEnd type="none" w="med" len="med"/>
+                      <a:tailEnd type="none" w="med" len="med"/>
+                    </a:lnR>
+                    <a:lnT w="6350" cap="flat" cmpd="sng" algn="ctr">
+                      <a:solidFill>
+                        <a:srgbClr val="DDE3EA"/>
+                      </a:solidFill>
+                      <a:prstDash val="solid"/>
+                      <a:round/>
+                      <a:headEnd type="none" w="med" len="med"/>
+                      <a:tailEnd type="none" w="med" len="med"/>
+                    </a:lnT>
+                    <a:lnB w="6350" cap="flat" cmpd="sng" algn="ctr">
+                      <a:solidFill>
+                        <a:srgbClr val="DDE3EA"/>
+                      </a:solidFill>
+                      <a:prstDash val="solid"/>
+                      <a:round/>
+                      <a:headEnd type="none" w="med" len="med"/>
+                      <a:tailEnd type="none" w="med" len="med"/>
+                    </a:lnB>
+                    <a:solidFill>
+                      <a:srgbClr val="EEF2F6"/>
+                    </a:solidFill>
+                  </a:tcPr>
+                </a:tc>
+                <a:tc>
+                  <a:txBody>
+                    <a:bodyPr/>
+                    <a:lstStyle/>
+                    <a:p>
+                      <a:pPr indent="0" marL="0">
+                        <a:buNone/>
+                      </a:pPr>
+                      <a:r>
+                        <a:rPr lang="en-US" sz="1400" dirty="0">
+                          <a:solidFill>
+                            <a:srgbClr val="1B2A41"/>
+                          </a:solidFill>
+                          <a:latin typeface="Calibri" pitchFamily="34" charset="0"/>
+                          <a:ea typeface="Calibri" pitchFamily="34" charset="-122"/>
+                          <a:cs typeface="Calibri" pitchFamily="34" charset="-120"/>
+                        </a:rPr>
+                        <a:t>Where to invest first</a:t>
+                      </a:r>
+                      <a:endParaRPr lang="en-US" sz="1400" dirty="0">
+                        <a:latin typeface="Calibri" charset="0"/>
+                        <a:ea typeface="Calibri" charset="0"/>
+                        <a:cs typeface="Calibri" charset="0"/>
+                      </a:endParaRPr>
+                    </a:p>
+                  </a:txBody>
+                  <a:tcPr marL="91440" marR="91440" marT="45720" marB="45720" anchor="ctr">
+                    <a:lnL w="6350" cap="flat" cmpd="sng" algn="ctr">
+                      <a:solidFill>
+                        <a:srgbClr val="DDE3EA"/>
+                      </a:solidFill>
+                      <a:prstDash val="solid"/>
+                      <a:round/>
+                      <a:headEnd type="none" w="med" len="med"/>
+                      <a:tailEnd type="none" w="med" len="med"/>
+                    </a:lnL>
+                    <a:lnR w="6350" cap="flat" cmpd="sng" algn="ctr">
+                      <a:solidFill>
+                        <a:srgbClr val="DDE3EA"/>
+                      </a:solidFill>
+                      <a:prstDash val="solid"/>
+                      <a:round/>
+                      <a:headEnd type="none" w="med" len="med"/>
+                      <a:tailEnd type="none" w="med" len="med"/>
+                    </a:lnR>
+                    <a:lnT w="6350" cap="flat" cmpd="sng" algn="ctr">
+                      <a:solidFill>
+                        <a:srgbClr val="DDE3EA"/>
+                      </a:solidFill>
+                      <a:prstDash val="solid"/>
+                      <a:round/>
+                      <a:headEnd type="none" w="med" len="med"/>
+                      <a:tailEnd type="none" w="med" len="med"/>
+                    </a:lnT>
+                    <a:lnB w="6350" cap="flat" cmpd="sng" algn="ctr">
+                      <a:solidFill>
+                        <a:srgbClr val="DDE3EA"/>
+                      </a:solidFill>
+                      <a:prstDash val="solid"/>
+                      <a:round/>
+                      <a:headEnd type="none" w="med" len="med"/>
+                      <a:tailEnd type="none" w="med" len="med"/>
+                    </a:lnB>
+                    <a:solidFill>
+                      <a:srgbClr val="EEF2F6"/>
+                    </a:solidFill>
+                  </a:tcPr>
+                </a:tc>
+              </a:tr>
+              <a:tr h="960120">
+                <a:tc>
+                  <a:txBody>
+                    <a:bodyPr/>
+                    <a:lstStyle/>
+                    <a:p>
+                      <a:pPr indent="0" marL="0">
+                        <a:buNone/>
+                      </a:pPr>
+                      <a:r>
+                        <a:rPr lang="en-US" sz="1400" b="1" dirty="0">
+                          <a:solidFill>
+                            <a:srgbClr val="1B2A41"/>
+                          </a:solidFill>
+                          <a:latin typeface="Calibri" pitchFamily="34" charset="0"/>
+                          <a:ea typeface="Calibri" pitchFamily="34" charset="-122"/>
+                          <a:cs typeface="Calibri" pitchFamily="34" charset="-120"/>
+                        </a:rPr>
+                        <a:t>D2 Availability</a:t>
+                      </a:r>
+                      <a:endParaRPr lang="en-US" sz="1400" dirty="0">
+                        <a:latin typeface="Calibri" charset="0"/>
+                        <a:ea typeface="Calibri" charset="0"/>
+                        <a:cs typeface="Calibri" charset="0"/>
+                      </a:endParaRPr>
+                    </a:p>
+                  </a:txBody>
+                  <a:tcPr marL="91440" marR="91440" marT="45720" marB="45720" anchor="ctr">
+                    <a:lnL w="6350" cap="flat" cmpd="sng" algn="ctr">
+                      <a:solidFill>
+                        <a:srgbClr val="DDE3EA"/>
+                      </a:solidFill>
+                      <a:prstDash val="solid"/>
+                      <a:round/>
+                      <a:headEnd type="none" w="med" len="med"/>
+                      <a:tailEnd type="none" w="med" len="med"/>
+                    </a:lnL>
+                    <a:lnR w="6350" cap="flat" cmpd="sng" algn="ctr">
+                      <a:solidFill>
+                        <a:srgbClr val="DDE3EA"/>
+                      </a:solidFill>
+                      <a:prstDash val="solid"/>
+                      <a:round/>
+                      <a:headEnd type="none" w="med" len="med"/>
+                      <a:tailEnd type="none" w="med" len="med"/>
+                    </a:lnR>
+                    <a:lnT w="6350" cap="flat" cmpd="sng" algn="ctr">
+                      <a:solidFill>
+                        <a:srgbClr val="DDE3EA"/>
+                      </a:solidFill>
+                      <a:prstDash val="solid"/>
+                      <a:round/>
+                      <a:headEnd type="none" w="med" len="med"/>
+                      <a:tailEnd type="none" w="med" len="med"/>
+                    </a:lnT>
+                    <a:lnB w="6350" cap="flat" cmpd="sng" algn="ctr">
+                      <a:solidFill>
+                        <a:srgbClr val="DDE3EA"/>
+                      </a:solidFill>
+                      <a:prstDash val="solid"/>
+                      <a:round/>
+                      <a:headEnd type="none" w="med" len="med"/>
+                      <a:tailEnd type="none" w="med" len="med"/>
+                    </a:lnB>
+                    <a:solidFill>
+                      <a:srgbClr val="FFFFFF"/>
+                    </a:solidFill>
+                  </a:tcPr>
+                </a:tc>
+                <a:tc>
+                  <a:txBody>
+                    <a:bodyPr/>
+                    <a:lstStyle/>
+                    <a:p>
+                      <a:pPr indent="0" marL="0">
+                        <a:buNone/>
+                      </a:pPr>
+                      <a:r>
+                        <a:rPr lang="en-US" sz="1400" dirty="0">
+                          <a:solidFill>
+                            <a:srgbClr val="1B2A41"/>
+                          </a:solidFill>
+                          <a:latin typeface="Calibri" pitchFamily="34" charset="0"/>
+                          <a:ea typeface="Calibri" pitchFamily="34" charset="-122"/>
+                          <a:cs typeface="Calibri" pitchFamily="34" charset="-120"/>
+                        </a:rPr>
+                        <a:t>P1 incidents per quarter. Customers affected.</a:t>
+                      </a:r>
+                      <a:endParaRPr lang="en-US" sz="1400" dirty="0">
+                        <a:latin typeface="Calibri" charset="0"/>
+                        <a:ea typeface="Calibri" charset="0"/>
+                        <a:cs typeface="Calibri" charset="0"/>
+                      </a:endParaRPr>
+                    </a:p>
+                  </a:txBody>
+                  <a:tcPr marL="91440" marR="91440" marT="45720" marB="45720" anchor="ctr">
+                    <a:lnL w="6350" cap="flat" cmpd="sng" algn="ctr">
+                      <a:solidFill>
+                        <a:srgbClr val="DDE3EA"/>
+                      </a:solidFill>
+                      <a:prstDash val="solid"/>
+                      <a:round/>
+                      <a:headEnd type="none" w="med" len="med"/>
+                      <a:tailEnd type="none" w="med" len="med"/>
+                    </a:lnL>
+                    <a:lnR w="6350" cap="flat" cmpd="sng" algn="ctr">
+                      <a:solidFill>
+                        <a:srgbClr val="DDE3EA"/>
+                      </a:solidFill>
+                      <a:prstDash val="solid"/>
+                      <a:round/>
+                      <a:headEnd type="none" w="med" len="med"/>
+                      <a:tailEnd type="none" w="med" len="med"/>
+                    </a:lnR>
+                    <a:lnT w="6350" cap="flat" cmpd="sng" algn="ctr">
+                      <a:solidFill>
+                        <a:srgbClr val="DDE3EA"/>
+                      </a:solidFill>
+                      <a:prstDash val="solid"/>
+                      <a:round/>
+                      <a:headEnd type="none" w="med" len="med"/>
+                      <a:tailEnd type="none" w="med" len="med"/>
+                    </a:lnT>
+                    <a:lnB w="6350" cap="flat" cmpd="sng" algn="ctr">
+                      <a:solidFill>
+                        <a:srgbClr val="DDE3EA"/>
+                      </a:solidFill>
+                      <a:prstDash val="solid"/>
+                      <a:round/>
+                      <a:headEnd type="none" w="med" len="med"/>
+                      <a:tailEnd type="none" w="med" len="med"/>
+                    </a:lnB>
+                    <a:solidFill>
+                      <a:srgbClr val="FFFFFF"/>
+                    </a:solidFill>
+                  </a:tcPr>
+                </a:tc>
+                <a:tc>
+                  <a:txBody>
+                    <a:bodyPr/>
+                    <a:lstStyle/>
+                    <a:p>
+                      <a:pPr indent="0" marL="0">
+                        <a:buNone/>
+                      </a:pPr>
+                      <a:r>
+                        <a:rPr lang="en-US" sz="1400" dirty="0">
+                          <a:solidFill>
+                            <a:srgbClr val="1B2A41"/>
+                          </a:solidFill>
+                          <a:latin typeface="Calibri" pitchFamily="34" charset="0"/>
+                          <a:ea typeface="Calibri" pitchFamily="34" charset="-122"/>
+                          <a:cs typeface="Calibri" pitchFamily="34" charset="-120"/>
+                        </a:rPr>
+                        <a:t>P1 by customer channel: about 150 to 76 per quarter.</a:t>
+                      </a:r>
+                      <a:endParaRPr lang="en-US" sz="1400" dirty="0">
+                        <a:latin typeface="Calibri" charset="0"/>
+                        <a:ea typeface="Calibri" charset="0"/>
+                        <a:cs typeface="Calibri" charset="0"/>
+                      </a:endParaRPr>
+                    </a:p>
+                  </a:txBody>
+                  <a:tcPr marL="91440" marR="91440" marT="45720" marB="45720" anchor="ctr">
+                    <a:lnL w="6350" cap="flat" cmpd="sng" algn="ctr">
+                      <a:solidFill>
+                        <a:srgbClr val="DDE3EA"/>
+                      </a:solidFill>
+                      <a:prstDash val="solid"/>
+                      <a:round/>
+                      <a:headEnd type="none" w="med" len="med"/>
+                      <a:tailEnd type="none" w="med" len="med"/>
+                    </a:lnL>
+                    <a:lnR w="6350" cap="flat" cmpd="sng" algn="ctr">
+                      <a:solidFill>
+                        <a:srgbClr val="DDE3EA"/>
+                      </a:solidFill>
+                      <a:prstDash val="solid"/>
+                      <a:round/>
+                      <a:headEnd type="none" w="med" len="med"/>
+                      <a:tailEnd type="none" w="med" len="med"/>
+                    </a:lnR>
+                    <a:lnT w="6350" cap="flat" cmpd="sng" algn="ctr">
+                      <a:solidFill>
+                        <a:srgbClr val="DDE3EA"/>
+                      </a:solidFill>
+                      <a:prstDash val="solid"/>
+                      <a:round/>
+                      <a:headEnd type="none" w="med" len="med"/>
+                      <a:tailEnd type="none" w="med" len="med"/>
+                    </a:lnT>
+                    <a:lnB w="6350" cap="flat" cmpd="sng" algn="ctr">
+                      <a:solidFill>
+                        <a:srgbClr val="DDE3EA"/>
+                      </a:solidFill>
+                      <a:prstDash val="solid"/>
+                      <a:round/>
+                      <a:headEnd type="none" w="med" len="med"/>
+                      <a:tailEnd type="none" w="med" len="med"/>
+                    </a:lnB>
+                    <a:solidFill>
+                      <a:srgbClr val="FFFFFF"/>
+                    </a:solidFill>
+                  </a:tcPr>
+                </a:tc>
+                <a:tc>
+                  <a:txBody>
+                    <a:bodyPr/>
+                    <a:lstStyle/>
+                    <a:p>
+                      <a:pPr indent="0" marL="0">
+                        <a:buNone/>
+                      </a:pPr>
+                      <a:r>
+                        <a:rPr lang="en-US" sz="1400" dirty="0">
+                          <a:solidFill>
+                            <a:srgbClr val="1B2A41"/>
+                          </a:solidFill>
+                          <a:latin typeface="Calibri" pitchFamily="34" charset="0"/>
+                          <a:ea typeface="Calibri" pitchFamily="34" charset="-122"/>
+                          <a:cs typeface="Calibri" pitchFamily="34" charset="-120"/>
+                        </a:rPr>
+                        <a:t>ServiceNow access pending. Reason for the fall is unknown.</a:t>
+                      </a:r>
+                      <a:endParaRPr lang="en-US" sz="1400" dirty="0">
+                        <a:latin typeface="Calibri" charset="0"/>
+                        <a:ea typeface="Calibri" charset="0"/>
+                        <a:cs typeface="Calibri" charset="0"/>
+                      </a:endParaRPr>
+                    </a:p>
+                  </a:txBody>
+                  <a:tcPr marL="91440" marR="91440" marT="45720" marB="45720" anchor="ctr">
+                    <a:lnL w="6350" cap="flat" cmpd="sng" algn="ctr">
+                      <a:solidFill>
+                        <a:srgbClr val="DDE3EA"/>
+                      </a:solidFill>
+                      <a:prstDash val="solid"/>
+                      <a:round/>
+                      <a:headEnd type="none" w="med" len="med"/>
+                      <a:tailEnd type="none" w="med" len="med"/>
+                    </a:lnL>
+                    <a:lnR w="6350" cap="flat" cmpd="sng" algn="ctr">
+                      <a:solidFill>
+                        <a:srgbClr val="DDE3EA"/>
+                      </a:solidFill>
+                      <a:prstDash val="solid"/>
+                      <a:round/>
+                      <a:headEnd type="none" w="med" len="med"/>
+                      <a:tailEnd type="none" w="med" len="med"/>
+                    </a:lnR>
+                    <a:lnT w="6350" cap="flat" cmpd="sng" algn="ctr">
+                      <a:solidFill>
+                        <a:srgbClr val="DDE3EA"/>
+                      </a:solidFill>
+                      <a:prstDash val="solid"/>
+                      <a:round/>
+                      <a:headEnd type="none" w="med" len="med"/>
+                      <a:tailEnd type="none" w="med" len="med"/>
+                    </a:lnT>
+                    <a:lnB w="6350" cap="flat" cmpd="sng" algn="ctr">
+                      <a:solidFill>
+                        <a:srgbClr val="DDE3EA"/>
+                      </a:solidFill>
+                      <a:prstDash val="solid"/>
+                      <a:round/>
+                      <a:headEnd type="none" w="med" len="med"/>
+                      <a:tailEnd type="none" w="med" len="med"/>
+                    </a:lnB>
+                    <a:solidFill>
+                      <a:srgbClr val="FFFFFF"/>
+                    </a:solidFill>
+                  </a:tcPr>
+                </a:tc>
+                <a:tc>
+                  <a:txBody>
+                    <a:bodyPr/>
+                    <a:lstStyle/>
+                    <a:p>
+                      <a:pPr indent="0" marL="0">
+                        <a:buNone/>
+                      </a:pPr>
+                      <a:r>
+                        <a:rPr lang="en-US" sz="1400" dirty="0">
+                          <a:solidFill>
+                            <a:srgbClr val="1B2A41"/>
+                          </a:solidFill>
+                          <a:latin typeface="Calibri" pitchFamily="34" charset="0"/>
+                          <a:ea typeface="Calibri" pitchFamily="34" charset="-122"/>
+                          <a:cs typeface="Calibri" pitchFamily="34" charset="-120"/>
+                        </a:rPr>
+                        <a:t>Reliability work and release risk</a:t>
+                      </a:r>
+                      <a:endParaRPr lang="en-US" sz="1400" dirty="0">
+                        <a:latin typeface="Calibri" charset="0"/>
+                        <a:ea typeface="Calibri" charset="0"/>
+                        <a:cs typeface="Calibri" charset="0"/>
+                      </a:endParaRPr>
+                    </a:p>
+                  </a:txBody>
+                  <a:tcPr marL="91440" marR="91440" marT="45720" marB="45720" anchor="ctr">
+                    <a:lnL w="6350" cap="flat" cmpd="sng" algn="ctr">
+                      <a:solidFill>
+                        <a:srgbClr val="DDE3EA"/>
+                      </a:solidFill>
+                      <a:prstDash val="solid"/>
+                      <a:round/>
+                      <a:headEnd type="none" w="med" len="med"/>
+                      <a:tailEnd type="none" w="med" len="med"/>
+                    </a:lnL>
+                    <a:lnR w="6350" cap="flat" cmpd="sng" algn="ctr">
+                      <a:solidFill>
+                        <a:srgbClr val="DDE3EA"/>
+                      </a:solidFill>
+                      <a:prstDash val="solid"/>
+                      <a:round/>
+                      <a:headEnd type="none" w="med" len="med"/>
+                      <a:tailEnd type="none" w="med" len="med"/>
+                    </a:lnR>
+                    <a:lnT w="6350" cap="flat" cmpd="sng" algn="ctr">
+                      <a:solidFill>
+                        <a:srgbClr val="DDE3EA"/>
+                      </a:solidFill>
+                      <a:prstDash val="solid"/>
+                      <a:round/>
+                      <a:headEnd type="none" w="med" len="med"/>
+                      <a:tailEnd type="none" w="med" len="med"/>
+                    </a:lnT>
+                    <a:lnB w="6350" cap="flat" cmpd="sng" algn="ctr">
+                      <a:solidFill>
+                        <a:srgbClr val="DDE3EA"/>
+                      </a:solidFill>
+                      <a:prstDash val="solid"/>
+                      <a:round/>
+                      <a:headEnd type="none" w="med" len="med"/>
+                      <a:tailEnd type="none" w="med" len="med"/>
+                    </a:lnB>
+                    <a:solidFill>
+                      <a:srgbClr val="FFFFFF"/>
+                    </a:solidFill>
+                  </a:tcPr>
+                </a:tc>
+              </a:tr>
+              <a:tr h="960120">
+                <a:tc>
+                  <a:txBody>
+                    <a:bodyPr/>
+                    <a:lstStyle/>
+                    <a:p>
+                      <a:pPr indent="0" marL="0">
+                        <a:buNone/>
+                      </a:pPr>
+                      <a:r>
+                        <a:rPr lang="en-US" sz="1400" b="1" dirty="0">
+                          <a:solidFill>
+                            <a:srgbClr val="1B2A41"/>
+                          </a:solidFill>
+                          <a:latin typeface="Calibri" pitchFamily="34" charset="0"/>
+                          <a:ea typeface="Calibri" pitchFamily="34" charset="-122"/>
+                          <a:cs typeface="Calibri" pitchFamily="34" charset="-120"/>
+                        </a:rPr>
+                        <a:t>D3 Performance</a:t>
+                      </a:r>
+                      <a:endParaRPr lang="en-US" sz="1400" dirty="0">
+                        <a:latin typeface="Calibri" charset="0"/>
+                        <a:ea typeface="Calibri" charset="0"/>
+                        <a:cs typeface="Calibri" charset="0"/>
+                      </a:endParaRPr>
+                    </a:p>
+                  </a:txBody>
+                  <a:tcPr marL="91440" marR="91440" marT="45720" marB="45720" anchor="ctr">
+                    <a:lnL w="6350" cap="flat" cmpd="sng" algn="ctr">
+                      <a:solidFill>
+                        <a:srgbClr val="DDE3EA"/>
+                      </a:solidFill>
+                      <a:prstDash val="solid"/>
+                      <a:round/>
+                      <a:headEnd type="none" w="med" len="med"/>
+                      <a:tailEnd type="none" w="med" len="med"/>
+                    </a:lnL>
+                    <a:lnR w="6350" cap="flat" cmpd="sng" algn="ctr">
+                      <a:solidFill>
+                        <a:srgbClr val="DDE3EA"/>
+                      </a:solidFill>
+                      <a:prstDash val="solid"/>
+                      <a:round/>
+                      <a:headEnd type="none" w="med" len="med"/>
+                      <a:tailEnd type="none" w="med" len="med"/>
+                    </a:lnR>
+                    <a:lnT w="6350" cap="flat" cmpd="sng" algn="ctr">
+                      <a:solidFill>
+                        <a:srgbClr val="DDE3EA"/>
+                      </a:solidFill>
+                      <a:prstDash val="solid"/>
+                      <a:round/>
+                      <a:headEnd type="none" w="med" len="med"/>
+                      <a:tailEnd type="none" w="med" len="med"/>
+                    </a:lnT>
+                    <a:lnB w="6350" cap="flat" cmpd="sng" algn="ctr">
+                      <a:solidFill>
+                        <a:srgbClr val="DDE3EA"/>
+                      </a:solidFill>
+                      <a:prstDash val="solid"/>
+                      <a:round/>
+                      <a:headEnd type="none" w="med" len="med"/>
+                      <a:tailEnd type="none" w="med" len="med"/>
+                    </a:lnB>
+                    <a:solidFill>
+                      <a:srgbClr val="EEF2F6"/>
+                    </a:solidFill>
+                  </a:tcPr>
+                </a:tc>
+                <a:tc>
+                  <a:txBody>
+                    <a:bodyPr/>
+                    <a:lstStyle/>
+                    <a:p>
+                      <a:pPr indent="0" marL="0">
+                        <a:buNone/>
+                      </a:pPr>
+                      <a:r>
+                        <a:rPr lang="en-US" sz="1400" dirty="0">
+                          <a:solidFill>
+                            <a:srgbClr val="1B2A41"/>
+                          </a:solidFill>
+                          <a:latin typeface="Calibri" pitchFamily="34" charset="0"/>
+                          <a:ea typeface="Calibri" pitchFamily="34" charset="-122"/>
+                          <a:cs typeface="Calibri" pitchFamily="34" charset="-120"/>
+                        </a:rPr>
+                        <a:t>Slow-system bugs. SLO breaches.</a:t>
+                      </a:r>
+                      <a:endParaRPr lang="en-US" sz="1400" dirty="0">
+                        <a:latin typeface="Calibri" charset="0"/>
+                        <a:ea typeface="Calibri" charset="0"/>
+                        <a:cs typeface="Calibri" charset="0"/>
+                      </a:endParaRPr>
+                    </a:p>
+                  </a:txBody>
+                  <a:tcPr marL="91440" marR="91440" marT="45720" marB="45720" anchor="ctr">
+                    <a:lnL w="6350" cap="flat" cmpd="sng" algn="ctr">
+                      <a:solidFill>
+                        <a:srgbClr val="DDE3EA"/>
+                      </a:solidFill>
+                      <a:prstDash val="solid"/>
+                      <a:round/>
+                      <a:headEnd type="none" w="med" len="med"/>
+                      <a:tailEnd type="none" w="med" len="med"/>
+                    </a:lnL>
+                    <a:lnR w="6350" cap="flat" cmpd="sng" algn="ctr">
+                      <a:solidFill>
+                        <a:srgbClr val="DDE3EA"/>
+                      </a:solidFill>
+                      <a:prstDash val="solid"/>
+                      <a:round/>
+                      <a:headEnd type="none" w="med" len="med"/>
+                      <a:tailEnd type="none" w="med" len="med"/>
+                    </a:lnR>
+                    <a:lnT w="6350" cap="flat" cmpd="sng" algn="ctr">
+                      <a:solidFill>
+                        <a:srgbClr val="DDE3EA"/>
+                      </a:solidFill>
+                      <a:prstDash val="solid"/>
+                      <a:round/>
+                      <a:headEnd type="none" w="med" len="med"/>
+                      <a:tailEnd type="none" w="med" len="med"/>
+                    </a:lnT>
+                    <a:lnB w="6350" cap="flat" cmpd="sng" algn="ctr">
+                      <a:solidFill>
+                        <a:srgbClr val="DDE3EA"/>
+                      </a:solidFill>
+                      <a:prstDash val="solid"/>
+                      <a:round/>
+                      <a:headEnd type="none" w="med" len="med"/>
+                      <a:tailEnd type="none" w="med" len="med"/>
+                    </a:lnB>
+                    <a:solidFill>
+                      <a:srgbClr val="EEF2F6"/>
+                    </a:solidFill>
+                  </a:tcPr>
+                </a:tc>
+                <a:tc>
+                  <a:txBody>
+                    <a:bodyPr/>
+                    <a:lstStyle/>
+                    <a:p>
+                      <a:pPr indent="0" marL="0">
+                        <a:buNone/>
+                      </a:pPr>
+                      <a:r>
+                        <a:rPr lang="en-US" sz="1400" dirty="0">
+                          <a:solidFill>
+                            <a:srgbClr val="1B2A41"/>
+                          </a:solidFill>
+                          <a:latin typeface="Calibri" pitchFamily="34" charset="0"/>
+                          <a:ea typeface="Calibri" pitchFamily="34" charset="-122"/>
+                          <a:cs typeface="Calibri" pitchFamily="34" charset="-120"/>
+                        </a:rPr>
+                        <a:t>50 performance bugs in total.</a:t>
+                      </a:r>
+                      <a:endParaRPr lang="en-US" sz="1400" dirty="0">
+                        <a:latin typeface="Calibri" charset="0"/>
+                        <a:ea typeface="Calibri" charset="0"/>
+                        <a:cs typeface="Calibri" charset="0"/>
+                      </a:endParaRPr>
+                    </a:p>
+                  </a:txBody>
+                  <a:tcPr marL="91440" marR="91440" marT="45720" marB="45720" anchor="ctr">
+                    <a:lnL w="6350" cap="flat" cmpd="sng" algn="ctr">
+                      <a:solidFill>
+                        <a:srgbClr val="DDE3EA"/>
+                      </a:solidFill>
+                      <a:prstDash val="solid"/>
+                      <a:round/>
+                      <a:headEnd type="none" w="med" len="med"/>
+                      <a:tailEnd type="none" w="med" len="med"/>
+                    </a:lnL>
+                    <a:lnR w="6350" cap="flat" cmpd="sng" algn="ctr">
+                      <a:solidFill>
+                        <a:srgbClr val="DDE3EA"/>
+                      </a:solidFill>
+                      <a:prstDash val="solid"/>
+                      <a:round/>
+                      <a:headEnd type="none" w="med" len="med"/>
+                      <a:tailEnd type="none" w="med" len="med"/>
+                    </a:lnR>
+                    <a:lnT w="6350" cap="flat" cmpd="sng" algn="ctr">
+                      <a:solidFill>
+                        <a:srgbClr val="DDE3EA"/>
+                      </a:solidFill>
+                      <a:prstDash val="solid"/>
+                      <a:round/>
+                      <a:headEnd type="none" w="med" len="med"/>
+                      <a:tailEnd type="none" w="med" len="med"/>
+                    </a:lnT>
+                    <a:lnB w="6350" cap="flat" cmpd="sng" algn="ctr">
+                      <a:solidFill>
+                        <a:srgbClr val="DDE3EA"/>
+                      </a:solidFill>
+                      <a:prstDash val="solid"/>
+                      <a:round/>
+                      <a:headEnd type="none" w="med" len="med"/>
+                      <a:tailEnd type="none" w="med" len="med"/>
+                    </a:lnB>
+                    <a:solidFill>
+                      <a:srgbClr val="EEF2F6"/>
+                    </a:solidFill>
+                  </a:tcPr>
+                </a:tc>
+                <a:tc>
+                  <a:txBody>
+                    <a:bodyPr/>
+                    <a:lstStyle/>
+                    <a:p>
+                      <a:pPr indent="0" marL="0">
+                        <a:buNone/>
+                      </a:pPr>
+                      <a:r>
+                        <a:rPr lang="en-US" sz="1400" dirty="0">
+                          <a:solidFill>
+                            <a:srgbClr val="1B2A41"/>
+                          </a:solidFill>
+                          <a:latin typeface="Calibri" pitchFamily="34" charset="0"/>
+                          <a:ea typeface="Calibri" pitchFamily="34" charset="-122"/>
+                          <a:cs typeface="Calibri" pitchFamily="34" charset="-120"/>
+                        </a:rPr>
+                        <a:t>No SLO data yet.</a:t>
+                      </a:r>
+                      <a:endParaRPr lang="en-US" sz="1400" dirty="0">
+                        <a:latin typeface="Calibri" charset="0"/>
+                        <a:ea typeface="Calibri" charset="0"/>
+                        <a:cs typeface="Calibri" charset="0"/>
+                      </a:endParaRPr>
+                    </a:p>
+                  </a:txBody>
+                  <a:tcPr marL="91440" marR="91440" marT="45720" marB="45720" anchor="ctr">
+                    <a:lnL w="6350" cap="flat" cmpd="sng" algn="ctr">
+                      <a:solidFill>
+                        <a:srgbClr val="DDE3EA"/>
+                      </a:solidFill>
+                      <a:prstDash val="solid"/>
+                      <a:round/>
+                      <a:headEnd type="none" w="med" len="med"/>
+                      <a:tailEnd type="none" w="med" len="med"/>
+                    </a:lnL>
+                    <a:lnR w="6350" cap="flat" cmpd="sng" algn="ctr">
+                      <a:solidFill>
+                        <a:srgbClr val="DDE3EA"/>
+                      </a:solidFill>
+                      <a:prstDash val="solid"/>
+                      <a:round/>
+                      <a:headEnd type="none" w="med" len="med"/>
+                      <a:tailEnd type="none" w="med" len="med"/>
+                    </a:lnR>
+                    <a:lnT w="6350" cap="flat" cmpd="sng" algn="ctr">
+                      <a:solidFill>
+                        <a:srgbClr val="DDE3EA"/>
+                      </a:solidFill>
+                      <a:prstDash val="solid"/>
+                      <a:round/>
+                      <a:headEnd type="none" w="med" len="med"/>
+                      <a:tailEnd type="none" w="med" len="med"/>
+                    </a:lnT>
+                    <a:lnB w="6350" cap="flat" cmpd="sng" algn="ctr">
+                      <a:solidFill>
+                        <a:srgbClr val="DDE3EA"/>
+                      </a:solidFill>
+                      <a:prstDash val="solid"/>
+                      <a:round/>
+                      <a:headEnd type="none" w="med" len="med"/>
+                      <a:tailEnd type="none" w="med" len="med"/>
+                    </a:lnB>
+                    <a:solidFill>
+                      <a:srgbClr val="EEF2F6"/>
+                    </a:solidFill>
+                  </a:tcPr>
+                </a:tc>
+                <a:tc>
+                  <a:txBody>
+                    <a:bodyPr/>
+                    <a:lstStyle/>
+                    <a:p>
+                      <a:pPr indent="0" marL="0">
+                        <a:buNone/>
+                      </a:pPr>
+                      <a:r>
+                        <a:rPr lang="en-US" sz="1400" dirty="0">
+                          <a:solidFill>
+                            <a:srgbClr val="1B2A41"/>
+                          </a:solidFill>
+                          <a:latin typeface="Calibri" pitchFamily="34" charset="0"/>
+                          <a:ea typeface="Calibri" pitchFamily="34" charset="-122"/>
+                          <a:cs typeface="Calibri" pitchFamily="34" charset="-120"/>
+                        </a:rPr>
+                        <a:t>Capacity work</a:t>
+                      </a:r>
+                      <a:endParaRPr lang="en-US" sz="1400" dirty="0">
+                        <a:latin typeface="Calibri" charset="0"/>
+                        <a:ea typeface="Calibri" charset="0"/>
+                        <a:cs typeface="Calibri" charset="0"/>
+                      </a:endParaRPr>
+                    </a:p>
+                  </a:txBody>
+                  <a:tcPr marL="91440" marR="91440" marT="45720" marB="45720" anchor="ctr">
+                    <a:lnL w="6350" cap="flat" cmpd="sng" algn="ctr">
+                      <a:solidFill>
+                        <a:srgbClr val="DDE3EA"/>
+                      </a:solidFill>
+                      <a:prstDash val="solid"/>
+                      <a:round/>
+                      <a:headEnd type="none" w="med" len="med"/>
+                      <a:tailEnd type="none" w="med" len="med"/>
+                    </a:lnL>
+                    <a:lnR w="6350" cap="flat" cmpd="sng" algn="ctr">
+                      <a:solidFill>
+                        <a:srgbClr val="DDE3EA"/>
+                      </a:solidFill>
+                      <a:prstDash val="solid"/>
+                      <a:round/>
+                      <a:headEnd type="none" w="med" len="med"/>
+                      <a:tailEnd type="none" w="med" len="med"/>
+                    </a:lnR>
+                    <a:lnT w="6350" cap="flat" cmpd="sng" algn="ctr">
+                      <a:solidFill>
+                        <a:srgbClr val="DDE3EA"/>
+                      </a:solidFill>
+                      <a:prstDash val="solid"/>
+                      <a:round/>
+                      <a:headEnd type="none" w="med" len="med"/>
+                      <a:tailEnd type="none" w="med" len="med"/>
+                    </a:lnT>
+                    <a:lnB w="6350" cap="flat" cmpd="sng" algn="ctr">
+                      <a:solidFill>
+                        <a:srgbClr val="DDE3EA"/>
+                      </a:solidFill>
+                      <a:prstDash val="solid"/>
+                      <a:round/>
+                      <a:headEnd type="none" w="med" len="med"/>
+                      <a:tailEnd type="none" w="med" len="med"/>
+                    </a:lnB>
+                    <a:solidFill>
+                      <a:srgbClr val="EEF2F6"/>
+                    </a:solidFill>
+                  </a:tcPr>
+                </a:tc>
+              </a:tr>
+              <a:tr h="960120">
+                <a:tc>
+                  <a:txBody>
+                    <a:bodyPr/>
+                    <a:lstStyle/>
+                    <a:p>
+                      <a:pPr indent="0" marL="0">
+                        <a:buNone/>
+                      </a:pPr>
+                      <a:r>
+                        <a:rPr lang="en-US" sz="1400" b="1" dirty="0">
+                          <a:solidFill>
+                            <a:srgbClr val="1B2A41"/>
+                          </a:solidFill>
+                          <a:latin typeface="Calibri" pitchFamily="34" charset="0"/>
+                          <a:ea typeface="Calibri" pitchFamily="34" charset="-122"/>
+                          <a:cs typeface="Calibri" pitchFamily="34" charset="-120"/>
+                        </a:rPr>
+                        <a:t>D4 Detection</a:t>
+                      </a:r>
+                      <a:endParaRPr lang="en-US" sz="1400" dirty="0">
+                        <a:latin typeface="Calibri" charset="0"/>
+                        <a:ea typeface="Calibri" charset="0"/>
+                        <a:cs typeface="Calibri" charset="0"/>
+                      </a:endParaRPr>
+                    </a:p>
+                  </a:txBody>
+                  <a:tcPr marL="91440" marR="91440" marT="45720" marB="45720" anchor="ctr">
+                    <a:lnL w="6350" cap="flat" cmpd="sng" algn="ctr">
+                      <a:solidFill>
+                        <a:srgbClr val="DDE3EA"/>
+                      </a:solidFill>
+                      <a:prstDash val="solid"/>
+                      <a:round/>
+                      <a:headEnd type="none" w="med" len="med"/>
+                      <a:tailEnd type="none" w="med" len="med"/>
+                    </a:lnL>
+                    <a:lnR w="6350" cap="flat" cmpd="sng" algn="ctr">
+                      <a:solidFill>
+                        <a:srgbClr val="DDE3EA"/>
+                      </a:solidFill>
+                      <a:prstDash val="solid"/>
+                      <a:round/>
+                      <a:headEnd type="none" w="med" len="med"/>
+                      <a:tailEnd type="none" w="med" len="med"/>
+                    </a:lnR>
+                    <a:lnT w="6350" cap="flat" cmpd="sng" algn="ctr">
+                      <a:solidFill>
+                        <a:srgbClr val="DDE3EA"/>
+                      </a:solidFill>
+                      <a:prstDash val="solid"/>
+                      <a:round/>
+                      <a:headEnd type="none" w="med" len="med"/>
+                      <a:tailEnd type="none" w="med" len="med"/>
+                    </a:lnT>
+                    <a:lnB w="6350" cap="flat" cmpd="sng" algn="ctr">
+                      <a:solidFill>
+                        <a:srgbClr val="DDE3EA"/>
+                      </a:solidFill>
+                      <a:prstDash val="solid"/>
+                      <a:round/>
+                      <a:headEnd type="none" w="med" len="med"/>
+                      <a:tailEnd type="none" w="med" len="med"/>
+                    </a:lnB>
+                    <a:solidFill>
+                      <a:srgbClr val="FFFFFF"/>
+                    </a:solidFill>
+                  </a:tcPr>
+                </a:tc>
+                <a:tc>
+                  <a:txBody>
+                    <a:bodyPr/>
+                    <a:lstStyle/>
+                    <a:p>
+                      <a:pPr indent="0" marL="0">
+                        <a:buNone/>
+                      </a:pPr>
+                      <a:r>
+                        <a:rPr lang="en-US" sz="1400" dirty="0">
+                          <a:solidFill>
+                            <a:srgbClr val="1B2A41"/>
+                          </a:solidFill>
+                          <a:latin typeface="Calibri" pitchFamily="34" charset="0"/>
+                          <a:ea typeface="Calibri" pitchFamily="34" charset="-122"/>
+                          <a:cs typeface="Calibri" pitchFamily="34" charset="-120"/>
+                        </a:rPr>
+                        <a:t>Share of impact that we find before customers.</a:t>
+                      </a:r>
+                      <a:endParaRPr lang="en-US" sz="1400" dirty="0">
+                        <a:latin typeface="Calibri" charset="0"/>
+                        <a:ea typeface="Calibri" charset="0"/>
+                        <a:cs typeface="Calibri" charset="0"/>
+                      </a:endParaRPr>
+                    </a:p>
+                  </a:txBody>
+                  <a:tcPr marL="91440" marR="91440" marT="45720" marB="45720" anchor="ctr">
+                    <a:lnL w="6350" cap="flat" cmpd="sng" algn="ctr">
+                      <a:solidFill>
+                        <a:srgbClr val="DDE3EA"/>
+                      </a:solidFill>
+                      <a:prstDash val="solid"/>
+                      <a:round/>
+                      <a:headEnd type="none" w="med" len="med"/>
+                      <a:tailEnd type="none" w="med" len="med"/>
+                    </a:lnL>
+                    <a:lnR w="6350" cap="flat" cmpd="sng" algn="ctr">
+                      <a:solidFill>
+                        <a:srgbClr val="DDE3EA"/>
+                      </a:solidFill>
+                      <a:prstDash val="solid"/>
+                      <a:round/>
+                      <a:headEnd type="none" w="med" len="med"/>
+                      <a:tailEnd type="none" w="med" len="med"/>
+                    </a:lnR>
+                    <a:lnT w="6350" cap="flat" cmpd="sng" algn="ctr">
+                      <a:solidFill>
+                        <a:srgbClr val="DDE3EA"/>
+                      </a:solidFill>
+                      <a:prstDash val="solid"/>
+                      <a:round/>
+                      <a:headEnd type="none" w="med" len="med"/>
+                      <a:tailEnd type="none" w="med" len="med"/>
+                    </a:lnT>
+                    <a:lnB w="6350" cap="flat" cmpd="sng" algn="ctr">
+                      <a:solidFill>
+                        <a:srgbClr val="DDE3EA"/>
+                      </a:solidFill>
+                      <a:prstDash val="solid"/>
+                      <a:round/>
+                      <a:headEnd type="none" w="med" len="med"/>
+                      <a:tailEnd type="none" w="med" len="med"/>
+                    </a:lnB>
+                    <a:solidFill>
+                      <a:srgbClr val="FFFFFF"/>
+                    </a:solidFill>
+                  </a:tcPr>
+                </a:tc>
+                <a:tc>
+                  <a:txBody>
+                    <a:bodyPr/>
+                    <a:lstStyle/>
+                    <a:p>
+                      <a:pPr indent="0" marL="0">
+                        <a:buNone/>
+                      </a:pPr>
+                      <a:r>
+                        <a:rPr lang="en-US" sz="1400" dirty="0">
+                          <a:solidFill>
+                            <a:srgbClr val="1B2A41"/>
+                          </a:solidFill>
+                          <a:latin typeface="Calibri" pitchFamily="34" charset="0"/>
+                          <a:ea typeface="Calibri" pitchFamily="34" charset="-122"/>
+                          <a:cs typeface="Calibri" pitchFamily="34" charset="-120"/>
+                        </a:rPr>
+                        <a:t>96% of P1 incidents come through customer cases.</a:t>
+                      </a:r>
+                      <a:endParaRPr lang="en-US" sz="1400" dirty="0">
+                        <a:latin typeface="Calibri" charset="0"/>
+                        <a:ea typeface="Calibri" charset="0"/>
+                        <a:cs typeface="Calibri" charset="0"/>
+                      </a:endParaRPr>
+                    </a:p>
+                  </a:txBody>
+                  <a:tcPr marL="91440" marR="91440" marT="45720" marB="45720" anchor="ctr">
+                    <a:lnL w="6350" cap="flat" cmpd="sng" algn="ctr">
+                      <a:solidFill>
+                        <a:srgbClr val="DDE3EA"/>
+                      </a:solidFill>
+                      <a:prstDash val="solid"/>
+                      <a:round/>
+                      <a:headEnd type="none" w="med" len="med"/>
+                      <a:tailEnd type="none" w="med" len="med"/>
+                    </a:lnL>
+                    <a:lnR w="6350" cap="flat" cmpd="sng" algn="ctr">
+                      <a:solidFill>
+                        <a:srgbClr val="DDE3EA"/>
+                      </a:solidFill>
+                      <a:prstDash val="solid"/>
+                      <a:round/>
+                      <a:headEnd type="none" w="med" len="med"/>
+                      <a:tailEnd type="none" w="med" len="med"/>
+                    </a:lnR>
+                    <a:lnT w="6350" cap="flat" cmpd="sng" algn="ctr">
+                      <a:solidFill>
+                        <a:srgbClr val="DDE3EA"/>
+                      </a:solidFill>
+                      <a:prstDash val="solid"/>
+                      <a:round/>
+                      <a:headEnd type="none" w="med" len="med"/>
+                      <a:tailEnd type="none" w="med" len="med"/>
+                    </a:lnT>
+                    <a:lnB w="6350" cap="flat" cmpd="sng" algn="ctr">
+                      <a:solidFill>
+                        <a:srgbClr val="DDE3EA"/>
+                      </a:solidFill>
+                      <a:prstDash val="solid"/>
+                      <a:round/>
+                      <a:headEnd type="none" w="med" len="med"/>
+                      <a:tailEnd type="none" w="med" len="med"/>
+                    </a:lnB>
+                    <a:solidFill>
+                      <a:srgbClr val="FFFFFF"/>
+                    </a:solidFill>
+                  </a:tcPr>
+                </a:tc>
+                <a:tc>
+                  <a:txBody>
+                    <a:bodyPr/>
+                    <a:lstStyle/>
+                    <a:p>
+                      <a:pPr indent="0" marL="0">
+                        <a:buNone/>
+                      </a:pPr>
+                      <a:r>
+                        <a:rPr lang="en-US" sz="1400" dirty="0">
+                          <a:solidFill>
+                            <a:srgbClr val="1B2A41"/>
+                          </a:solidFill>
+                          <a:latin typeface="Calibri" pitchFamily="34" charset="0"/>
+                          <a:ea typeface="Calibri" pitchFamily="34" charset="-122"/>
+                          <a:cs typeface="Calibri" pitchFamily="34" charset="-120"/>
+                        </a:rPr>
+                        <a:t>Intake channel is only a proxy for first detection.</a:t>
+                      </a:r>
+                      <a:endParaRPr lang="en-US" sz="1400" dirty="0">
+                        <a:latin typeface="Calibri" charset="0"/>
+                        <a:ea typeface="Calibri" charset="0"/>
+                        <a:cs typeface="Calibri" charset="0"/>
+                      </a:endParaRPr>
+                    </a:p>
+                  </a:txBody>
+                  <a:tcPr marL="91440" marR="91440" marT="45720" marB="45720" anchor="ctr">
+                    <a:lnL w="6350" cap="flat" cmpd="sng" algn="ctr">
+                      <a:solidFill>
+                        <a:srgbClr val="DDE3EA"/>
+                      </a:solidFill>
+                      <a:prstDash val="solid"/>
+                      <a:round/>
+                      <a:headEnd type="none" w="med" len="med"/>
+                      <a:tailEnd type="none" w="med" len="med"/>
+                    </a:lnL>
+                    <a:lnR w="6350" cap="flat" cmpd="sng" algn="ctr">
+                      <a:solidFill>
+                        <a:srgbClr val="DDE3EA"/>
+                      </a:solidFill>
+                      <a:prstDash val="solid"/>
+                      <a:round/>
+                      <a:headEnd type="none" w="med" len="med"/>
+                      <a:tailEnd type="none" w="med" len="med"/>
+                    </a:lnR>
+                    <a:lnT w="6350" cap="flat" cmpd="sng" algn="ctr">
+                      <a:solidFill>
+                        <a:srgbClr val="DDE3EA"/>
+                      </a:solidFill>
+                      <a:prstDash val="solid"/>
+                      <a:round/>
+                      <a:headEnd type="none" w="med" len="med"/>
+                      <a:tailEnd type="none" w="med" len="med"/>
+                    </a:lnT>
+                    <a:lnB w="6350" cap="flat" cmpd="sng" algn="ctr">
+                      <a:solidFill>
+                        <a:srgbClr val="DDE3EA"/>
+                      </a:solidFill>
+                      <a:prstDash val="solid"/>
+                      <a:round/>
+                      <a:headEnd type="none" w="med" len="med"/>
+                      <a:tailEnd type="none" w="med" len="med"/>
+                    </a:lnB>
+                    <a:solidFill>
+                      <a:srgbClr val="FFFFFF"/>
+                    </a:solidFill>
+                  </a:tcPr>
+                </a:tc>
+                <a:tc>
+                  <a:txBody>
+                    <a:bodyPr/>
+                    <a:lstStyle/>
+                    <a:p>
+                      <a:pPr indent="0" marL="0">
+                        <a:buNone/>
+                      </a:pPr>
+                      <a:r>
+                        <a:rPr lang="en-US" sz="1400" dirty="0">
+                          <a:solidFill>
+                            <a:srgbClr val="1B2A41"/>
+                          </a:solidFill>
+                          <a:latin typeface="Calibri" pitchFamily="34" charset="0"/>
+                          <a:ea typeface="Calibri" pitchFamily="34" charset="-122"/>
+                          <a:cs typeface="Calibri" pitchFamily="34" charset="-120"/>
+                        </a:rPr>
+                        <a:t>Monitoring investment and Go/No-Go</a:t>
+                      </a:r>
+                      <a:endParaRPr lang="en-US" sz="1400" dirty="0">
+                        <a:latin typeface="Calibri" charset="0"/>
+                        <a:ea typeface="Calibri" charset="0"/>
+                        <a:cs typeface="Calibri" charset="0"/>
+                      </a:endParaRPr>
+                    </a:p>
+                  </a:txBody>
+                  <a:tcPr marL="91440" marR="91440" marT="45720" marB="45720" anchor="ctr">
+                    <a:lnL w="6350" cap="flat" cmpd="sng" algn="ctr">
+                      <a:solidFill>
+                        <a:srgbClr val="DDE3EA"/>
+                      </a:solidFill>
+                      <a:prstDash val="solid"/>
+                      <a:round/>
+                      <a:headEnd type="none" w="med" len="med"/>
+                      <a:tailEnd type="none" w="med" len="med"/>
+                    </a:lnL>
+                    <a:lnR w="6350" cap="flat" cmpd="sng" algn="ctr">
+                      <a:solidFill>
+                        <a:srgbClr val="DDE3EA"/>
+                      </a:solidFill>
+                      <a:prstDash val="solid"/>
+                      <a:round/>
+                      <a:headEnd type="none" w="med" len="med"/>
+                      <a:tailEnd type="none" w="med" len="med"/>
+                    </a:lnR>
+                    <a:lnT w="6350" cap="flat" cmpd="sng" algn="ctr">
+                      <a:solidFill>
+                        <a:srgbClr val="DDE3EA"/>
+                      </a:solidFill>
+                      <a:prstDash val="solid"/>
+                      <a:round/>
+                      <a:headEnd type="none" w="med" len="med"/>
+                      <a:tailEnd type="none" w="med" len="med"/>
+                    </a:lnT>
+                    <a:lnB w="6350" cap="flat" cmpd="sng" algn="ctr">
+                      <a:solidFill>
+                        <a:srgbClr val="DDE3EA"/>
+                      </a:solidFill>
+                      <a:prstDash val="solid"/>
+                      <a:round/>
+                      <a:headEnd type="none" w="med" len="med"/>
+                      <a:tailEnd type="none" w="med" len="med"/>
+                    </a:lnB>
+                    <a:solidFill>
+                      <a:srgbClr val="FFFFFF"/>
+                    </a:solidFill>
+                  </a:tcPr>
+                </a:tc>
+              </a:tr>
+            </a:tbl>
+          </a:graphicData>
+        </a:graphic>
+      </p:graphicFrame>
       <p:sp>
         <p:nvSpPr>
           <p:cNvPr id="25" name="Slide Number Placeholder 0"/>
@@ -4114,433 +4719,1768 @@
             <a:r>
               <a:rPr lang="en-US" sz="3000" b="1" dirty="0">
                 <a:solidFill>
-                  <a:schemeClr val="bg1"/>
+                  <a:schemeClr val="tx1"/>
                 </a:solidFill>
               </a:rPr>
-              <a:t>Prove before we block: timeline</a:t>
+              <a:t>Eight metrics every pod sees (2 of 2)</a:t>
             </a:r>
             <a:endParaRPr lang="en-US" sz="3000" dirty="0"/>
           </a:p>
         </p:txBody>
       </p:sp>
-      <p:sp>
-        <p:nvSpPr>
-          <p:cNvPr id="4" name="Text 1"/>
+      <p:graphicFrame>
+        <p:nvGraphicFramePr>
+          <p:cNvPr id="12" name="metrics-table"/>
+          <p:cNvGraphicFramePr>
+            <a:graphicFrameLocks noGrp="1"/>
+          </p:cNvGraphicFramePr>
+          <p:nvPr>
+            <p:extLst>
+              <p:ext uri="{D42A27DB-BD31-4B8C-83A1-F6EECF244321}">
+                <p14:modId xmlns:p14="http://schemas.microsoft.com/office/powerpoint/2010/main" val="1579011935"/>
+              </p:ext>
+            </p:extLst>
+          </p:nvPr>
+        </p:nvGraphicFramePr>
+        <p:xfrm>
+          <a:off x="548640" y="1371600"/>
+          <a:ext cx="11064240" cy="914400"/>
+        </p:xfrm>
+        <a:graphic>
+          <a:graphicData uri="http://schemas.openxmlformats.org/drawingml/2006/table">
+            <a:tbl>
+              <a:tblPr/>
+              <a:tblGrid>
+                <a:gridCol w="1737360"/>
+                <a:gridCol w="2834640"/>
+                <a:gridCol w="2468880"/>
+                <a:gridCol w="2103120"/>
+                <a:gridCol w="1920240"/>
+              </a:tblGrid>
+              <a:tr h="457200">
+                <a:tc>
+                  <a:txBody>
+                    <a:bodyPr/>
+                    <a:lstStyle/>
+                    <a:p>
+                      <a:pPr indent="0" marL="0">
+                        <a:buNone/>
+                      </a:pPr>
+                      <a:r>
+                        <a:rPr lang="en-US" sz="1400" b="1" dirty="0">
+                          <a:solidFill>
+                            <a:srgbClr val="FFFFFF"/>
+                          </a:solidFill>
+                          <a:latin typeface="Calibri" pitchFamily="34" charset="0"/>
+                          <a:ea typeface="Calibri" pitchFamily="34" charset="-122"/>
+                          <a:cs typeface="Calibri" pitchFamily="34" charset="-120"/>
+                        </a:rPr>
+                        <a:t>Metric</a:t>
+                      </a:r>
+                      <a:endParaRPr lang="en-US" sz="1400" dirty="0">
+                        <a:latin typeface="Calibri" charset="0"/>
+                        <a:ea typeface="Calibri" charset="0"/>
+                        <a:cs typeface="Calibri" charset="0"/>
+                      </a:endParaRPr>
+                    </a:p>
+                  </a:txBody>
+                  <a:tcPr marL="91440" marR="91440" marT="45720" marB="45720" anchor="ctr">
+                    <a:lnL w="6350" cap="flat" cmpd="sng" algn="ctr">
+                      <a:solidFill>
+                        <a:srgbClr val="DDE3EA"/>
+                      </a:solidFill>
+                      <a:prstDash val="solid"/>
+                      <a:round/>
+                      <a:headEnd type="none" w="med" len="med"/>
+                      <a:tailEnd type="none" w="med" len="med"/>
+                    </a:lnL>
+                    <a:lnR w="6350" cap="flat" cmpd="sng" algn="ctr">
+                      <a:solidFill>
+                        <a:srgbClr val="DDE3EA"/>
+                      </a:solidFill>
+                      <a:prstDash val="solid"/>
+                      <a:round/>
+                      <a:headEnd type="none" w="med" len="med"/>
+                      <a:tailEnd type="none" w="med" len="med"/>
+                    </a:lnR>
+                    <a:lnT w="6350" cap="flat" cmpd="sng" algn="ctr">
+                      <a:solidFill>
+                        <a:srgbClr val="DDE3EA"/>
+                      </a:solidFill>
+                      <a:prstDash val="solid"/>
+                      <a:round/>
+                      <a:headEnd type="none" w="med" len="med"/>
+                      <a:tailEnd type="none" w="med" len="med"/>
+                    </a:lnT>
+                    <a:lnB w="6350" cap="flat" cmpd="sng" algn="ctr">
+                      <a:solidFill>
+                        <a:srgbClr val="DDE3EA"/>
+                      </a:solidFill>
+                      <a:prstDash val="solid"/>
+                      <a:round/>
+                      <a:headEnd type="none" w="med" len="med"/>
+                      <a:tailEnd type="none" w="med" len="med"/>
+                    </a:lnB>
+                    <a:solidFill>
+                      <a:srgbClr val="1B2A41"/>
+                    </a:solidFill>
+                  </a:tcPr>
+                </a:tc>
+                <a:tc>
+                  <a:txBody>
+                    <a:bodyPr/>
+                    <a:lstStyle/>
+                    <a:p>
+                      <a:pPr indent="0" marL="0">
+                        <a:buNone/>
+                      </a:pPr>
+                      <a:r>
+                        <a:rPr lang="en-US" sz="1400" b="1" dirty="0">
+                          <a:solidFill>
+                            <a:srgbClr val="FFFFFF"/>
+                          </a:solidFill>
+                          <a:latin typeface="Calibri" pitchFamily="34" charset="0"/>
+                          <a:ea typeface="Calibri" pitchFamily="34" charset="-122"/>
+                          <a:cs typeface="Calibri" pitchFamily="34" charset="-120"/>
+                        </a:rPr>
+                        <a:t>What it measures</a:t>
+                      </a:r>
+                      <a:endParaRPr lang="en-US" sz="1400" dirty="0">
+                        <a:latin typeface="Calibri" charset="0"/>
+                        <a:ea typeface="Calibri" charset="0"/>
+                        <a:cs typeface="Calibri" charset="0"/>
+                      </a:endParaRPr>
+                    </a:p>
+                  </a:txBody>
+                  <a:tcPr marL="91440" marR="91440" marT="45720" marB="45720" anchor="ctr">
+                    <a:lnL w="6350" cap="flat" cmpd="sng" algn="ctr">
+                      <a:solidFill>
+                        <a:srgbClr val="DDE3EA"/>
+                      </a:solidFill>
+                      <a:prstDash val="solid"/>
+                      <a:round/>
+                      <a:headEnd type="none" w="med" len="med"/>
+                      <a:tailEnd type="none" w="med" len="med"/>
+                    </a:lnL>
+                    <a:lnR w="6350" cap="flat" cmpd="sng" algn="ctr">
+                      <a:solidFill>
+                        <a:srgbClr val="DDE3EA"/>
+                      </a:solidFill>
+                      <a:prstDash val="solid"/>
+                      <a:round/>
+                      <a:headEnd type="none" w="med" len="med"/>
+                      <a:tailEnd type="none" w="med" len="med"/>
+                    </a:lnR>
+                    <a:lnT w="6350" cap="flat" cmpd="sng" algn="ctr">
+                      <a:solidFill>
+                        <a:srgbClr val="DDE3EA"/>
+                      </a:solidFill>
+                      <a:prstDash val="solid"/>
+                      <a:round/>
+                      <a:headEnd type="none" w="med" len="med"/>
+                      <a:tailEnd type="none" w="med" len="med"/>
+                    </a:lnT>
+                    <a:lnB w="6350" cap="flat" cmpd="sng" algn="ctr">
+                      <a:solidFill>
+                        <a:srgbClr val="DDE3EA"/>
+                      </a:solidFill>
+                      <a:prstDash val="solid"/>
+                      <a:round/>
+                      <a:headEnd type="none" w="med" len="med"/>
+                      <a:tailEnd type="none" w="med" len="med"/>
+                    </a:lnB>
+                    <a:solidFill>
+                      <a:srgbClr val="1B2A41"/>
+                    </a:solidFill>
+                  </a:tcPr>
+                </a:tc>
+                <a:tc>
+                  <a:txBody>
+                    <a:bodyPr/>
+                    <a:lstStyle/>
+                    <a:p>
+                      <a:pPr indent="0" marL="0">
+                        <a:buNone/>
+                      </a:pPr>
+                      <a:r>
+                        <a:rPr lang="en-US" sz="1400" b="1" dirty="0">
+                          <a:solidFill>
+                            <a:srgbClr val="FFFFFF"/>
+                          </a:solidFill>
+                          <a:latin typeface="Calibri" pitchFamily="34" charset="0"/>
+                          <a:ea typeface="Calibri" pitchFamily="34" charset="-122"/>
+                          <a:cs typeface="Calibri" pitchFamily="34" charset="-120"/>
+                        </a:rPr>
+                        <a:t>Today (2025 to 2026)</a:t>
+                      </a:r>
+                      <a:endParaRPr lang="en-US" sz="1400" dirty="0">
+                        <a:latin typeface="Calibri" charset="0"/>
+                        <a:ea typeface="Calibri" charset="0"/>
+                        <a:cs typeface="Calibri" charset="0"/>
+                      </a:endParaRPr>
+                    </a:p>
+                  </a:txBody>
+                  <a:tcPr marL="91440" marR="91440" marT="45720" marB="45720" anchor="ctr">
+                    <a:lnL w="6350" cap="flat" cmpd="sng" algn="ctr">
+                      <a:solidFill>
+                        <a:srgbClr val="DDE3EA"/>
+                      </a:solidFill>
+                      <a:prstDash val="solid"/>
+                      <a:round/>
+                      <a:headEnd type="none" w="med" len="med"/>
+                      <a:tailEnd type="none" w="med" len="med"/>
+                    </a:lnL>
+                    <a:lnR w="6350" cap="flat" cmpd="sng" algn="ctr">
+                      <a:solidFill>
+                        <a:srgbClr val="DDE3EA"/>
+                      </a:solidFill>
+                      <a:prstDash val="solid"/>
+                      <a:round/>
+                      <a:headEnd type="none" w="med" len="med"/>
+                      <a:tailEnd type="none" w="med" len="med"/>
+                    </a:lnR>
+                    <a:lnT w="6350" cap="flat" cmpd="sng" algn="ctr">
+                      <a:solidFill>
+                        <a:srgbClr val="DDE3EA"/>
+                      </a:solidFill>
+                      <a:prstDash val="solid"/>
+                      <a:round/>
+                      <a:headEnd type="none" w="med" len="med"/>
+                      <a:tailEnd type="none" w="med" len="med"/>
+                    </a:lnT>
+                    <a:lnB w="6350" cap="flat" cmpd="sng" algn="ctr">
+                      <a:solidFill>
+                        <a:srgbClr val="DDE3EA"/>
+                      </a:solidFill>
+                      <a:prstDash val="solid"/>
+                      <a:round/>
+                      <a:headEnd type="none" w="med" len="med"/>
+                      <a:tailEnd type="none" w="med" len="med"/>
+                    </a:lnB>
+                    <a:solidFill>
+                      <a:srgbClr val="1B2A41"/>
+                    </a:solidFill>
+                  </a:tcPr>
+                </a:tc>
+                <a:tc>
+                  <a:txBody>
+                    <a:bodyPr/>
+                    <a:lstStyle/>
+                    <a:p>
+                      <a:pPr indent="0" marL="0">
+                        <a:buNone/>
+                      </a:pPr>
+                      <a:r>
+                        <a:rPr lang="en-US" sz="1400" b="1" dirty="0">
+                          <a:solidFill>
+                            <a:srgbClr val="FFFFFF"/>
+                          </a:solidFill>
+                          <a:latin typeface="Calibri" pitchFamily="34" charset="0"/>
+                          <a:ea typeface="Calibri" pitchFamily="34" charset="-122"/>
+                          <a:cs typeface="Calibri" pitchFamily="34" charset="-120"/>
+                        </a:rPr>
+                        <a:t>Data limit</a:t>
+                      </a:r>
+                      <a:endParaRPr lang="en-US" sz="1400" dirty="0">
+                        <a:latin typeface="Calibri" charset="0"/>
+                        <a:ea typeface="Calibri" charset="0"/>
+                        <a:cs typeface="Calibri" charset="0"/>
+                      </a:endParaRPr>
+                    </a:p>
+                  </a:txBody>
+                  <a:tcPr marL="91440" marR="91440" marT="45720" marB="45720" anchor="ctr">
+                    <a:lnL w="6350" cap="flat" cmpd="sng" algn="ctr">
+                      <a:solidFill>
+                        <a:srgbClr val="DDE3EA"/>
+                      </a:solidFill>
+                      <a:prstDash val="solid"/>
+                      <a:round/>
+                      <a:headEnd type="none" w="med" len="med"/>
+                      <a:tailEnd type="none" w="med" len="med"/>
+                    </a:lnL>
+                    <a:lnR w="6350" cap="flat" cmpd="sng" algn="ctr">
+                      <a:solidFill>
+                        <a:srgbClr val="DDE3EA"/>
+                      </a:solidFill>
+                      <a:prstDash val="solid"/>
+                      <a:round/>
+                      <a:headEnd type="none" w="med" len="med"/>
+                      <a:tailEnd type="none" w="med" len="med"/>
+                    </a:lnR>
+                    <a:lnT w="6350" cap="flat" cmpd="sng" algn="ctr">
+                      <a:solidFill>
+                        <a:srgbClr val="DDE3EA"/>
+                      </a:solidFill>
+                      <a:prstDash val="solid"/>
+                      <a:round/>
+                      <a:headEnd type="none" w="med" len="med"/>
+                      <a:tailEnd type="none" w="med" len="med"/>
+                    </a:lnT>
+                    <a:lnB w="6350" cap="flat" cmpd="sng" algn="ctr">
+                      <a:solidFill>
+                        <a:srgbClr val="DDE3EA"/>
+                      </a:solidFill>
+                      <a:prstDash val="solid"/>
+                      <a:round/>
+                      <a:headEnd type="none" w="med" len="med"/>
+                      <a:tailEnd type="none" w="med" len="med"/>
+                    </a:lnB>
+                    <a:solidFill>
+                      <a:srgbClr val="1B2A41"/>
+                    </a:solidFill>
+                  </a:tcPr>
+                </a:tc>
+                <a:tc>
+                  <a:txBody>
+                    <a:bodyPr/>
+                    <a:lstStyle/>
+                    <a:p>
+                      <a:pPr indent="0" marL="0">
+                        <a:buNone/>
+                      </a:pPr>
+                      <a:r>
+                        <a:rPr lang="en-US" sz="1400" b="1" dirty="0">
+                          <a:solidFill>
+                            <a:srgbClr val="FFFFFF"/>
+                          </a:solidFill>
+                          <a:latin typeface="Calibri" pitchFamily="34" charset="0"/>
+                          <a:ea typeface="Calibri" pitchFamily="34" charset="-122"/>
+                          <a:cs typeface="Calibri" pitchFamily="34" charset="-120"/>
+                        </a:rPr>
+                        <a:t>Decision it supports</a:t>
+                      </a:r>
+                      <a:endParaRPr lang="en-US" sz="1400" dirty="0">
+                        <a:latin typeface="Calibri" charset="0"/>
+                        <a:ea typeface="Calibri" charset="0"/>
+                        <a:cs typeface="Calibri" charset="0"/>
+                      </a:endParaRPr>
+                    </a:p>
+                  </a:txBody>
+                  <a:tcPr marL="91440" marR="91440" marT="45720" marB="45720" anchor="ctr">
+                    <a:lnL w="6350" cap="flat" cmpd="sng" algn="ctr">
+                      <a:solidFill>
+                        <a:srgbClr val="DDE3EA"/>
+                      </a:solidFill>
+                      <a:prstDash val="solid"/>
+                      <a:round/>
+                      <a:headEnd type="none" w="med" len="med"/>
+                      <a:tailEnd type="none" w="med" len="med"/>
+                    </a:lnL>
+                    <a:lnR w="6350" cap="flat" cmpd="sng" algn="ctr">
+                      <a:solidFill>
+                        <a:srgbClr val="DDE3EA"/>
+                      </a:solidFill>
+                      <a:prstDash val="solid"/>
+                      <a:round/>
+                      <a:headEnd type="none" w="med" len="med"/>
+                      <a:tailEnd type="none" w="med" len="med"/>
+                    </a:lnR>
+                    <a:lnT w="6350" cap="flat" cmpd="sng" algn="ctr">
+                      <a:solidFill>
+                        <a:srgbClr val="DDE3EA"/>
+                      </a:solidFill>
+                      <a:prstDash val="solid"/>
+                      <a:round/>
+                      <a:headEnd type="none" w="med" len="med"/>
+                      <a:tailEnd type="none" w="med" len="med"/>
+                    </a:lnT>
+                    <a:lnB w="6350" cap="flat" cmpd="sng" algn="ctr">
+                      <a:solidFill>
+                        <a:srgbClr val="DDE3EA"/>
+                      </a:solidFill>
+                      <a:prstDash val="solid"/>
+                      <a:round/>
+                      <a:headEnd type="none" w="med" len="med"/>
+                      <a:tailEnd type="none" w="med" len="med"/>
+                    </a:lnB>
+                    <a:solidFill>
+                      <a:srgbClr val="1B2A41"/>
+                    </a:solidFill>
+                  </a:tcPr>
+                </a:tc>
+              </a:tr>
+              <a:tr h="960120">
+                <a:tc>
+                  <a:txBody>
+                    <a:bodyPr/>
+                    <a:lstStyle/>
+                    <a:p>
+                      <a:pPr indent="0" marL="0">
+                        <a:buNone/>
+                      </a:pPr>
+                      <a:r>
+                        <a:rPr lang="en-US" sz="1400" b="1" dirty="0">
+                          <a:solidFill>
+                            <a:srgbClr val="1B2A41"/>
+                          </a:solidFill>
+                          <a:latin typeface="Calibri" pitchFamily="34" charset="0"/>
+                          <a:ea typeface="Calibri" pitchFamily="34" charset="-122"/>
+                          <a:cs typeface="Calibri" pitchFamily="34" charset="-120"/>
+                        </a:rPr>
+                        <a:t>D5 Recovery</a:t>
+                      </a:r>
+                      <a:endParaRPr lang="en-US" sz="1400" dirty="0">
+                        <a:latin typeface="Calibri" charset="0"/>
+                        <a:ea typeface="Calibri" charset="0"/>
+                        <a:cs typeface="Calibri" charset="0"/>
+                      </a:endParaRPr>
+                    </a:p>
+                  </a:txBody>
+                  <a:tcPr marL="91440" marR="91440" marT="45720" marB="45720" anchor="ctr">
+                    <a:lnL w="6350" cap="flat" cmpd="sng" algn="ctr">
+                      <a:solidFill>
+                        <a:srgbClr val="DDE3EA"/>
+                      </a:solidFill>
+                      <a:prstDash val="solid"/>
+                      <a:round/>
+                      <a:headEnd type="none" w="med" len="med"/>
+                      <a:tailEnd type="none" w="med" len="med"/>
+                    </a:lnL>
+                    <a:lnR w="6350" cap="flat" cmpd="sng" algn="ctr">
+                      <a:solidFill>
+                        <a:srgbClr val="DDE3EA"/>
+                      </a:solidFill>
+                      <a:prstDash val="solid"/>
+                      <a:round/>
+                      <a:headEnd type="none" w="med" len="med"/>
+                      <a:tailEnd type="none" w="med" len="med"/>
+                    </a:lnR>
+                    <a:lnT w="6350" cap="flat" cmpd="sng" algn="ctr">
+                      <a:solidFill>
+                        <a:srgbClr val="DDE3EA"/>
+                      </a:solidFill>
+                      <a:prstDash val="solid"/>
+                      <a:round/>
+                      <a:headEnd type="none" w="med" len="med"/>
+                      <a:tailEnd type="none" w="med" len="med"/>
+                    </a:lnT>
+                    <a:lnB w="6350" cap="flat" cmpd="sng" algn="ctr">
+                      <a:solidFill>
+                        <a:srgbClr val="DDE3EA"/>
+                      </a:solidFill>
+                      <a:prstDash val="solid"/>
+                      <a:round/>
+                      <a:headEnd type="none" w="med" len="med"/>
+                      <a:tailEnd type="none" w="med" len="med"/>
+                    </a:lnB>
+                    <a:solidFill>
+                      <a:srgbClr val="EEF2F6"/>
+                    </a:solidFill>
+                  </a:tcPr>
+                </a:tc>
+                <a:tc>
+                  <a:txBody>
+                    <a:bodyPr/>
+                    <a:lstStyle/>
+                    <a:p>
+                      <a:pPr indent="0" marL="0">
+                        <a:buNone/>
+                      </a:pPr>
+                      <a:r>
+                        <a:rPr lang="en-US" sz="1400" dirty="0">
+                          <a:solidFill>
+                            <a:srgbClr val="1B2A41"/>
+                          </a:solidFill>
+                          <a:latin typeface="Calibri" pitchFamily="34" charset="0"/>
+                          <a:ea typeface="Calibri" pitchFamily="34" charset="-122"/>
+                          <a:cs typeface="Calibri" pitchFamily="34" charset="-120"/>
+                        </a:rPr>
+                        <a:t>Time to restore service. Time to fix a bug.</a:t>
+                      </a:r>
+                      <a:endParaRPr lang="en-US" sz="1400" dirty="0">
+                        <a:latin typeface="Calibri" charset="0"/>
+                        <a:ea typeface="Calibri" charset="0"/>
+                        <a:cs typeface="Calibri" charset="0"/>
+                      </a:endParaRPr>
+                    </a:p>
+                  </a:txBody>
+                  <a:tcPr marL="91440" marR="91440" marT="45720" marB="45720" anchor="ctr">
+                    <a:lnL w="6350" cap="flat" cmpd="sng" algn="ctr">
+                      <a:solidFill>
+                        <a:srgbClr val="DDE3EA"/>
+                      </a:solidFill>
+                      <a:prstDash val="solid"/>
+                      <a:round/>
+                      <a:headEnd type="none" w="med" len="med"/>
+                      <a:tailEnd type="none" w="med" len="med"/>
+                    </a:lnL>
+                    <a:lnR w="6350" cap="flat" cmpd="sng" algn="ctr">
+                      <a:solidFill>
+                        <a:srgbClr val="DDE3EA"/>
+                      </a:solidFill>
+                      <a:prstDash val="solid"/>
+                      <a:round/>
+                      <a:headEnd type="none" w="med" len="med"/>
+                      <a:tailEnd type="none" w="med" len="med"/>
+                    </a:lnR>
+                    <a:lnT w="6350" cap="flat" cmpd="sng" algn="ctr">
+                      <a:solidFill>
+                        <a:srgbClr val="DDE3EA"/>
+                      </a:solidFill>
+                      <a:prstDash val="solid"/>
+                      <a:round/>
+                      <a:headEnd type="none" w="med" len="med"/>
+                      <a:tailEnd type="none" w="med" len="med"/>
+                    </a:lnT>
+                    <a:lnB w="6350" cap="flat" cmpd="sng" algn="ctr">
+                      <a:solidFill>
+                        <a:srgbClr val="DDE3EA"/>
+                      </a:solidFill>
+                      <a:prstDash val="solid"/>
+                      <a:round/>
+                      <a:headEnd type="none" w="med" len="med"/>
+                      <a:tailEnd type="none" w="med" len="med"/>
+                    </a:lnB>
+                    <a:solidFill>
+                      <a:srgbClr val="EEF2F6"/>
+                    </a:solidFill>
+                  </a:tcPr>
+                </a:tc>
+                <a:tc>
+                  <a:txBody>
+                    <a:bodyPr/>
+                    <a:lstStyle/>
+                    <a:p>
+                      <a:pPr indent="0" marL="0">
+                        <a:buNone/>
+                      </a:pPr>
+                      <a:r>
+                        <a:rPr lang="en-US" sz="1400" dirty="0">
+                          <a:solidFill>
+                            <a:srgbClr val="1B2A41"/>
+                          </a:solidFill>
+                          <a:latin typeface="Calibri" pitchFamily="34" charset="0"/>
+                          <a:ea typeface="Calibri" pitchFamily="34" charset="-122"/>
+                          <a:cs typeface="Calibri" pitchFamily="34" charset="-120"/>
+                        </a:rPr>
+                        <a:t>71% of P1 under 4 hours. Bug fix median 10 days, both years.</a:t>
+                      </a:r>
+                      <a:endParaRPr lang="en-US" sz="1400" dirty="0">
+                        <a:latin typeface="Calibri" charset="0"/>
+                        <a:ea typeface="Calibri" charset="0"/>
+                        <a:cs typeface="Calibri" charset="0"/>
+                      </a:endParaRPr>
+                    </a:p>
+                  </a:txBody>
+                  <a:tcPr marL="91440" marR="91440" marT="45720" marB="45720" anchor="ctr">
+                    <a:lnL w="6350" cap="flat" cmpd="sng" algn="ctr">
+                      <a:solidFill>
+                        <a:srgbClr val="DDE3EA"/>
+                      </a:solidFill>
+                      <a:prstDash val="solid"/>
+                      <a:round/>
+                      <a:headEnd type="none" w="med" len="med"/>
+                      <a:tailEnd type="none" w="med" len="med"/>
+                    </a:lnL>
+                    <a:lnR w="6350" cap="flat" cmpd="sng" algn="ctr">
+                      <a:solidFill>
+                        <a:srgbClr val="DDE3EA"/>
+                      </a:solidFill>
+                      <a:prstDash val="solid"/>
+                      <a:round/>
+                      <a:headEnd type="none" w="med" len="med"/>
+                      <a:tailEnd type="none" w="med" len="med"/>
+                    </a:lnR>
+                    <a:lnT w="6350" cap="flat" cmpd="sng" algn="ctr">
+                      <a:solidFill>
+                        <a:srgbClr val="DDE3EA"/>
+                      </a:solidFill>
+                      <a:prstDash val="solid"/>
+                      <a:round/>
+                      <a:headEnd type="none" w="med" len="med"/>
+                      <a:tailEnd type="none" w="med" len="med"/>
+                    </a:lnT>
+                    <a:lnB w="6350" cap="flat" cmpd="sng" algn="ctr">
+                      <a:solidFill>
+                        <a:srgbClr val="DDE3EA"/>
+                      </a:solidFill>
+                      <a:prstDash val="solid"/>
+                      <a:round/>
+                      <a:headEnd type="none" w="med" len="med"/>
+                      <a:tailEnd type="none" w="med" len="med"/>
+                    </a:lnB>
+                    <a:solidFill>
+                      <a:srgbClr val="EEF2F6"/>
+                    </a:solidFill>
+                  </a:tcPr>
+                </a:tc>
+                <a:tc>
+                  <a:txBody>
+                    <a:bodyPr/>
+                    <a:lstStyle/>
+                    <a:p>
+                      <a:pPr indent="0" marL="0">
+                        <a:buNone/>
+                      </a:pPr>
+                      <a:r>
+                        <a:rPr lang="en-US" sz="1400" dirty="0">
+                          <a:solidFill>
+                            <a:srgbClr val="1B2A41"/>
+                          </a:solidFill>
+                          <a:latin typeface="Calibri" pitchFamily="34" charset="0"/>
+                          <a:ea typeface="Calibri" pitchFamily="34" charset="-122"/>
+                          <a:cs typeface="Calibri" pitchFamily="34" charset="-120"/>
+                        </a:rPr>
+                        <a:t>Resolve time is not restore time.</a:t>
+                      </a:r>
+                      <a:endParaRPr lang="en-US" sz="1400" dirty="0">
+                        <a:latin typeface="Calibri" charset="0"/>
+                        <a:ea typeface="Calibri" charset="0"/>
+                        <a:cs typeface="Calibri" charset="0"/>
+                      </a:endParaRPr>
+                    </a:p>
+                  </a:txBody>
+                  <a:tcPr marL="91440" marR="91440" marT="45720" marB="45720" anchor="ctr">
+                    <a:lnL w="6350" cap="flat" cmpd="sng" algn="ctr">
+                      <a:solidFill>
+                        <a:srgbClr val="DDE3EA"/>
+                      </a:solidFill>
+                      <a:prstDash val="solid"/>
+                      <a:round/>
+                      <a:headEnd type="none" w="med" len="med"/>
+                      <a:tailEnd type="none" w="med" len="med"/>
+                    </a:lnL>
+                    <a:lnR w="6350" cap="flat" cmpd="sng" algn="ctr">
+                      <a:solidFill>
+                        <a:srgbClr val="DDE3EA"/>
+                      </a:solidFill>
+                      <a:prstDash val="solid"/>
+                      <a:round/>
+                      <a:headEnd type="none" w="med" len="med"/>
+                      <a:tailEnd type="none" w="med" len="med"/>
+                    </a:lnR>
+                    <a:lnT w="6350" cap="flat" cmpd="sng" algn="ctr">
+                      <a:solidFill>
+                        <a:srgbClr val="DDE3EA"/>
+                      </a:solidFill>
+                      <a:prstDash val="solid"/>
+                      <a:round/>
+                      <a:headEnd type="none" w="med" len="med"/>
+                      <a:tailEnd type="none" w="med" len="med"/>
+                    </a:lnT>
+                    <a:lnB w="6350" cap="flat" cmpd="sng" algn="ctr">
+                      <a:solidFill>
+                        <a:srgbClr val="DDE3EA"/>
+                      </a:solidFill>
+                      <a:prstDash val="solid"/>
+                      <a:round/>
+                      <a:headEnd type="none" w="med" len="med"/>
+                      <a:tailEnd type="none" w="med" len="med"/>
+                    </a:lnB>
+                    <a:solidFill>
+                      <a:srgbClr val="EEF2F6"/>
+                    </a:solidFill>
+                  </a:tcPr>
+                </a:tc>
+                <a:tc>
+                  <a:txBody>
+                    <a:bodyPr/>
+                    <a:lstStyle/>
+                    <a:p>
+                      <a:pPr indent="0" marL="0">
+                        <a:buNone/>
+                      </a:pPr>
+                      <a:r>
+                        <a:rPr lang="en-US" sz="1400" dirty="0">
+                          <a:solidFill>
+                            <a:srgbClr val="1B2A41"/>
+                          </a:solidFill>
+                          <a:latin typeface="Calibri" pitchFamily="34" charset="0"/>
+                          <a:ea typeface="Calibri" pitchFamily="34" charset="-122"/>
+                          <a:cs typeface="Calibri" pitchFamily="34" charset="-120"/>
+                        </a:rPr>
+                        <a:t>Response capacity</a:t>
+                      </a:r>
+                      <a:endParaRPr lang="en-US" sz="1400" dirty="0">
+                        <a:latin typeface="Calibri" charset="0"/>
+                        <a:ea typeface="Calibri" charset="0"/>
+                        <a:cs typeface="Calibri" charset="0"/>
+                      </a:endParaRPr>
+                    </a:p>
+                  </a:txBody>
+                  <a:tcPr marL="91440" marR="91440" marT="45720" marB="45720" anchor="ctr">
+                    <a:lnL w="6350" cap="flat" cmpd="sng" algn="ctr">
+                      <a:solidFill>
+                        <a:srgbClr val="DDE3EA"/>
+                      </a:solidFill>
+                      <a:prstDash val="solid"/>
+                      <a:round/>
+                      <a:headEnd type="none" w="med" len="med"/>
+                      <a:tailEnd type="none" w="med" len="med"/>
+                    </a:lnL>
+                    <a:lnR w="6350" cap="flat" cmpd="sng" algn="ctr">
+                      <a:solidFill>
+                        <a:srgbClr val="DDE3EA"/>
+                      </a:solidFill>
+                      <a:prstDash val="solid"/>
+                      <a:round/>
+                      <a:headEnd type="none" w="med" len="med"/>
+                      <a:tailEnd type="none" w="med" len="med"/>
+                    </a:lnR>
+                    <a:lnT w="6350" cap="flat" cmpd="sng" algn="ctr">
+                      <a:solidFill>
+                        <a:srgbClr val="DDE3EA"/>
+                      </a:solidFill>
+                      <a:prstDash val="solid"/>
+                      <a:round/>
+                      <a:headEnd type="none" w="med" len="med"/>
+                      <a:tailEnd type="none" w="med" len="med"/>
+                    </a:lnT>
+                    <a:lnB w="6350" cap="flat" cmpd="sng" algn="ctr">
+                      <a:solidFill>
+                        <a:srgbClr val="DDE3EA"/>
+                      </a:solidFill>
+                      <a:prstDash val="solid"/>
+                      <a:round/>
+                      <a:headEnd type="none" w="med" len="med"/>
+                      <a:tailEnd type="none" w="med" len="med"/>
+                    </a:lnB>
+                    <a:solidFill>
+                      <a:srgbClr val="EEF2F6"/>
+                    </a:solidFill>
+                  </a:tcPr>
+                </a:tc>
+              </a:tr>
+              <a:tr h="960120">
+                <a:tc>
+                  <a:txBody>
+                    <a:bodyPr/>
+                    <a:lstStyle/>
+                    <a:p>
+                      <a:pPr indent="0" marL="0">
+                        <a:buNone/>
+                      </a:pPr>
+                      <a:r>
+                        <a:rPr lang="en-US" sz="1400" b="1" dirty="0">
+                          <a:solidFill>
+                            <a:srgbClr val="1B2A41"/>
+                          </a:solidFill>
+                          <a:latin typeface="Calibri" pitchFamily="34" charset="0"/>
+                          <a:ea typeface="Calibri" pitchFamily="34" charset="-122"/>
+                          <a:cs typeface="Calibri" pitchFamily="34" charset="-120"/>
+                        </a:rPr>
+                        <a:t>D6 Change safety</a:t>
+                      </a:r>
+                      <a:endParaRPr lang="en-US" sz="1400" dirty="0">
+                        <a:latin typeface="Calibri" charset="0"/>
+                        <a:ea typeface="Calibri" charset="0"/>
+                        <a:cs typeface="Calibri" charset="0"/>
+                      </a:endParaRPr>
+                    </a:p>
+                  </a:txBody>
+                  <a:tcPr marL="91440" marR="91440" marT="45720" marB="45720" anchor="ctr">
+                    <a:lnL w="6350" cap="flat" cmpd="sng" algn="ctr">
+                      <a:solidFill>
+                        <a:srgbClr val="DDE3EA"/>
+                      </a:solidFill>
+                      <a:prstDash val="solid"/>
+                      <a:round/>
+                      <a:headEnd type="none" w="med" len="med"/>
+                      <a:tailEnd type="none" w="med" len="med"/>
+                    </a:lnL>
+                    <a:lnR w="6350" cap="flat" cmpd="sng" algn="ctr">
+                      <a:solidFill>
+                        <a:srgbClr val="DDE3EA"/>
+                      </a:solidFill>
+                      <a:prstDash val="solid"/>
+                      <a:round/>
+                      <a:headEnd type="none" w="med" len="med"/>
+                      <a:tailEnd type="none" w="med" len="med"/>
+                    </a:lnR>
+                    <a:lnT w="6350" cap="flat" cmpd="sng" algn="ctr">
+                      <a:solidFill>
+                        <a:srgbClr val="DDE3EA"/>
+                      </a:solidFill>
+                      <a:prstDash val="solid"/>
+                      <a:round/>
+                      <a:headEnd type="none" w="med" len="med"/>
+                      <a:tailEnd type="none" w="med" len="med"/>
+                    </a:lnT>
+                    <a:lnB w="6350" cap="flat" cmpd="sng" algn="ctr">
+                      <a:solidFill>
+                        <a:srgbClr val="DDE3EA"/>
+                      </a:solidFill>
+                      <a:prstDash val="solid"/>
+                      <a:round/>
+                      <a:headEnd type="none" w="med" len="med"/>
+                      <a:tailEnd type="none" w="med" len="med"/>
+                    </a:lnB>
+                    <a:solidFill>
+                      <a:srgbClr val="FFFFFF"/>
+                    </a:solidFill>
+                  </a:tcPr>
+                </a:tc>
+                <a:tc>
+                  <a:txBody>
+                    <a:bodyPr/>
+                    <a:lstStyle/>
+                    <a:p>
+                      <a:pPr indent="0" marL="0">
+                        <a:buNone/>
+                      </a:pPr>
+                      <a:r>
+                        <a:rPr lang="en-US" sz="1400" dirty="0">
+                          <a:solidFill>
+                            <a:srgbClr val="1B2A41"/>
+                          </a:solidFill>
+                          <a:latin typeface="Calibri" pitchFamily="34" charset="0"/>
+                          <a:ea typeface="Calibri" pitchFamily="34" charset="-122"/>
+                          <a:cs typeface="Calibri" pitchFamily="34" charset="-120"/>
+                        </a:rPr>
+                        <a:t>Bugs caused by fixes. Emergency changes. Recent changes.</a:t>
+                      </a:r>
+                      <a:endParaRPr lang="en-US" sz="1400" dirty="0">
+                        <a:latin typeface="Calibri" charset="0"/>
+                        <a:ea typeface="Calibri" charset="0"/>
+                        <a:cs typeface="Calibri" charset="0"/>
+                      </a:endParaRPr>
+                    </a:p>
+                  </a:txBody>
+                  <a:tcPr marL="91440" marR="91440" marT="45720" marB="45720" anchor="ctr">
+                    <a:lnL w="6350" cap="flat" cmpd="sng" algn="ctr">
+                      <a:solidFill>
+                        <a:srgbClr val="DDE3EA"/>
+                      </a:solidFill>
+                      <a:prstDash val="solid"/>
+                      <a:round/>
+                      <a:headEnd type="none" w="med" len="med"/>
+                      <a:tailEnd type="none" w="med" len="med"/>
+                    </a:lnL>
+                    <a:lnR w="6350" cap="flat" cmpd="sng" algn="ctr">
+                      <a:solidFill>
+                        <a:srgbClr val="DDE3EA"/>
+                      </a:solidFill>
+                      <a:prstDash val="solid"/>
+                      <a:round/>
+                      <a:headEnd type="none" w="med" len="med"/>
+                      <a:tailEnd type="none" w="med" len="med"/>
+                    </a:lnR>
+                    <a:lnT w="6350" cap="flat" cmpd="sng" algn="ctr">
+                      <a:solidFill>
+                        <a:srgbClr val="DDE3EA"/>
+                      </a:solidFill>
+                      <a:prstDash val="solid"/>
+                      <a:round/>
+                      <a:headEnd type="none" w="med" len="med"/>
+                      <a:tailEnd type="none" w="med" len="med"/>
+                    </a:lnT>
+                    <a:lnB w="6350" cap="flat" cmpd="sng" algn="ctr">
+                      <a:solidFill>
+                        <a:srgbClr val="DDE3EA"/>
+                      </a:solidFill>
+                      <a:prstDash val="solid"/>
+                      <a:round/>
+                      <a:headEnd type="none" w="med" len="med"/>
+                      <a:tailEnd type="none" w="med" len="med"/>
+                    </a:lnB>
+                    <a:solidFill>
+                      <a:srgbClr val="FFFFFF"/>
+                    </a:solidFill>
+                  </a:tcPr>
+                </a:tc>
+                <a:tc>
+                  <a:txBody>
+                    <a:bodyPr/>
+                    <a:lstStyle/>
+                    <a:p>
+                      <a:pPr indent="0" marL="0">
+                        <a:buNone/>
+                      </a:pPr>
+                      <a:r>
+                        <a:rPr lang="en-US" sz="1400" dirty="0">
+                          <a:solidFill>
+                            <a:srgbClr val="1B2A41"/>
+                          </a:solidFill>
+                          <a:latin typeface="Calibri" pitchFamily="34" charset="0"/>
+                          <a:ea typeface="Calibri" pitchFamily="34" charset="-122"/>
+                          <a:cs typeface="Calibri" pitchFamily="34" charset="-120"/>
+                        </a:rPr>
+                        <a:t>Fix-caused: 23.5% to 27.1%. Emergency changes x2.9 since June 2026.</a:t>
+                      </a:r>
+                      <a:endParaRPr lang="en-US" sz="1400" dirty="0">
+                        <a:latin typeface="Calibri" charset="0"/>
+                        <a:ea typeface="Calibri" charset="0"/>
+                        <a:cs typeface="Calibri" charset="0"/>
+                      </a:endParaRPr>
+                    </a:p>
+                  </a:txBody>
+                  <a:tcPr marL="91440" marR="91440" marT="45720" marB="45720" anchor="ctr">
+                    <a:lnL w="6350" cap="flat" cmpd="sng" algn="ctr">
+                      <a:solidFill>
+                        <a:srgbClr val="DDE3EA"/>
+                      </a:solidFill>
+                      <a:prstDash val="solid"/>
+                      <a:round/>
+                      <a:headEnd type="none" w="med" len="med"/>
+                      <a:tailEnd type="none" w="med" len="med"/>
+                    </a:lnL>
+                    <a:lnR w="6350" cap="flat" cmpd="sng" algn="ctr">
+                      <a:solidFill>
+                        <a:srgbClr val="DDE3EA"/>
+                      </a:solidFill>
+                      <a:prstDash val="solid"/>
+                      <a:round/>
+                      <a:headEnd type="none" w="med" len="med"/>
+                      <a:tailEnd type="none" w="med" len="med"/>
+                    </a:lnR>
+                    <a:lnT w="6350" cap="flat" cmpd="sng" algn="ctr">
+                      <a:solidFill>
+                        <a:srgbClr val="DDE3EA"/>
+                      </a:solidFill>
+                      <a:prstDash val="solid"/>
+                      <a:round/>
+                      <a:headEnd type="none" w="med" len="med"/>
+                      <a:tailEnd type="none" w="med" len="med"/>
+                    </a:lnT>
+                    <a:lnB w="6350" cap="flat" cmpd="sng" algn="ctr">
+                      <a:solidFill>
+                        <a:srgbClr val="DDE3EA"/>
+                      </a:solidFill>
+                      <a:prstDash val="solid"/>
+                      <a:round/>
+                      <a:headEnd type="none" w="med" len="med"/>
+                      <a:tailEnd type="none" w="med" len="med"/>
+                    </a:lnB>
+                    <a:solidFill>
+                      <a:srgbClr val="FFFFFF"/>
+                    </a:solidFill>
+                  </a:tcPr>
+                </a:tc>
+                <a:tc>
+                  <a:txBody>
+                    <a:bodyPr/>
+                    <a:lstStyle/>
+                    <a:p>
+                      <a:pPr indent="0" marL="0">
+                        <a:buNone/>
+                      </a:pPr>
+                      <a:r>
+                        <a:rPr lang="en-US" sz="1400" dirty="0">
+                          <a:solidFill>
+                            <a:srgbClr val="1B2A41"/>
+                          </a:solidFill>
+                          <a:latin typeface="Calibri" pitchFamily="34" charset="0"/>
+                          <a:ea typeface="Calibri" pitchFamily="34" charset="-122"/>
+                          <a:cs typeface="Calibri" pitchFamily="34" charset="-120"/>
+                        </a:rPr>
+                        <a:t>Cause is known for 25% of bugs only.</a:t>
+                      </a:r>
+                      <a:endParaRPr lang="en-US" sz="1400" dirty="0">
+                        <a:latin typeface="Calibri" charset="0"/>
+                        <a:ea typeface="Calibri" charset="0"/>
+                        <a:cs typeface="Calibri" charset="0"/>
+                      </a:endParaRPr>
+                    </a:p>
+                  </a:txBody>
+                  <a:tcPr marL="91440" marR="91440" marT="45720" marB="45720" anchor="ctr">
+                    <a:lnL w="6350" cap="flat" cmpd="sng" algn="ctr">
+                      <a:solidFill>
+                        <a:srgbClr val="DDE3EA"/>
+                      </a:solidFill>
+                      <a:prstDash val="solid"/>
+                      <a:round/>
+                      <a:headEnd type="none" w="med" len="med"/>
+                      <a:tailEnd type="none" w="med" len="med"/>
+                    </a:lnL>
+                    <a:lnR w="6350" cap="flat" cmpd="sng" algn="ctr">
+                      <a:solidFill>
+                        <a:srgbClr val="DDE3EA"/>
+                      </a:solidFill>
+                      <a:prstDash val="solid"/>
+                      <a:round/>
+                      <a:headEnd type="none" w="med" len="med"/>
+                      <a:tailEnd type="none" w="med" len="med"/>
+                    </a:lnR>
+                    <a:lnT w="6350" cap="flat" cmpd="sng" algn="ctr">
+                      <a:solidFill>
+                        <a:srgbClr val="DDE3EA"/>
+                      </a:solidFill>
+                      <a:prstDash val="solid"/>
+                      <a:round/>
+                      <a:headEnd type="none" w="med" len="med"/>
+                      <a:tailEnd type="none" w="med" len="med"/>
+                    </a:lnT>
+                    <a:lnB w="6350" cap="flat" cmpd="sng" algn="ctr">
+                      <a:solidFill>
+                        <a:srgbClr val="DDE3EA"/>
+                      </a:solidFill>
+                      <a:prstDash val="solid"/>
+                      <a:round/>
+                      <a:headEnd type="none" w="med" len="med"/>
+                      <a:tailEnd type="none" w="med" len="med"/>
+                    </a:lnB>
+                    <a:solidFill>
+                      <a:srgbClr val="FFFFFF"/>
+                    </a:solidFill>
+                  </a:tcPr>
+                </a:tc>
+                <a:tc>
+                  <a:txBody>
+                    <a:bodyPr/>
+                    <a:lstStyle/>
+                    <a:p>
+                      <a:pPr indent="0" marL="0">
+                        <a:buNone/>
+                      </a:pPr>
+                      <a:r>
+                        <a:rPr lang="en-US" sz="1400" dirty="0">
+                          <a:solidFill>
+                            <a:srgbClr val="1B2A41"/>
+                          </a:solidFill>
+                          <a:latin typeface="Calibri" pitchFamily="34" charset="0"/>
+                          <a:ea typeface="Calibri" pitchFamily="34" charset="-122"/>
+                          <a:cs typeface="Calibri" pitchFamily="34" charset="-120"/>
+                        </a:rPr>
+                        <a:t>Review depth for fixes</a:t>
+                      </a:r>
+                      <a:endParaRPr lang="en-US" sz="1400" dirty="0">
+                        <a:latin typeface="Calibri" charset="0"/>
+                        <a:ea typeface="Calibri" charset="0"/>
+                        <a:cs typeface="Calibri" charset="0"/>
+                      </a:endParaRPr>
+                    </a:p>
+                  </a:txBody>
+                  <a:tcPr marL="91440" marR="91440" marT="45720" marB="45720" anchor="ctr">
+                    <a:lnL w="6350" cap="flat" cmpd="sng" algn="ctr">
+                      <a:solidFill>
+                        <a:srgbClr val="DDE3EA"/>
+                      </a:solidFill>
+                      <a:prstDash val="solid"/>
+                      <a:round/>
+                      <a:headEnd type="none" w="med" len="med"/>
+                      <a:tailEnd type="none" w="med" len="med"/>
+                    </a:lnL>
+                    <a:lnR w="6350" cap="flat" cmpd="sng" algn="ctr">
+                      <a:solidFill>
+                        <a:srgbClr val="DDE3EA"/>
+                      </a:solidFill>
+                      <a:prstDash val="solid"/>
+                      <a:round/>
+                      <a:headEnd type="none" w="med" len="med"/>
+                      <a:tailEnd type="none" w="med" len="med"/>
+                    </a:lnR>
+                    <a:lnT w="6350" cap="flat" cmpd="sng" algn="ctr">
+                      <a:solidFill>
+                        <a:srgbClr val="DDE3EA"/>
+                      </a:solidFill>
+                      <a:prstDash val="solid"/>
+                      <a:round/>
+                      <a:headEnd type="none" w="med" len="med"/>
+                      <a:tailEnd type="none" w="med" len="med"/>
+                    </a:lnT>
+                    <a:lnB w="6350" cap="flat" cmpd="sng" algn="ctr">
+                      <a:solidFill>
+                        <a:srgbClr val="DDE3EA"/>
+                      </a:solidFill>
+                      <a:prstDash val="solid"/>
+                      <a:round/>
+                      <a:headEnd type="none" w="med" len="med"/>
+                      <a:tailEnd type="none" w="med" len="med"/>
+                    </a:lnB>
+                    <a:solidFill>
+                      <a:srgbClr val="FFFFFF"/>
+                    </a:solidFill>
+                  </a:tcPr>
+                </a:tc>
+              </a:tr>
+              <a:tr h="960120">
+                <a:tc>
+                  <a:txBody>
+                    <a:bodyPr/>
+                    <a:lstStyle/>
+                    <a:p>
+                      <a:pPr indent="0" marL="0">
+                        <a:buNone/>
+                      </a:pPr>
+                      <a:r>
+                        <a:rPr lang="en-US" sz="1400" b="1" dirty="0">
+                          <a:solidFill>
+                            <a:srgbClr val="1B2A41"/>
+                          </a:solidFill>
+                          <a:latin typeface="Calibri" pitchFamily="34" charset="0"/>
+                          <a:ea typeface="Calibri" pitchFamily="34" charset="-122"/>
+                          <a:cs typeface="Calibri" pitchFamily="34" charset="-120"/>
+                        </a:rPr>
+                        <a:t>D7 Non-recurrence</a:t>
+                      </a:r>
+                      <a:endParaRPr lang="en-US" sz="1400" dirty="0">
+                        <a:latin typeface="Calibri" charset="0"/>
+                        <a:ea typeface="Calibri" charset="0"/>
+                        <a:cs typeface="Calibri" charset="0"/>
+                      </a:endParaRPr>
+                    </a:p>
+                  </a:txBody>
+                  <a:tcPr marL="91440" marR="91440" marT="45720" marB="45720" anchor="ctr">
+                    <a:lnL w="6350" cap="flat" cmpd="sng" algn="ctr">
+                      <a:solidFill>
+                        <a:srgbClr val="DDE3EA"/>
+                      </a:solidFill>
+                      <a:prstDash val="solid"/>
+                      <a:round/>
+                      <a:headEnd type="none" w="med" len="med"/>
+                      <a:tailEnd type="none" w="med" len="med"/>
+                    </a:lnL>
+                    <a:lnR w="6350" cap="flat" cmpd="sng" algn="ctr">
+                      <a:solidFill>
+                        <a:srgbClr val="DDE3EA"/>
+                      </a:solidFill>
+                      <a:prstDash val="solid"/>
+                      <a:round/>
+                      <a:headEnd type="none" w="med" len="med"/>
+                      <a:tailEnd type="none" w="med" len="med"/>
+                    </a:lnR>
+                    <a:lnT w="6350" cap="flat" cmpd="sng" algn="ctr">
+                      <a:solidFill>
+                        <a:srgbClr val="DDE3EA"/>
+                      </a:solidFill>
+                      <a:prstDash val="solid"/>
+                      <a:round/>
+                      <a:headEnd type="none" w="med" len="med"/>
+                      <a:tailEnd type="none" w="med" len="med"/>
+                    </a:lnT>
+                    <a:lnB w="6350" cap="flat" cmpd="sng" algn="ctr">
+                      <a:solidFill>
+                        <a:srgbClr val="DDE3EA"/>
+                      </a:solidFill>
+                      <a:prstDash val="solid"/>
+                      <a:round/>
+                      <a:headEnd type="none" w="med" len="med"/>
+                      <a:tailEnd type="none" w="med" len="med"/>
+                    </a:lnB>
+                    <a:solidFill>
+                      <a:srgbClr val="EEF2F6"/>
+                    </a:solidFill>
+                  </a:tcPr>
+                </a:tc>
+                <a:tc>
+                  <a:txBody>
+                    <a:bodyPr/>
+                    <a:lstStyle/>
+                    <a:p>
+                      <a:pPr indent="0" marL="0">
+                        <a:buNone/>
+                      </a:pPr>
+                      <a:r>
+                        <a:rPr lang="en-US" sz="1400" dirty="0">
+                          <a:solidFill>
+                            <a:srgbClr val="1B2A41"/>
+                          </a:solidFill>
+                          <a:latin typeface="Calibri" pitchFamily="34" charset="0"/>
+                          <a:ea typeface="Calibri" pitchFamily="34" charset="-122"/>
+                          <a:cs typeface="Calibri" pitchFamily="34" charset="-120"/>
+                        </a:rPr>
+                        <a:t>Do fixes hold? Repeat bugs and reopens.</a:t>
+                      </a:r>
+                      <a:endParaRPr lang="en-US" sz="1400" dirty="0">
+                        <a:latin typeface="Calibri" charset="0"/>
+                        <a:ea typeface="Calibri" charset="0"/>
+                        <a:cs typeface="Calibri" charset="0"/>
+                      </a:endParaRPr>
+                    </a:p>
+                  </a:txBody>
+                  <a:tcPr marL="91440" marR="91440" marT="45720" marB="45720" anchor="ctr">
+                    <a:lnL w="6350" cap="flat" cmpd="sng" algn="ctr">
+                      <a:solidFill>
+                        <a:srgbClr val="DDE3EA"/>
+                      </a:solidFill>
+                      <a:prstDash val="solid"/>
+                      <a:round/>
+                      <a:headEnd type="none" w="med" len="med"/>
+                      <a:tailEnd type="none" w="med" len="med"/>
+                    </a:lnL>
+                    <a:lnR w="6350" cap="flat" cmpd="sng" algn="ctr">
+                      <a:solidFill>
+                        <a:srgbClr val="DDE3EA"/>
+                      </a:solidFill>
+                      <a:prstDash val="solid"/>
+                      <a:round/>
+                      <a:headEnd type="none" w="med" len="med"/>
+                      <a:tailEnd type="none" w="med" len="med"/>
+                    </a:lnR>
+                    <a:lnT w="6350" cap="flat" cmpd="sng" algn="ctr">
+                      <a:solidFill>
+                        <a:srgbClr val="DDE3EA"/>
+                      </a:solidFill>
+                      <a:prstDash val="solid"/>
+                      <a:round/>
+                      <a:headEnd type="none" w="med" len="med"/>
+                      <a:tailEnd type="none" w="med" len="med"/>
+                    </a:lnT>
+                    <a:lnB w="6350" cap="flat" cmpd="sng" algn="ctr">
+                      <a:solidFill>
+                        <a:srgbClr val="DDE3EA"/>
+                      </a:solidFill>
+                      <a:prstDash val="solid"/>
+                      <a:round/>
+                      <a:headEnd type="none" w="med" len="med"/>
+                      <a:tailEnd type="none" w="med" len="med"/>
+                    </a:lnB>
+                    <a:solidFill>
+                      <a:srgbClr val="EEF2F6"/>
+                    </a:solidFill>
+                  </a:tcPr>
+                </a:tc>
+                <a:tc>
+                  <a:txBody>
+                    <a:bodyPr/>
+                    <a:lstStyle/>
+                    <a:p>
+                      <a:pPr indent="0" marL="0">
+                        <a:buNone/>
+                      </a:pPr>
+                      <a:r>
+                        <a:rPr lang="en-US" sz="1400" dirty="0">
+                          <a:solidFill>
+                            <a:srgbClr val="1B2A41"/>
+                          </a:solidFill>
+                          <a:latin typeface="Calibri" pitchFamily="34" charset="0"/>
+                          <a:ea typeface="Calibri" pitchFamily="34" charset="-122"/>
+                          <a:cs typeface="Calibri" pitchFamily="34" charset="-120"/>
+                        </a:rPr>
+                        <a:t>Repeat: 3.9% to 1.2-1.6%. Reopen: 5.2% to 5.6%.</a:t>
+                      </a:r>
+                      <a:endParaRPr lang="en-US" sz="1400" dirty="0">
+                        <a:latin typeface="Calibri" charset="0"/>
+                        <a:ea typeface="Calibri" charset="0"/>
+                        <a:cs typeface="Calibri" charset="0"/>
+                      </a:endParaRPr>
+                    </a:p>
+                  </a:txBody>
+                  <a:tcPr marL="91440" marR="91440" marT="45720" marB="45720" anchor="ctr">
+                    <a:lnL w="6350" cap="flat" cmpd="sng" algn="ctr">
+                      <a:solidFill>
+                        <a:srgbClr val="DDE3EA"/>
+                      </a:solidFill>
+                      <a:prstDash val="solid"/>
+                      <a:round/>
+                      <a:headEnd type="none" w="med" len="med"/>
+                      <a:tailEnd type="none" w="med" len="med"/>
+                    </a:lnL>
+                    <a:lnR w="6350" cap="flat" cmpd="sng" algn="ctr">
+                      <a:solidFill>
+                        <a:srgbClr val="DDE3EA"/>
+                      </a:solidFill>
+                      <a:prstDash val="solid"/>
+                      <a:round/>
+                      <a:headEnd type="none" w="med" len="med"/>
+                      <a:tailEnd type="none" w="med" len="med"/>
+                    </a:lnR>
+                    <a:lnT w="6350" cap="flat" cmpd="sng" algn="ctr">
+                      <a:solidFill>
+                        <a:srgbClr val="DDE3EA"/>
+                      </a:solidFill>
+                      <a:prstDash val="solid"/>
+                      <a:round/>
+                      <a:headEnd type="none" w="med" len="med"/>
+                      <a:tailEnd type="none" w="med" len="med"/>
+                    </a:lnT>
+                    <a:lnB w="6350" cap="flat" cmpd="sng" algn="ctr">
+                      <a:solidFill>
+                        <a:srgbClr val="DDE3EA"/>
+                      </a:solidFill>
+                      <a:prstDash val="solid"/>
+                      <a:round/>
+                      <a:headEnd type="none" w="med" len="med"/>
+                      <a:tailEnd type="none" w="med" len="med"/>
+                    </a:lnB>
+                    <a:solidFill>
+                      <a:srgbClr val="EEF2F6"/>
+                    </a:solidFill>
+                  </a:tcPr>
+                </a:tc>
+                <a:tc>
+                  <a:txBody>
+                    <a:bodyPr/>
+                    <a:lstStyle/>
+                    <a:p>
+                      <a:pPr indent="0" marL="0">
+                        <a:buNone/>
+                      </a:pPr>
+                      <a:r>
+                        <a:rPr lang="en-US" sz="1400" dirty="0">
+                          <a:solidFill>
+                            <a:srgbClr val="1B2A41"/>
+                          </a:solidFill>
+                          <a:latin typeface="Calibri" pitchFamily="34" charset="0"/>
+                          <a:ea typeface="Calibri" pitchFamily="34" charset="-122"/>
+                          <a:cs typeface="Calibri" pitchFamily="34" charset="-120"/>
+                        </a:rPr>
+                        <a:t>Similarity model. One rater.</a:t>
+                      </a:r>
+                      <a:endParaRPr lang="en-US" sz="1400" dirty="0">
+                        <a:latin typeface="Calibri" charset="0"/>
+                        <a:ea typeface="Calibri" charset="0"/>
+                        <a:cs typeface="Calibri" charset="0"/>
+                      </a:endParaRPr>
+                    </a:p>
+                  </a:txBody>
+                  <a:tcPr marL="91440" marR="91440" marT="45720" marB="45720" anchor="ctr">
+                    <a:lnL w="6350" cap="flat" cmpd="sng" algn="ctr">
+                      <a:solidFill>
+                        <a:srgbClr val="DDE3EA"/>
+                      </a:solidFill>
+                      <a:prstDash val="solid"/>
+                      <a:round/>
+                      <a:headEnd type="none" w="med" len="med"/>
+                      <a:tailEnd type="none" w="med" len="med"/>
+                    </a:lnL>
+                    <a:lnR w="6350" cap="flat" cmpd="sng" algn="ctr">
+                      <a:solidFill>
+                        <a:srgbClr val="DDE3EA"/>
+                      </a:solidFill>
+                      <a:prstDash val="solid"/>
+                      <a:round/>
+                      <a:headEnd type="none" w="med" len="med"/>
+                      <a:tailEnd type="none" w="med" len="med"/>
+                    </a:lnR>
+                    <a:lnT w="6350" cap="flat" cmpd="sng" algn="ctr">
+                      <a:solidFill>
+                        <a:srgbClr val="DDE3EA"/>
+                      </a:solidFill>
+                      <a:prstDash val="solid"/>
+                      <a:round/>
+                      <a:headEnd type="none" w="med" len="med"/>
+                      <a:tailEnd type="none" w="med" len="med"/>
+                    </a:lnT>
+                    <a:lnB w="6350" cap="flat" cmpd="sng" algn="ctr">
+                      <a:solidFill>
+                        <a:srgbClr val="DDE3EA"/>
+                      </a:solidFill>
+                      <a:prstDash val="solid"/>
+                      <a:round/>
+                      <a:headEnd type="none" w="med" len="med"/>
+                      <a:tailEnd type="none" w="med" len="med"/>
+                    </a:lnB>
+                    <a:solidFill>
+                      <a:srgbClr val="EEF2F6"/>
+                    </a:solidFill>
+                  </a:tcPr>
+                </a:tc>
+                <a:tc>
+                  <a:txBody>
+                    <a:bodyPr/>
+                    <a:lstStyle/>
+                    <a:p>
+                      <a:pPr indent="0" marL="0">
+                        <a:buNone/>
+                      </a:pPr>
+                      <a:r>
+                        <a:rPr lang="en-US" sz="1400" dirty="0">
+                          <a:solidFill>
+                            <a:srgbClr val="1B2A41"/>
+                          </a:solidFill>
+                          <a:latin typeface="Calibri" pitchFamily="34" charset="0"/>
+                          <a:ea typeface="Calibri" pitchFamily="34" charset="-122"/>
+                          <a:cs typeface="Calibri" pitchFamily="34" charset="-120"/>
+                        </a:rPr>
+                        <a:t>Whether fixes work</a:t>
+                      </a:r>
+                      <a:endParaRPr lang="en-US" sz="1400" dirty="0">
+                        <a:latin typeface="Calibri" charset="0"/>
+                        <a:ea typeface="Calibri" charset="0"/>
+                        <a:cs typeface="Calibri" charset="0"/>
+                      </a:endParaRPr>
+                    </a:p>
+                  </a:txBody>
+                  <a:tcPr marL="91440" marR="91440" marT="45720" marB="45720" anchor="ctr">
+                    <a:lnL w="6350" cap="flat" cmpd="sng" algn="ctr">
+                      <a:solidFill>
+                        <a:srgbClr val="DDE3EA"/>
+                      </a:solidFill>
+                      <a:prstDash val="solid"/>
+                      <a:round/>
+                      <a:headEnd type="none" w="med" len="med"/>
+                      <a:tailEnd type="none" w="med" len="med"/>
+                    </a:lnL>
+                    <a:lnR w="6350" cap="flat" cmpd="sng" algn="ctr">
+                      <a:solidFill>
+                        <a:srgbClr val="DDE3EA"/>
+                      </a:solidFill>
+                      <a:prstDash val="solid"/>
+                      <a:round/>
+                      <a:headEnd type="none" w="med" len="med"/>
+                      <a:tailEnd type="none" w="med" len="med"/>
+                    </a:lnR>
+                    <a:lnT w="6350" cap="flat" cmpd="sng" algn="ctr">
+                      <a:solidFill>
+                        <a:srgbClr val="DDE3EA"/>
+                      </a:solidFill>
+                      <a:prstDash val="solid"/>
+                      <a:round/>
+                      <a:headEnd type="none" w="med" len="med"/>
+                      <a:tailEnd type="none" w="med" len="med"/>
+                    </a:lnT>
+                    <a:lnB w="6350" cap="flat" cmpd="sng" algn="ctr">
+                      <a:solidFill>
+                        <a:srgbClr val="DDE3EA"/>
+                      </a:solidFill>
+                      <a:prstDash val="solid"/>
+                      <a:round/>
+                      <a:headEnd type="none" w="med" len="med"/>
+                      <a:tailEnd type="none" w="med" len="med"/>
+                    </a:lnB>
+                    <a:solidFill>
+                      <a:srgbClr val="EEF2F6"/>
+                    </a:solidFill>
+                  </a:tcPr>
+                </a:tc>
+              </a:tr>
+              <a:tr h="960120">
+                <a:tc>
+                  <a:txBody>
+                    <a:bodyPr/>
+                    <a:lstStyle/>
+                    <a:p>
+                      <a:pPr indent="0" marL="0">
+                        <a:buNone/>
+                      </a:pPr>
+                      <a:r>
+                        <a:rPr lang="en-US" sz="1400" b="1" dirty="0">
+                          <a:solidFill>
+                            <a:srgbClr val="1B2A41"/>
+                          </a:solidFill>
+                          <a:latin typeface="Calibri" pitchFamily="34" charset="0"/>
+                          <a:ea typeface="Calibri" pitchFamily="34" charset="-122"/>
+                          <a:cs typeface="Calibri" pitchFamily="34" charset="-120"/>
+                        </a:rPr>
+                        <a:t>D8 Expectation fit</a:t>
+                      </a:r>
+                      <a:endParaRPr lang="en-US" sz="1400" dirty="0">
+                        <a:latin typeface="Calibri" charset="0"/>
+                        <a:ea typeface="Calibri" charset="0"/>
+                        <a:cs typeface="Calibri" charset="0"/>
+                      </a:endParaRPr>
+                    </a:p>
+                  </a:txBody>
+                  <a:tcPr marL="91440" marR="91440" marT="45720" marB="45720" anchor="ctr">
+                    <a:lnL w="6350" cap="flat" cmpd="sng" algn="ctr">
+                      <a:solidFill>
+                        <a:srgbClr val="DDE3EA"/>
+                      </a:solidFill>
+                      <a:prstDash val="solid"/>
+                      <a:round/>
+                      <a:headEnd type="none" w="med" len="med"/>
+                      <a:tailEnd type="none" w="med" len="med"/>
+                    </a:lnL>
+                    <a:lnR w="6350" cap="flat" cmpd="sng" algn="ctr">
+                      <a:solidFill>
+                        <a:srgbClr val="DDE3EA"/>
+                      </a:solidFill>
+                      <a:prstDash val="solid"/>
+                      <a:round/>
+                      <a:headEnd type="none" w="med" len="med"/>
+                      <a:tailEnd type="none" w="med" len="med"/>
+                    </a:lnR>
+                    <a:lnT w="6350" cap="flat" cmpd="sng" algn="ctr">
+                      <a:solidFill>
+                        <a:srgbClr val="DDE3EA"/>
+                      </a:solidFill>
+                      <a:prstDash val="solid"/>
+                      <a:round/>
+                      <a:headEnd type="none" w="med" len="med"/>
+                      <a:tailEnd type="none" w="med" len="med"/>
+                    </a:lnT>
+                    <a:lnB w="6350" cap="flat" cmpd="sng" algn="ctr">
+                      <a:solidFill>
+                        <a:srgbClr val="DDE3EA"/>
+                      </a:solidFill>
+                      <a:prstDash val="solid"/>
+                      <a:round/>
+                      <a:headEnd type="none" w="med" len="med"/>
+                      <a:tailEnd type="none" w="med" len="med"/>
+                    </a:lnB>
+                    <a:solidFill>
+                      <a:srgbClr val="FFFFFF"/>
+                    </a:solidFill>
+                  </a:tcPr>
+                </a:tc>
+                <a:tc>
+                  <a:txBody>
+                    <a:bodyPr/>
+                    <a:lstStyle/>
+                    <a:p>
+                      <a:pPr indent="0" marL="0">
+                        <a:buNone/>
+                      </a:pPr>
+                      <a:r>
+                        <a:rPr lang="en-US" sz="1400" dirty="0">
+                          <a:solidFill>
+                            <a:srgbClr val="1B2A41"/>
+                          </a:solidFill>
+                          <a:latin typeface="Calibri" pitchFamily="34" charset="0"/>
+                          <a:ea typeface="Calibri" pitchFamily="34" charset="-122"/>
+                          <a:cs typeface="Calibri" pitchFamily="34" charset="-120"/>
+                        </a:rPr>
+                        <a:t>Reports closed as works as designed that are real gaps.</a:t>
+                      </a:r>
+                      <a:endParaRPr lang="en-US" sz="1400" dirty="0">
+                        <a:latin typeface="Calibri" charset="0"/>
+                        <a:ea typeface="Calibri" charset="0"/>
+                        <a:cs typeface="Calibri" charset="0"/>
+                      </a:endParaRPr>
+                    </a:p>
+                  </a:txBody>
+                  <a:tcPr marL="91440" marR="91440" marT="45720" marB="45720" anchor="ctr">
+                    <a:lnL w="6350" cap="flat" cmpd="sng" algn="ctr">
+                      <a:solidFill>
+                        <a:srgbClr val="DDE3EA"/>
+                      </a:solidFill>
+                      <a:prstDash val="solid"/>
+                      <a:round/>
+                      <a:headEnd type="none" w="med" len="med"/>
+                      <a:tailEnd type="none" w="med" len="med"/>
+                    </a:lnL>
+                    <a:lnR w="6350" cap="flat" cmpd="sng" algn="ctr">
+                      <a:solidFill>
+                        <a:srgbClr val="DDE3EA"/>
+                      </a:solidFill>
+                      <a:prstDash val="solid"/>
+                      <a:round/>
+                      <a:headEnd type="none" w="med" len="med"/>
+                      <a:tailEnd type="none" w="med" len="med"/>
+                    </a:lnR>
+                    <a:lnT w="6350" cap="flat" cmpd="sng" algn="ctr">
+                      <a:solidFill>
+                        <a:srgbClr val="DDE3EA"/>
+                      </a:solidFill>
+                      <a:prstDash val="solid"/>
+                      <a:round/>
+                      <a:headEnd type="none" w="med" len="med"/>
+                      <a:tailEnd type="none" w="med" len="med"/>
+                    </a:lnT>
+                    <a:lnB w="6350" cap="flat" cmpd="sng" algn="ctr">
+                      <a:solidFill>
+                        <a:srgbClr val="DDE3EA"/>
+                      </a:solidFill>
+                      <a:prstDash val="solid"/>
+                      <a:round/>
+                      <a:headEnd type="none" w="med" len="med"/>
+                      <a:tailEnd type="none" w="med" len="med"/>
+                    </a:lnB>
+                    <a:solidFill>
+                      <a:srgbClr val="FFFFFF"/>
+                    </a:solidFill>
+                  </a:tcPr>
+                </a:tc>
+                <a:tc>
+                  <a:txBody>
+                    <a:bodyPr/>
+                    <a:lstStyle/>
+                    <a:p>
+                      <a:pPr indent="0" marL="0">
+                        <a:buNone/>
+                      </a:pPr>
+                      <a:r>
+                        <a:rPr lang="en-US" sz="1400" dirty="0">
+                          <a:solidFill>
+                            <a:srgbClr val="1B2A41"/>
+                          </a:solidFill>
+                          <a:latin typeface="Calibri" pitchFamily="34" charset="0"/>
+                          <a:ea typeface="Calibri" pitchFamily="34" charset="-122"/>
+                          <a:cs typeface="Calibri" pitchFamily="34" charset="-120"/>
+                        </a:rPr>
+                        <a:t>25% of reports closed this way. 42.5% of those are real gaps.</a:t>
+                      </a:r>
+                      <a:endParaRPr lang="en-US" sz="1400" dirty="0">
+                        <a:latin typeface="Calibri" charset="0"/>
+                        <a:ea typeface="Calibri" charset="0"/>
+                        <a:cs typeface="Calibri" charset="0"/>
+                      </a:endParaRPr>
+                    </a:p>
+                  </a:txBody>
+                  <a:tcPr marL="91440" marR="91440" marT="45720" marB="45720" anchor="ctr">
+                    <a:lnL w="6350" cap="flat" cmpd="sng" algn="ctr">
+                      <a:solidFill>
+                        <a:srgbClr val="DDE3EA"/>
+                      </a:solidFill>
+                      <a:prstDash val="solid"/>
+                      <a:round/>
+                      <a:headEnd type="none" w="med" len="med"/>
+                      <a:tailEnd type="none" w="med" len="med"/>
+                    </a:lnL>
+                    <a:lnR w="6350" cap="flat" cmpd="sng" algn="ctr">
+                      <a:solidFill>
+                        <a:srgbClr val="DDE3EA"/>
+                      </a:solidFill>
+                      <a:prstDash val="solid"/>
+                      <a:round/>
+                      <a:headEnd type="none" w="med" len="med"/>
+                      <a:tailEnd type="none" w="med" len="med"/>
+                    </a:lnR>
+                    <a:lnT w="6350" cap="flat" cmpd="sng" algn="ctr">
+                      <a:solidFill>
+                        <a:srgbClr val="DDE3EA"/>
+                      </a:solidFill>
+                      <a:prstDash val="solid"/>
+                      <a:round/>
+                      <a:headEnd type="none" w="med" len="med"/>
+                      <a:tailEnd type="none" w="med" len="med"/>
+                    </a:lnT>
+                    <a:lnB w="6350" cap="flat" cmpd="sng" algn="ctr">
+                      <a:solidFill>
+                        <a:srgbClr val="DDE3EA"/>
+                      </a:solidFill>
+                      <a:prstDash val="solid"/>
+                      <a:round/>
+                      <a:headEnd type="none" w="med" len="med"/>
+                      <a:tailEnd type="none" w="med" len="med"/>
+                    </a:lnB>
+                    <a:solidFill>
+                      <a:srgbClr val="FFFFFF"/>
+                    </a:solidFill>
+                  </a:tcPr>
+                </a:tc>
+                <a:tc>
+                  <a:txBody>
+                    <a:bodyPr/>
+                    <a:lstStyle/>
+                    <a:p>
+                      <a:pPr indent="0" marL="0">
+                        <a:buNone/>
+                      </a:pPr>
+                      <a:r>
+                        <a:rPr lang="en-US" sz="1400" dirty="0">
+                          <a:solidFill>
+                            <a:srgbClr val="1B2A41"/>
+                          </a:solidFill>
+                          <a:latin typeface="Calibri" pitchFamily="34" charset="0"/>
+                          <a:ea typeface="Calibri" pitchFamily="34" charset="-122"/>
+                          <a:cs typeface="Calibri" pitchFamily="34" charset="-120"/>
+                        </a:rPr>
+                        <a:t>Sample of 40 only.</a:t>
+                      </a:r>
+                      <a:endParaRPr lang="en-US" sz="1400" dirty="0">
+                        <a:latin typeface="Calibri" charset="0"/>
+                        <a:ea typeface="Calibri" charset="0"/>
+                        <a:cs typeface="Calibri" charset="0"/>
+                      </a:endParaRPr>
+                    </a:p>
+                  </a:txBody>
+                  <a:tcPr marL="91440" marR="91440" marT="45720" marB="45720" anchor="ctr">
+                    <a:lnL w="6350" cap="flat" cmpd="sng" algn="ctr">
+                      <a:solidFill>
+                        <a:srgbClr val="DDE3EA"/>
+                      </a:solidFill>
+                      <a:prstDash val="solid"/>
+                      <a:round/>
+                      <a:headEnd type="none" w="med" len="med"/>
+                      <a:tailEnd type="none" w="med" len="med"/>
+                    </a:lnL>
+                    <a:lnR w="6350" cap="flat" cmpd="sng" algn="ctr">
+                      <a:solidFill>
+                        <a:srgbClr val="DDE3EA"/>
+                      </a:solidFill>
+                      <a:prstDash val="solid"/>
+                      <a:round/>
+                      <a:headEnd type="none" w="med" len="med"/>
+                      <a:tailEnd type="none" w="med" len="med"/>
+                    </a:lnR>
+                    <a:lnT w="6350" cap="flat" cmpd="sng" algn="ctr">
+                      <a:solidFill>
+                        <a:srgbClr val="DDE3EA"/>
+                      </a:solidFill>
+                      <a:prstDash val="solid"/>
+                      <a:round/>
+                      <a:headEnd type="none" w="med" len="med"/>
+                      <a:tailEnd type="none" w="med" len="med"/>
+                    </a:lnT>
+                    <a:lnB w="6350" cap="flat" cmpd="sng" algn="ctr">
+                      <a:solidFill>
+                        <a:srgbClr val="DDE3EA"/>
+                      </a:solidFill>
+                      <a:prstDash val="solid"/>
+                      <a:round/>
+                      <a:headEnd type="none" w="med" len="med"/>
+                      <a:tailEnd type="none" w="med" len="med"/>
+                    </a:lnB>
+                    <a:solidFill>
+                      <a:srgbClr val="FFFFFF"/>
+                    </a:solidFill>
+                  </a:tcPr>
+                </a:tc>
+                <a:tc>
+                  <a:txBody>
+                    <a:bodyPr/>
+                    <a:lstStyle/>
+                    <a:p>
+                      <a:pPr indent="0" marL="0">
+                        <a:buNone/>
+                      </a:pPr>
+                      <a:r>
+                        <a:rPr lang="en-US" sz="1400" dirty="0">
+                          <a:solidFill>
+                            <a:srgbClr val="1B2A41"/>
+                          </a:solidFill>
+                          <a:latin typeface="Calibri" pitchFamily="34" charset="0"/>
+                          <a:ea typeface="Calibri" pitchFamily="34" charset="-122"/>
+                          <a:cs typeface="Calibri" pitchFamily="34" charset="-120"/>
+                        </a:rPr>
+                        <a:t>Requirement and documentation work</a:t>
+                      </a:r>
+                      <a:endParaRPr lang="en-US" sz="1400" dirty="0">
+                        <a:latin typeface="Calibri" charset="0"/>
+                        <a:ea typeface="Calibri" charset="0"/>
+                        <a:cs typeface="Calibri" charset="0"/>
+                      </a:endParaRPr>
+                    </a:p>
+                  </a:txBody>
+                  <a:tcPr marL="91440" marR="91440" marT="45720" marB="45720" anchor="ctr">
+                    <a:lnL w="6350" cap="flat" cmpd="sng" algn="ctr">
+                      <a:solidFill>
+                        <a:srgbClr val="DDE3EA"/>
+                      </a:solidFill>
+                      <a:prstDash val="solid"/>
+                      <a:round/>
+                      <a:headEnd type="none" w="med" len="med"/>
+                      <a:tailEnd type="none" w="med" len="med"/>
+                    </a:lnL>
+                    <a:lnR w="6350" cap="flat" cmpd="sng" algn="ctr">
+                      <a:solidFill>
+                        <a:srgbClr val="DDE3EA"/>
+                      </a:solidFill>
+                      <a:prstDash val="solid"/>
+                      <a:round/>
+                      <a:headEnd type="none" w="med" len="med"/>
+                      <a:tailEnd type="none" w="med" len="med"/>
+                    </a:lnR>
+                    <a:lnT w="6350" cap="flat" cmpd="sng" algn="ctr">
+                      <a:solidFill>
+                        <a:srgbClr val="DDE3EA"/>
+                      </a:solidFill>
+                      <a:prstDash val="solid"/>
+                      <a:round/>
+                      <a:headEnd type="none" w="med" len="med"/>
+                      <a:tailEnd type="none" w="med" len="med"/>
+                    </a:lnT>
+                    <a:lnB w="6350" cap="flat" cmpd="sng" algn="ctr">
+                      <a:solidFill>
+                        <a:srgbClr val="DDE3EA"/>
+                      </a:solidFill>
+                      <a:prstDash val="solid"/>
+                      <a:round/>
+                      <a:headEnd type="none" w="med" len="med"/>
+                      <a:tailEnd type="none" w="med" len="med"/>
+                    </a:lnB>
+                    <a:solidFill>
+                      <a:srgbClr val="FFFFFF"/>
+                    </a:solidFill>
+                  </a:tcPr>
+                </a:tc>
+              </a:tr>
+            </a:tbl>
+          </a:graphicData>
+        </a:graphic>
+      </p:graphicFrame>
+      <p:sp>
+        <p:nvSpPr>
+          <p:cNvPr id="5" name="Text 1"/>
           <p:cNvSpPr txBox="1"/>
           <p:nvPr/>
         </p:nvSpPr>
         <p:spPr>
           <a:xfrm>
-            <a:off x="548640" y="1463040"/>
-            <a:ext cx="3474720" cy="502920"/>
-          </a:xfrm>
-          <a:prstGeom prst="rect">
-            <a:avLst/>
-          </a:prstGeom>
-          <a:noFill/>
-          <a:ln/>
-        </p:spPr>
-        <p:txBody>
-          <a:bodyPr wrap="square" lIns="0" tIns="0" rIns="0" bIns="0" rtlCol="0" anchor="t"/>
-          <a:lstStyle/>
-          <a:p>
-            <a:pPr indent="0" marL="0">
-              <a:buNone/>
-            </a:pPr>
-            <a:r>
-              <a:rPr lang="en-US" sz="2200" b="1" dirty="0">
-                <a:solidFill>
-                  <a:schemeClr val="accent3"/>
-                </a:solidFill>
-              </a:rPr>
-              <a:t>Now (Nov 2026)</a:t>
-            </a:r>
-            <a:endParaRPr lang="en-US" sz="2200" dirty="0"/>
-          </a:p>
-        </p:txBody>
-      </p:sp>
-      <p:sp>
-        <p:nvSpPr>
-          <p:cNvPr id="5" name="Text 2"/>
-          <p:cNvSpPr txBox="1"/>
-          <p:nvPr/>
-        </p:nvSpPr>
-        <p:spPr>
-          <a:xfrm>
-            <a:off x="548640" y="2103120"/>
-            <a:ext cx="3474720" cy="3291840"/>
-          </a:xfrm>
-          <a:prstGeom prst="rect">
-            <a:avLst/>
-          </a:prstGeom>
-          <a:noFill/>
-          <a:ln/>
-        </p:spPr>
-        <p:txBody>
-          <a:bodyPr wrap="square" lIns="0" tIns="0" rIns="0" bIns="0" rtlCol="0" anchor="t"/>
-          <a:lstStyle/>
-          <a:p>
-            <a:pPr marL="342900" indent="-342900">
-              <a:spcAft>
-                <a:spcPts val="800"/>
-              </a:spcAft>
-              <a:buSzPct val="100000"/>
-              <a:buChar char="•"/>
-            </a:pPr>
-            <a:r>
-              <a:rPr lang="en-US" sz="1600" dirty="0">
-                <a:solidFill>
-                  <a:schemeClr val="bg1"/>
-                </a:solidFill>
-              </a:rPr>
-              <a:t>Intake rule and bug fields (X1)</a:t>
-            </a:r>
-            <a:endParaRPr lang="en-US" sz="1600" dirty="0"/>
-          </a:p>
-          <a:p>
-            <a:pPr marL="342900" indent="-342900">
-              <a:spcAft>
-                <a:spcPts val="800"/>
-              </a:spcAft>
-              <a:buSzPct val="100000"/>
-              <a:buChar char="•"/>
-            </a:pPr>
-            <a:r>
-              <a:rPr lang="en-US" sz="1600" dirty="0">
-                <a:solidFill>
-                  <a:schemeClr val="bg1"/>
-                </a:solidFill>
-              </a:rPr>
-              <a:t>Sonar required everywhere</a:t>
-            </a:r>
-            <a:endParaRPr lang="en-US" sz="1600" dirty="0"/>
-          </a:p>
-          <a:p>
-            <a:pPr marL="342900" indent="-342900">
-              <a:spcAft>
-                <a:spcPts val="800"/>
-              </a:spcAft>
-              <a:buSzPct val="100000"/>
-              <a:buChar char="•"/>
-            </a:pPr>
-            <a:r>
-              <a:rPr lang="en-US" sz="1600" dirty="0">
-                <a:solidFill>
-                  <a:schemeClr val="bg1"/>
-                </a:solidFill>
-              </a:rPr>
-              <a:t>Mutation score visible, not blocking</a:t>
-            </a:r>
-            <a:endParaRPr lang="en-US" sz="1600" dirty="0"/>
-          </a:p>
-          <a:p>
-            <a:pPr marL="342900" indent="-342900">
-              <a:spcAft>
-                <a:spcPts val="800"/>
-              </a:spcAft>
-              <a:buSzPct val="100000"/>
-              <a:buChar char="•"/>
-            </a:pPr>
-            <a:r>
-              <a:rPr lang="en-US" sz="1600" dirty="0">
-                <a:solidFill>
-                  <a:schemeClr val="bg1"/>
-                </a:solidFill>
-              </a:rPr>
-              <a:t>Go/No-Go with data</a:t>
-            </a:r>
-            <a:endParaRPr lang="en-US" sz="1600" dirty="0"/>
-          </a:p>
-          <a:p>
-            <a:pPr marL="342900" indent="-342900">
-              <a:spcAft>
-                <a:spcPts val="800"/>
-              </a:spcAft>
-              <a:buSzPct val="100000"/>
-              <a:buChar char="•"/>
-            </a:pPr>
-            <a:r>
-              <a:rPr lang="en-US" sz="1600" dirty="0">
-                <a:solidFill>
-                  <a:schemeClr val="bg1"/>
-                </a:solidFill>
-              </a:rPr>
-              <a:t>Correctness monitor in shadow (X2)</a:t>
-            </a:r>
-            <a:endParaRPr lang="en-US" sz="1600" dirty="0"/>
-          </a:p>
-        </p:txBody>
-      </p:sp>
-      <p:sp>
-        <p:nvSpPr>
-          <p:cNvPr id="6" name="Text 3"/>
-          <p:cNvSpPr txBox="1"/>
-          <p:nvPr/>
-        </p:nvSpPr>
-        <p:spPr>
-          <a:xfrm>
-            <a:off x="4297680" y="1463040"/>
-            <a:ext cx="3474720" cy="502920"/>
-          </a:xfrm>
-          <a:prstGeom prst="rect">
-            <a:avLst/>
-          </a:prstGeom>
-          <a:noFill/>
-          <a:ln/>
-        </p:spPr>
-        <p:txBody>
-          <a:bodyPr wrap="square" lIns="0" tIns="0" rIns="0" bIns="0" rtlCol="0" anchor="t"/>
-          <a:lstStyle/>
-          <a:p>
-            <a:pPr indent="0" marL="0">
-              <a:buNone/>
-            </a:pPr>
-            <a:r>
-              <a:rPr lang="en-US" sz="2200" b="1" dirty="0">
-                <a:solidFill>
-                  <a:schemeClr val="accent3"/>
-                </a:solidFill>
-              </a:rPr>
-              <a:t>Q1 2027</a:t>
-            </a:r>
-            <a:endParaRPr lang="en-US" sz="2200" dirty="0"/>
-          </a:p>
-        </p:txBody>
-      </p:sp>
-      <p:sp>
-        <p:nvSpPr>
-          <p:cNvPr id="7" name="Text 4"/>
-          <p:cNvSpPr txBox="1"/>
-          <p:nvPr/>
-        </p:nvSpPr>
-        <p:spPr>
-          <a:xfrm>
-            <a:off x="4297680" y="2103120"/>
-            <a:ext cx="3474720" cy="3291840"/>
-          </a:xfrm>
-          <a:prstGeom prst="rect">
-            <a:avLst/>
-          </a:prstGeom>
-          <a:noFill/>
-          <a:ln/>
-        </p:spPr>
-        <p:txBody>
-          <a:bodyPr wrap="square" lIns="0" tIns="0" rIns="0" bIns="0" rtlCol="0" anchor="t"/>
-          <a:lstStyle/>
-          <a:p>
-            <a:pPr marL="342900" indent="-342900">
-              <a:spcAft>
-                <a:spcPts val="800"/>
-              </a:spcAft>
-              <a:buSzPct val="100000"/>
-              <a:buChar char="•"/>
-            </a:pPr>
-            <a:r>
-              <a:rPr lang="en-US" sz="1600" dirty="0">
-                <a:solidFill>
-                  <a:schemeClr val="bg1"/>
-                </a:solidFill>
-              </a:rPr>
-              <a:t>Hotspot PR rules (X3)</a:t>
-            </a:r>
-            <a:endParaRPr lang="en-US" sz="1600" dirty="0"/>
-          </a:p>
-          <a:p>
-            <a:pPr marL="342900" indent="-342900">
-              <a:spcAft>
-                <a:spcPts val="800"/>
-              </a:spcAft>
-              <a:buSzPct val="100000"/>
-              <a:buChar char="•"/>
-            </a:pPr>
-            <a:r>
-              <a:rPr lang="en-US" sz="1600" dirty="0">
-                <a:solidFill>
-                  <a:schemeClr val="bg1"/>
-                </a:solidFill>
-              </a:rPr>
-              <a:t>Bug-fix review (X4)</a:t>
-            </a:r>
-            <a:endParaRPr lang="en-US" sz="1600" dirty="0"/>
-          </a:p>
-          <a:p>
-            <a:pPr marL="342900" indent="-342900">
-              <a:spcAft>
-                <a:spcPts val="800"/>
-              </a:spcAft>
-              <a:buSzPct val="100000"/>
-              <a:buChar char="•"/>
-            </a:pPr>
-            <a:r>
-              <a:rPr lang="en-US" sz="1600" dirty="0">
-                <a:solidFill>
-                  <a:schemeClr val="bg1"/>
-                </a:solidFill>
-              </a:rPr>
-              <a:t>Expectation-gap triage (X5)</a:t>
-            </a:r>
-            <a:endParaRPr lang="en-US" sz="1600" dirty="0"/>
-          </a:p>
-          <a:p>
-            <a:pPr marL="342900" indent="-342900">
-              <a:spcAft>
-                <a:spcPts val="800"/>
-              </a:spcAft>
-              <a:buSzPct val="100000"/>
-              <a:buChar char="•"/>
-            </a:pPr>
-            <a:r>
-              <a:rPr lang="en-US" sz="1600" dirty="0">
-                <a:solidFill>
-                  <a:schemeClr val="bg1"/>
-                </a:solidFill>
-              </a:rPr>
-              <a:t>Monthly pod review</a:t>
-            </a:r>
-            <a:endParaRPr lang="en-US" sz="1600" dirty="0"/>
-          </a:p>
-        </p:txBody>
-      </p:sp>
-      <p:sp>
-        <p:nvSpPr>
-          <p:cNvPr id="8" name="Text 5"/>
-          <p:cNvSpPr txBox="1"/>
-          <p:nvPr/>
-        </p:nvSpPr>
-        <p:spPr>
-          <a:xfrm>
-            <a:off x="8046720" y="1463040"/>
-            <a:ext cx="3474720" cy="502920"/>
-          </a:xfrm>
-          <a:prstGeom prst="rect">
-            <a:avLst/>
-          </a:prstGeom>
-          <a:noFill/>
-          <a:ln/>
-        </p:spPr>
-        <p:txBody>
-          <a:bodyPr wrap="square" lIns="0" tIns="0" rIns="0" bIns="0" rtlCol="0" anchor="t"/>
-          <a:lstStyle/>
-          <a:p>
-            <a:pPr indent="0" marL="0">
-              <a:buNone/>
-            </a:pPr>
-            <a:r>
-              <a:rPr lang="en-US" sz="2200" b="1" dirty="0">
-                <a:solidFill>
-                  <a:schemeClr val="accent3"/>
-                </a:solidFill>
-              </a:rPr>
-              <a:t>April 2027 and after</a:t>
-            </a:r>
-            <a:endParaRPr lang="en-US" sz="2200" dirty="0"/>
-          </a:p>
-        </p:txBody>
-      </p:sp>
-      <p:sp>
-        <p:nvSpPr>
-          <p:cNvPr id="9" name="Text 6"/>
-          <p:cNvSpPr txBox="1"/>
-          <p:nvPr/>
-        </p:nvSpPr>
-        <p:spPr>
-          <a:xfrm>
-            <a:off x="8046720" y="2103120"/>
-            <a:ext cx="3474720" cy="3291840"/>
-          </a:xfrm>
-          <a:prstGeom prst="rect">
-            <a:avLst/>
-          </a:prstGeom>
-          <a:noFill/>
-          <a:ln/>
-        </p:spPr>
-        <p:txBody>
-          <a:bodyPr wrap="square" lIns="0" tIns="0" rIns="0" bIns="0" rtlCol="0" anchor="t"/>
-          <a:lstStyle/>
-          <a:p>
-            <a:pPr marL="342900" indent="-342900">
-              <a:spcAft>
-                <a:spcPts val="800"/>
-              </a:spcAft>
-              <a:buSzPct val="100000"/>
-              <a:buChar char="•"/>
-            </a:pPr>
-            <a:r>
-              <a:rPr lang="en-US" sz="1600" dirty="0">
-                <a:solidFill>
-                  <a:schemeClr val="bg1"/>
-                </a:solidFill>
-              </a:rPr>
-              <a:t>Results vs control pods</a:t>
-            </a:r>
-            <a:endParaRPr lang="en-US" sz="1600" dirty="0"/>
-          </a:p>
-          <a:p>
-            <a:pPr marL="342900" indent="-342900">
-              <a:spcAft>
-                <a:spcPts val="800"/>
-              </a:spcAft>
-              <a:buSzPct val="100000"/>
-              <a:buChar char="•"/>
-            </a:pPr>
-            <a:r>
-              <a:rPr lang="en-US" sz="1600" dirty="0">
-                <a:solidFill>
-                  <a:schemeClr val="bg1"/>
-                </a:solidFill>
-              </a:rPr>
-              <a:t>Decide what blocks, per tier</a:t>
-            </a:r>
-            <a:endParaRPr lang="en-US" sz="1600" dirty="0"/>
-          </a:p>
-          <a:p>
-            <a:pPr marL="342900" indent="-342900">
-              <a:spcAft>
-                <a:spcPts val="800"/>
-              </a:spcAft>
-              <a:buSzPct val="100000"/>
-              <a:buChar char="•"/>
-            </a:pPr>
-            <a:r>
-              <a:rPr lang="en-US" sz="1600" dirty="0">
-                <a:solidFill>
-                  <a:schemeClr val="bg1"/>
-                </a:solidFill>
-              </a:rPr>
-              <a:t>Spread proven practices to all pods</a:t>
-            </a:r>
-            <a:endParaRPr lang="en-US" sz="1600" dirty="0"/>
-          </a:p>
-          <a:p>
-            <a:pPr marL="342900" indent="-342900">
-              <a:spcAft>
-                <a:spcPts val="800"/>
-              </a:spcAft>
-              <a:buSzPct val="100000"/>
-              <a:buChar char="•"/>
-            </a:pPr>
-            <a:r>
-              <a:rPr lang="en-US" sz="1600" dirty="0">
-                <a:solidFill>
-                  <a:schemeClr val="bg1"/>
-                </a:solidFill>
-              </a:rPr>
-              <a:t>Decide on RIA, mutation, harness</a:t>
-            </a:r>
-            <a:endParaRPr lang="en-US" sz="1600" dirty="0"/>
-          </a:p>
-        </p:txBody>
-      </p:sp>
-      <p:sp>
-        <p:nvSpPr>
-          <p:cNvPr id="10" name="Text 7"/>
-          <p:cNvSpPr txBox="1"/>
-          <p:nvPr/>
-        </p:nvSpPr>
-        <p:spPr>
-          <a:xfrm>
-            <a:off x="548640" y="5760720"/>
-            <a:ext cx="11064240" cy="457200"/>
+            <a:off x="548640" y="5943600"/>
+            <a:ext cx="11064240" cy="365760"/>
           </a:xfrm>
           <a:prstGeom prst="rect">
             <a:avLst/>
@@ -4558,10 +6498,10 @@
             <a:r>
               <a:rPr lang="en-US" sz="1400" dirty="0">
                 <a:solidFill>
-                  <a:schemeClr val="accent6"/>
+                  <a:schemeClr val="tx2"/>
                 </a:solidFill>
               </a:rPr>
-              <a:t>Open limits: owner map missing, no SME validation yet, ServiceNow data pending.</a:t>
+              <a:t>Rule: a pod outside its own range for 2 months gets an investigation, not a punishment.</a:t>
             </a:r>
             <a:endParaRPr lang="en-US" sz="1400" dirty="0"/>
           </a:p>
@@ -4597,7 +6537,7 @@
             <a:lvl1pPr>
               <a:defRPr sz="1000">
                 <a:solidFill>
-                  <a:schemeClr val="accent6"/>
+                  <a:schemeClr val="tx2"/>
                 </a:solidFill>
               </a:defRPr>
             </a:lvl1pPr>
@@ -4669,6 +6609,558 @@
                   <a:schemeClr val="bg1"/>
                 </a:solidFill>
               </a:rPr>
+              <a:t>Prove before we block: timeline</a:t>
+            </a:r>
+            <a:endParaRPr lang="en-US" sz="3000" dirty="0"/>
+          </a:p>
+        </p:txBody>
+      </p:sp>
+      <p:sp>
+        <p:nvSpPr>
+          <p:cNvPr id="4" name="Text 1"/>
+          <p:cNvSpPr txBox="1"/>
+          <p:nvPr/>
+        </p:nvSpPr>
+        <p:spPr>
+          <a:xfrm>
+            <a:off x="548640" y="1463040"/>
+            <a:ext cx="3474720" cy="502920"/>
+          </a:xfrm>
+          <a:prstGeom prst="rect">
+            <a:avLst/>
+          </a:prstGeom>
+          <a:noFill/>
+          <a:ln/>
+        </p:spPr>
+        <p:txBody>
+          <a:bodyPr wrap="square" lIns="0" tIns="0" rIns="0" bIns="0" rtlCol="0" anchor="t"/>
+          <a:lstStyle/>
+          <a:p>
+            <a:pPr indent="0" marL="0">
+              <a:buNone/>
+            </a:pPr>
+            <a:r>
+              <a:rPr lang="en-US" sz="2200" b="1" dirty="0">
+                <a:solidFill>
+                  <a:schemeClr val="accent3"/>
+                </a:solidFill>
+              </a:rPr>
+              <a:t>Now (Nov 2026)</a:t>
+            </a:r>
+            <a:endParaRPr lang="en-US" sz="2200" dirty="0"/>
+          </a:p>
+        </p:txBody>
+      </p:sp>
+      <p:sp>
+        <p:nvSpPr>
+          <p:cNvPr id="5" name="Text 2"/>
+          <p:cNvSpPr txBox="1"/>
+          <p:nvPr/>
+        </p:nvSpPr>
+        <p:spPr>
+          <a:xfrm>
+            <a:off x="548640" y="2103120"/>
+            <a:ext cx="3474720" cy="3291840"/>
+          </a:xfrm>
+          <a:prstGeom prst="rect">
+            <a:avLst/>
+          </a:prstGeom>
+          <a:noFill/>
+          <a:ln/>
+        </p:spPr>
+        <p:txBody>
+          <a:bodyPr wrap="square" lIns="0" tIns="0" rIns="0" bIns="0" rtlCol="0" anchor="t"/>
+          <a:lstStyle/>
+          <a:p>
+            <a:pPr marL="342900" indent="-342900">
+              <a:spcAft>
+                <a:spcPts val="800"/>
+              </a:spcAft>
+              <a:buSzPct val="100000"/>
+              <a:buChar char="•"/>
+            </a:pPr>
+            <a:r>
+              <a:rPr lang="en-US" sz="1600" dirty="0">
+                <a:solidFill>
+                  <a:schemeClr val="bg1"/>
+                </a:solidFill>
+              </a:rPr>
+              <a:t>Intake rule and bug fields (X1)</a:t>
+            </a:r>
+            <a:endParaRPr lang="en-US" sz="1600" dirty="0"/>
+          </a:p>
+          <a:p>
+            <a:pPr marL="342900" indent="-342900">
+              <a:spcAft>
+                <a:spcPts val="800"/>
+              </a:spcAft>
+              <a:buSzPct val="100000"/>
+              <a:buChar char="•"/>
+            </a:pPr>
+            <a:r>
+              <a:rPr lang="en-US" sz="1600" dirty="0">
+                <a:solidFill>
+                  <a:schemeClr val="bg1"/>
+                </a:solidFill>
+              </a:rPr>
+              <a:t>Sonar required everywhere</a:t>
+            </a:r>
+            <a:endParaRPr lang="en-US" sz="1600" dirty="0"/>
+          </a:p>
+          <a:p>
+            <a:pPr marL="342900" indent="-342900">
+              <a:spcAft>
+                <a:spcPts val="800"/>
+              </a:spcAft>
+              <a:buSzPct val="100000"/>
+              <a:buChar char="•"/>
+            </a:pPr>
+            <a:r>
+              <a:rPr lang="en-US" sz="1600" dirty="0">
+                <a:solidFill>
+                  <a:schemeClr val="bg1"/>
+                </a:solidFill>
+              </a:rPr>
+              <a:t>Mutation score visible, not blocking</a:t>
+            </a:r>
+            <a:endParaRPr lang="en-US" sz="1600" dirty="0"/>
+          </a:p>
+          <a:p>
+            <a:pPr marL="342900" indent="-342900">
+              <a:spcAft>
+                <a:spcPts val="800"/>
+              </a:spcAft>
+              <a:buSzPct val="100000"/>
+              <a:buChar char="•"/>
+            </a:pPr>
+            <a:r>
+              <a:rPr lang="en-US" sz="1600" dirty="0">
+                <a:solidFill>
+                  <a:schemeClr val="bg1"/>
+                </a:solidFill>
+              </a:rPr>
+              <a:t>Go/No-Go with data</a:t>
+            </a:r>
+            <a:endParaRPr lang="en-US" sz="1600" dirty="0"/>
+          </a:p>
+          <a:p>
+            <a:pPr marL="342900" indent="-342900">
+              <a:spcAft>
+                <a:spcPts val="800"/>
+              </a:spcAft>
+              <a:buSzPct val="100000"/>
+              <a:buChar char="•"/>
+            </a:pPr>
+            <a:r>
+              <a:rPr lang="en-US" sz="1600" dirty="0">
+                <a:solidFill>
+                  <a:schemeClr val="bg1"/>
+                </a:solidFill>
+              </a:rPr>
+              <a:t>Correctness monitor in shadow (X2)</a:t>
+            </a:r>
+            <a:endParaRPr lang="en-US" sz="1600" dirty="0"/>
+          </a:p>
+        </p:txBody>
+      </p:sp>
+      <p:sp>
+        <p:nvSpPr>
+          <p:cNvPr id="6" name="Text 3"/>
+          <p:cNvSpPr txBox="1"/>
+          <p:nvPr/>
+        </p:nvSpPr>
+        <p:spPr>
+          <a:xfrm>
+            <a:off x="4297680" y="1463040"/>
+            <a:ext cx="3474720" cy="502920"/>
+          </a:xfrm>
+          <a:prstGeom prst="rect">
+            <a:avLst/>
+          </a:prstGeom>
+          <a:noFill/>
+          <a:ln/>
+        </p:spPr>
+        <p:txBody>
+          <a:bodyPr wrap="square" lIns="0" tIns="0" rIns="0" bIns="0" rtlCol="0" anchor="t"/>
+          <a:lstStyle/>
+          <a:p>
+            <a:pPr indent="0" marL="0">
+              <a:buNone/>
+            </a:pPr>
+            <a:r>
+              <a:rPr lang="en-US" sz="2200" b="1" dirty="0">
+                <a:solidFill>
+                  <a:schemeClr val="accent3"/>
+                </a:solidFill>
+              </a:rPr>
+              <a:t>Q1 2027</a:t>
+            </a:r>
+            <a:endParaRPr lang="en-US" sz="2200" dirty="0"/>
+          </a:p>
+        </p:txBody>
+      </p:sp>
+      <p:sp>
+        <p:nvSpPr>
+          <p:cNvPr id="7" name="Text 4"/>
+          <p:cNvSpPr txBox="1"/>
+          <p:nvPr/>
+        </p:nvSpPr>
+        <p:spPr>
+          <a:xfrm>
+            <a:off x="4297680" y="2103120"/>
+            <a:ext cx="3474720" cy="3291840"/>
+          </a:xfrm>
+          <a:prstGeom prst="rect">
+            <a:avLst/>
+          </a:prstGeom>
+          <a:noFill/>
+          <a:ln/>
+        </p:spPr>
+        <p:txBody>
+          <a:bodyPr wrap="square" lIns="0" tIns="0" rIns="0" bIns="0" rtlCol="0" anchor="t"/>
+          <a:lstStyle/>
+          <a:p>
+            <a:pPr marL="342900" indent="-342900">
+              <a:spcAft>
+                <a:spcPts val="800"/>
+              </a:spcAft>
+              <a:buSzPct val="100000"/>
+              <a:buChar char="•"/>
+            </a:pPr>
+            <a:r>
+              <a:rPr lang="en-US" sz="1600" dirty="0">
+                <a:solidFill>
+                  <a:schemeClr val="bg1"/>
+                </a:solidFill>
+              </a:rPr>
+              <a:t>Hotspot PR rules (X3)</a:t>
+            </a:r>
+            <a:endParaRPr lang="en-US" sz="1600" dirty="0"/>
+          </a:p>
+          <a:p>
+            <a:pPr marL="342900" indent="-342900">
+              <a:spcAft>
+                <a:spcPts val="800"/>
+              </a:spcAft>
+              <a:buSzPct val="100000"/>
+              <a:buChar char="•"/>
+            </a:pPr>
+            <a:r>
+              <a:rPr lang="en-US" sz="1600" dirty="0">
+                <a:solidFill>
+                  <a:schemeClr val="bg1"/>
+                </a:solidFill>
+              </a:rPr>
+              <a:t>Bug-fix review (X4)</a:t>
+            </a:r>
+            <a:endParaRPr lang="en-US" sz="1600" dirty="0"/>
+          </a:p>
+          <a:p>
+            <a:pPr marL="342900" indent="-342900">
+              <a:spcAft>
+                <a:spcPts val="800"/>
+              </a:spcAft>
+              <a:buSzPct val="100000"/>
+              <a:buChar char="•"/>
+            </a:pPr>
+            <a:r>
+              <a:rPr lang="en-US" sz="1600" dirty="0">
+                <a:solidFill>
+                  <a:schemeClr val="bg1"/>
+                </a:solidFill>
+              </a:rPr>
+              <a:t>Expectation-gap triage (X5)</a:t>
+            </a:r>
+            <a:endParaRPr lang="en-US" sz="1600" dirty="0"/>
+          </a:p>
+          <a:p>
+            <a:pPr marL="342900" indent="-342900">
+              <a:spcAft>
+                <a:spcPts val="800"/>
+              </a:spcAft>
+              <a:buSzPct val="100000"/>
+              <a:buChar char="•"/>
+            </a:pPr>
+            <a:r>
+              <a:rPr lang="en-US" sz="1600" dirty="0">
+                <a:solidFill>
+                  <a:schemeClr val="bg1"/>
+                </a:solidFill>
+              </a:rPr>
+              <a:t>Monthly pod review</a:t>
+            </a:r>
+            <a:endParaRPr lang="en-US" sz="1600" dirty="0"/>
+          </a:p>
+        </p:txBody>
+      </p:sp>
+      <p:sp>
+        <p:nvSpPr>
+          <p:cNvPr id="8" name="Text 5"/>
+          <p:cNvSpPr txBox="1"/>
+          <p:nvPr/>
+        </p:nvSpPr>
+        <p:spPr>
+          <a:xfrm>
+            <a:off x="8046720" y="1463040"/>
+            <a:ext cx="3474720" cy="502920"/>
+          </a:xfrm>
+          <a:prstGeom prst="rect">
+            <a:avLst/>
+          </a:prstGeom>
+          <a:noFill/>
+          <a:ln/>
+        </p:spPr>
+        <p:txBody>
+          <a:bodyPr wrap="square" lIns="0" tIns="0" rIns="0" bIns="0" rtlCol="0" anchor="t"/>
+          <a:lstStyle/>
+          <a:p>
+            <a:pPr indent="0" marL="0">
+              <a:buNone/>
+            </a:pPr>
+            <a:r>
+              <a:rPr lang="en-US" sz="2200" b="1" dirty="0">
+                <a:solidFill>
+                  <a:schemeClr val="accent3"/>
+                </a:solidFill>
+              </a:rPr>
+              <a:t>April 2027 and after</a:t>
+            </a:r>
+            <a:endParaRPr lang="en-US" sz="2200" dirty="0"/>
+          </a:p>
+        </p:txBody>
+      </p:sp>
+      <p:sp>
+        <p:nvSpPr>
+          <p:cNvPr id="9" name="Text 6"/>
+          <p:cNvSpPr txBox="1"/>
+          <p:nvPr/>
+        </p:nvSpPr>
+        <p:spPr>
+          <a:xfrm>
+            <a:off x="8046720" y="2103120"/>
+            <a:ext cx="3474720" cy="3291840"/>
+          </a:xfrm>
+          <a:prstGeom prst="rect">
+            <a:avLst/>
+          </a:prstGeom>
+          <a:noFill/>
+          <a:ln/>
+        </p:spPr>
+        <p:txBody>
+          <a:bodyPr wrap="square" lIns="0" tIns="0" rIns="0" bIns="0" rtlCol="0" anchor="t"/>
+          <a:lstStyle/>
+          <a:p>
+            <a:pPr marL="342900" indent="-342900">
+              <a:spcAft>
+                <a:spcPts val="800"/>
+              </a:spcAft>
+              <a:buSzPct val="100000"/>
+              <a:buChar char="•"/>
+            </a:pPr>
+            <a:r>
+              <a:rPr lang="en-US" sz="1600" dirty="0">
+                <a:solidFill>
+                  <a:schemeClr val="bg1"/>
+                </a:solidFill>
+              </a:rPr>
+              <a:t>Results vs control pods</a:t>
+            </a:r>
+            <a:endParaRPr lang="en-US" sz="1600" dirty="0"/>
+          </a:p>
+          <a:p>
+            <a:pPr marL="342900" indent="-342900">
+              <a:spcAft>
+                <a:spcPts val="800"/>
+              </a:spcAft>
+              <a:buSzPct val="100000"/>
+              <a:buChar char="•"/>
+            </a:pPr>
+            <a:r>
+              <a:rPr lang="en-US" sz="1600" dirty="0">
+                <a:solidFill>
+                  <a:schemeClr val="bg1"/>
+                </a:solidFill>
+              </a:rPr>
+              <a:t>Decide what blocks, per tier</a:t>
+            </a:r>
+            <a:endParaRPr lang="en-US" sz="1600" dirty="0"/>
+          </a:p>
+          <a:p>
+            <a:pPr marL="342900" indent="-342900">
+              <a:spcAft>
+                <a:spcPts val="800"/>
+              </a:spcAft>
+              <a:buSzPct val="100000"/>
+              <a:buChar char="•"/>
+            </a:pPr>
+            <a:r>
+              <a:rPr lang="en-US" sz="1600" dirty="0">
+                <a:solidFill>
+                  <a:schemeClr val="bg1"/>
+                </a:solidFill>
+              </a:rPr>
+              <a:t>Spread proven practices to all pods</a:t>
+            </a:r>
+            <a:endParaRPr lang="en-US" sz="1600" dirty="0"/>
+          </a:p>
+          <a:p>
+            <a:pPr marL="342900" indent="-342900">
+              <a:spcAft>
+                <a:spcPts val="800"/>
+              </a:spcAft>
+              <a:buSzPct val="100000"/>
+              <a:buChar char="•"/>
+            </a:pPr>
+            <a:r>
+              <a:rPr lang="en-US" sz="1600" dirty="0">
+                <a:solidFill>
+                  <a:schemeClr val="bg1"/>
+                </a:solidFill>
+              </a:rPr>
+              <a:t>Decide on RIA, mutation, harness</a:t>
+            </a:r>
+            <a:endParaRPr lang="en-US" sz="1600" dirty="0"/>
+          </a:p>
+        </p:txBody>
+      </p:sp>
+      <p:sp>
+        <p:nvSpPr>
+          <p:cNvPr id="10" name="Text 7"/>
+          <p:cNvSpPr txBox="1"/>
+          <p:nvPr/>
+        </p:nvSpPr>
+        <p:spPr>
+          <a:xfrm>
+            <a:off x="548640" y="5760720"/>
+            <a:ext cx="11064240" cy="457200"/>
+          </a:xfrm>
+          <a:prstGeom prst="rect">
+            <a:avLst/>
+          </a:prstGeom>
+          <a:noFill/>
+          <a:ln/>
+        </p:spPr>
+        <p:txBody>
+          <a:bodyPr wrap="square" lIns="0" tIns="0" rIns="0" bIns="0" rtlCol="0" anchor="t"/>
+          <a:lstStyle/>
+          <a:p>
+            <a:pPr indent="0" marL="0">
+              <a:buNone/>
+            </a:pPr>
+            <a:r>
+              <a:rPr lang="en-US" sz="1400" dirty="0">
+                <a:solidFill>
+                  <a:schemeClr val="accent6"/>
+                </a:solidFill>
+              </a:rPr>
+              <a:t>Open limits: owner map missing, no SME validation yet, ServiceNow data pending.</a:t>
+            </a:r>
+            <a:endParaRPr lang="en-US" sz="1400" dirty="0"/>
+          </a:p>
+        </p:txBody>
+      </p:sp>
+      <p:sp>
+        <p:nvSpPr>
+          <p:cNvPr id="25" name="Slide Number Placeholder 0"/>
+          <p:cNvSpPr>
+            <a:spLocks noGrp="1"/>
+          </p:cNvSpPr>
+          <p:nvPr>
+            <p:ph type="sldNum" sz="quarter" idx="4294967295"/>
+          </p:nvPr>
+        </p:nvSpPr>
+        <p:spPr>
+          <a:xfrm>
+            <a:off x="11247120" y="6400800"/>
+            <a:ext cx="457200" cy="274320"/>
+          </a:xfrm>
+          <a:prstGeom prst="rect">
+            <a:avLst/>
+          </a:prstGeom>
+          <a:extLst>
+            <a:ext uri="{C572A759-6A51-4108-AA02-DFA0A04FC94B}">
+              <ma14:wrappingTextBoxFlag xmlns:ma14="http://schemas.microsoft.com/office/mac/drawingml/2011/main" val="0"/>
+            </a:ext>
+          </a:extLst>
+        </p:spPr>
+        <p:txBody>
+          <a:bodyPr/>
+          <a:lstStyle>
+            <a:lvl1pPr>
+              <a:defRPr sz="1000">
+                <a:solidFill>
+                  <a:schemeClr val="accent6"/>
+                </a:solidFill>
+              </a:defRPr>
+            </a:lvl1pPr>
+          </a:lstStyle>
+          <a:p>
+            <a:pPr algn="r"/>
+            <a:fld id="{F7021451-1387-4CA6-816F-3879F97B5CBC}" type="slidenum">
+              <a:rPr b="0" lang="en-US"/>
+              <a:t>12</a:t>
+            </a:fld>
+            <a:endParaRPr lang="en-US"/>
+          </a:p>
+        </p:txBody>
+      </p:sp>
+    </p:spTree>
+  </p:cSld>
+  <p:clrMapOvr>
+    <a:masterClrMapping/>
+  </p:clrMapOvr>
+</p:sld>
+</file>
+
+<file path=ppt/slides/slide13.xml><?xml version="1.0" encoding="utf-8"?>
+<p:sld xmlns:a="http://schemas.openxmlformats.org/drawingml/2006/main" xmlns:r="http://schemas.openxmlformats.org/officeDocument/2006/relationships" xmlns:p="http://schemas.openxmlformats.org/presentationml/2006/main">
+  <p:cSld name="Slide 13">
+    <p:spTree>
+      <p:nvGrpSpPr>
+        <p:cNvPr id="1" name=""/>
+        <p:cNvGrpSpPr/>
+        <p:nvPr/>
+      </p:nvGrpSpPr>
+      <p:grpSpPr>
+        <a:xfrm>
+          <a:off x="0" y="0"/>
+          <a:ext cx="0" cy="0"/>
+          <a:chOff x="0" y="0"/>
+          <a:chExt cx="0" cy="0"/>
+        </a:xfrm>
+      </p:grpSpPr>
+      <p:sp>
+        <p:nvSpPr>
+          <p:cNvPr id="2" name="Text 0"/>
+          <p:cNvSpPr/>
+          <p:nvPr>
+            <p:ph idx="100" type="title" hasCustomPrompt="1"/>
+          </p:nvPr>
+        </p:nvSpPr>
+        <p:spPr>
+          <a:xfrm>
+            <a:off x="548640" y="320040"/>
+            <a:ext cx="11064240" cy="868680"/>
+          </a:xfrm>
+          <a:prstGeom prst="rect">
+            <a:avLst/>
+          </a:prstGeom>
+          <a:noFill/>
+          <a:ln/>
+        </p:spPr>
+        <p:txBody>
+          <a:bodyPr wrap="square" lIns="0" tIns="0" rIns="0" bIns="0" rtlCol="0" anchor="ctr"/>
+          <a:lstStyle/>
+          <a:p>
+            <a:pPr algn="l" indent="0" marL="0">
+              <a:buNone/>
+            </a:pPr>
+            <a:r>
+              <a:rPr lang="en-US" sz="3000" b="1" dirty="0">
+                <a:solidFill>
+                  <a:schemeClr val="bg1"/>
+                </a:solidFill>
+              </a:rPr>
               <a:t>What we ask from you today</a:t>
             </a:r>
             <a:endParaRPr lang="en-US" sz="3000" dirty="0"/>
@@ -5246,7 +7738,7 @@
             <a:pPr algn="r"/>
             <a:fld id="{F7021451-1387-4CA6-816F-3879F97B5CBC}" type="slidenum">
               <a:rPr b="0" lang="en-US"/>
-              <a:t>12</a:t>
+              <a:t>13</a:t>
             </a:fld>
             <a:endParaRPr lang="en-US"/>
           </a:p>

--- a/docs/05-summary/offsite-deck.pptx
+++ b/docs/05-summary/offsite-deck.pptx
@@ -119,7 +119,7 @@
   <p:extLst>
     <p:ext uri="{521415D9-36F7-43E2-AB2F-B90AF26B5E84}">
       <p14:sectionLst xmlns:p14="http://schemas.microsoft.com/office/powerpoint/2010/main">
-        <p14:section name="Offsite" id="{ab3695ca-2d81-9aa6-81e2-d614f8c1c4ad}">
+        <p14:section name="Offsite" id="{04d68d3a-e502-9024-8840-3581a16358b5}">
           <p14:sldIdLst>
             <p14:sldId id="256"/>
             <p14:sldId id="257"/>
@@ -8436,7 +8436,7 @@
                   <a:schemeClr val="tx1"/>
                 </a:solidFill>
               </a:rPr>
-              <a:t>Risk sits in large changes in hotspot code, not in AI</a:t>
+              <a:t>Risk follows change size in hotspot code, not AI use</a:t>
             </a:r>
             <a:endParaRPr lang="en-US" sz="3000" dirty="0"/>
           </a:p>
@@ -9729,7 +9729,7 @@
         </p:nvSpPr>
         <p:spPr>
           <a:xfrm>
-            <a:off x="548640" y="5669280"/>
+            <a:off x="548640" y="5852160"/>
             <a:ext cx="11064240" cy="457200"/>
           </a:xfrm>
           <a:prstGeom prst="rect">
